--- a/slides/第04回_プログラムが動くまで.pptx
+++ b/slides/第04回_プログラムが動くまで.pptx
@@ -3726,7 +3726,7 @@
         <p:spPr>
           <a:xfrm>
             <a:off x="685800" y="1481328"/>
-            <a:ext cx="10789920" cy="621792"/>
+            <a:ext cx="10789920" cy="566928"/>
           </a:xfrm>
           <a:prstGeom prst="rect">
             <a:avLst/>
@@ -3767,7 +3767,7 @@
         </p:nvSpPr>
         <p:spPr>
           <a:xfrm>
-            <a:off x="685800" y="2185416"/>
+            <a:off x="685800" y="2130552"/>
             <a:ext cx="10789920" cy="713232"/>
           </a:xfrm>
           <a:prstGeom prst="roundRect">
@@ -3794,7 +3794,7 @@
         </p:nvSpPr>
         <p:spPr>
           <a:xfrm>
-            <a:off x="914400" y="2340864"/>
+            <a:off x="914400" y="2286000"/>
             <a:ext cx="10332720" cy="402336"/>
           </a:xfrm>
           <a:prstGeom prst="rect">
@@ -3833,7 +3833,7 @@
         </p:nvSpPr>
         <p:spPr>
           <a:xfrm>
-            <a:off x="1188720" y="3145536"/>
+            <a:off x="1188720" y="3090672"/>
             <a:ext cx="4572000" cy="457200"/>
           </a:xfrm>
           <a:prstGeom prst="rect">
@@ -3872,7 +3872,7 @@
         </p:nvSpPr>
         <p:spPr>
           <a:xfrm>
-            <a:off x="5943600" y="3273552"/>
+            <a:off x="5943600" y="3218688"/>
             <a:ext cx="640080" cy="201168"/>
           </a:xfrm>
           <a:prstGeom prst="rightArrow">
@@ -3892,7 +3892,7 @@
         </p:nvSpPr>
         <p:spPr>
           <a:xfrm>
-            <a:off x="6766560" y="3145536"/>
+            <a:off x="6766560" y="3090672"/>
             <a:ext cx="4206240" cy="457200"/>
           </a:xfrm>
           <a:prstGeom prst="rect">
@@ -3931,7 +3931,7 @@
         </p:nvSpPr>
         <p:spPr>
           <a:xfrm>
-            <a:off x="1188720" y="3767328"/>
+            <a:off x="1188720" y="3712464"/>
             <a:ext cx="4572000" cy="457200"/>
           </a:xfrm>
           <a:prstGeom prst="rect">
@@ -3970,7 +3970,7 @@
         </p:nvSpPr>
         <p:spPr>
           <a:xfrm>
-            <a:off x="5943600" y="3895344"/>
+            <a:off x="5943600" y="3840480"/>
             <a:ext cx="640080" cy="201168"/>
           </a:xfrm>
           <a:prstGeom prst="rightArrow">
@@ -3990,7 +3990,7 @@
         </p:nvSpPr>
         <p:spPr>
           <a:xfrm>
-            <a:off x="6766560" y="3767328"/>
+            <a:off x="6766560" y="3712464"/>
             <a:ext cx="4206240" cy="457200"/>
           </a:xfrm>
           <a:prstGeom prst="rect">
@@ -4029,7 +4029,7 @@
         </p:nvSpPr>
         <p:spPr>
           <a:xfrm>
-            <a:off x="1188720" y="4389120"/>
+            <a:off x="1188720" y="4334256"/>
             <a:ext cx="4572000" cy="457200"/>
           </a:xfrm>
           <a:prstGeom prst="rect">
@@ -4068,7 +4068,7 @@
         </p:nvSpPr>
         <p:spPr>
           <a:xfrm>
-            <a:off x="5943600" y="4517136"/>
+            <a:off x="5943600" y="4462272"/>
             <a:ext cx="640080" cy="201168"/>
           </a:xfrm>
           <a:prstGeom prst="rightArrow">
@@ -4088,7 +4088,7 @@
         </p:nvSpPr>
         <p:spPr>
           <a:xfrm>
-            <a:off x="6766560" y="4389120"/>
+            <a:off x="6766560" y="4334256"/>
             <a:ext cx="4206240" cy="457200"/>
           </a:xfrm>
           <a:prstGeom prst="rect">
@@ -4127,7 +4127,7 @@
         </p:nvSpPr>
         <p:spPr>
           <a:xfrm>
-            <a:off x="685800" y="5102352"/>
+            <a:off x="685800" y="5047488"/>
             <a:ext cx="10789920" cy="457200"/>
           </a:xfrm>
           <a:prstGeom prst="rect">
@@ -5299,45 +5299,6 @@
           </a:prstGeom>
         </p:spPr>
       </p:pic>
-      <p:sp>
-        <p:nvSpPr>
-          <p:cNvPr id="6" name="Text 3"/>
-          <p:cNvSpPr/>
-          <p:nvPr/>
-        </p:nvSpPr>
-        <p:spPr>
-          <a:xfrm>
-            <a:off x="685800" y="5585678"/>
-            <a:ext cx="10789920" cy="365760"/>
-          </a:xfrm>
-          <a:prstGeom prst="rect">
-            <a:avLst/>
-          </a:prstGeom>
-          <a:noFill/>
-          <a:ln/>
-        </p:spPr>
-        <p:txBody>
-          <a:bodyPr wrap="square" lIns="0" tIns="0" rIns="0" bIns="0" rtlCol="0" anchor="ctr"/>
-          <a:lstStyle/>
-          <a:p>
-            <a:pPr algn="ctr" indent="0" marL="0">
-              <a:buNone/>
-            </a:pPr>
-            <a:r>
-              <a:rPr lang="en-US" sz="1500" dirty="0">
-                <a:solidFill>
-                  <a:srgbClr val="16191D"/>
-                </a:solidFill>
-                <a:latin typeface="Yu Gothic" pitchFamily="34" charset="0"/>
-                <a:ea typeface="Yu Gothic" pitchFamily="34" charset="-122"/>
-                <a:cs typeface="Yu Gothic" pitchFamily="34" charset="-120"/>
-              </a:rPr>
-              <a:t>リンクの段階で、複数の .o とライブラリが1つに合流する。</a:t>
-            </a:r>
-            <a:endParaRPr lang="en-US" sz="1500" dirty="0"/>
-          </a:p>
-        </p:txBody>
-      </p:sp>
     </p:spTree>
   </p:cSld>
   <p:clrMapOvr>
@@ -16227,45 +16188,6 @@
           </a:prstGeom>
         </p:spPr>
       </p:pic>
-      <p:sp>
-        <p:nvSpPr>
-          <p:cNvPr id="7" name="Text 4"/>
-          <p:cNvSpPr/>
-          <p:nvPr/>
-        </p:nvSpPr>
-        <p:spPr>
-          <a:xfrm>
-            <a:off x="685800" y="5687568"/>
-            <a:ext cx="10789920" cy="365760"/>
-          </a:xfrm>
-          <a:prstGeom prst="rect">
-            <a:avLst/>
-          </a:prstGeom>
-          <a:noFill/>
-          <a:ln/>
-        </p:spPr>
-        <p:txBody>
-          <a:bodyPr wrap="square" lIns="0" tIns="0" rIns="0" bIns="0" rtlCol="0" anchor="ctr"/>
-          <a:lstStyle/>
-          <a:p>
-            <a:pPr algn="ctr" indent="0" marL="0">
-              <a:buNone/>
-            </a:pPr>
-            <a:r>
-              <a:rPr lang="en-US" sz="1500" dirty="0">
-                <a:solidFill>
-                  <a:srgbClr val="16191D"/>
-                </a:solidFill>
-                <a:latin typeface="Yu Gothic" pitchFamily="34" charset="0"/>
-                <a:ea typeface="Yu Gothic" pitchFamily="34" charset="-122"/>
-                <a:cs typeface="Yu Gothic" pitchFamily="34" charset="-120"/>
-              </a:rPr>
-              <a:t>どこまでを実行前に済ませるかが違う。</a:t>
-            </a:r>
-            <a:endParaRPr lang="en-US" sz="1500" dirty="0"/>
-          </a:p>
-        </p:txBody>
-      </p:sp>
     </p:spTree>
   </p:cSld>
   <p:clrMapOvr>

--- a/slides/第04回_プログラムが動くまで.pptx
+++ b/slides/第04回_プログラムが動くまで.pptx
@@ -26,9 +26,13 @@
     <p:sldId id="274" r:id="rId20"/>
     <p:sldId id="275" r:id="rId21"/>
     <p:sldId id="276" r:id="rId22"/>
+    <p:sldId id="277" r:id="rId23"/>
+    <p:sldId id="278" r:id="rId24"/>
+    <p:sldId id="279" r:id="rId25"/>
+    <p:sldId id="280" r:id="rId26"/>
   </p:sldIdLst>
   <p:notesMasterIdLst>
-    <p:notesMasterId r:id="rId23"/>
+    <p:notesMasterId r:id="rId27"/>
   </p:notesMasterIdLst>
   <p:sldSz cx="12192000" cy="6858000"/>
   <p:notesSz cx="6858000" cy="12192000"/>
@@ -1690,6 +1694,358 @@
             <a:fld id="{F7021451-1387-4CA6-816F-3879F97B5CBC}" type="slidenum">
               <a:rPr lang="en-US"/>
               <a:t>21</a:t>
+            </a:fld>
+            <a:endParaRPr lang="en-US"/>
+          </a:p>
+        </p:txBody>
+      </p:sp>
+    </p:spTree>
+    <p:extLst>
+      <p:ext uri="{BB962C8B-B14F-4D97-AF65-F5344CB8AC3E}">
+        <p14:creationId xmlns:p14="http://schemas.microsoft.com/office/powerpoint/2010/main" val="1024086991"/>
+      </p:ext>
+    </p:extLst>
+  </p:cSld>
+  <p:clrMapOvr>
+    <a:masterClrMapping/>
+  </p:clrMapOvr>
+</p:notes>
+</file>
+
+<file path=ppt/notesSlides/notesSlide22.xml><?xml version="1.0" encoding="utf-8"?>
+<p:notes xmlns:a="http://schemas.openxmlformats.org/drawingml/2006/main" xmlns:r="http://schemas.openxmlformats.org/officeDocument/2006/relationships" xmlns:p="http://schemas.openxmlformats.org/presentationml/2006/main">
+  <p:cSld>
+    <p:spTree>
+      <p:nvGrpSpPr>
+        <p:cNvPr id="1" name=""/>
+        <p:cNvGrpSpPr/>
+        <p:nvPr/>
+      </p:nvGrpSpPr>
+      <p:grpSpPr>
+        <a:xfrm>
+          <a:off x="0" y="0"/>
+          <a:ext cx="0" cy="0"/>
+          <a:chOff x="0" y="0"/>
+          <a:chExt cx="0" cy="0"/>
+        </a:xfrm>
+      </p:grpSpPr>
+      <p:sp>
+        <p:nvSpPr>
+          <p:cNvPr id="2" name="Slide Image Placeholder 1"/>
+          <p:cNvSpPr>
+            <a:spLocks noGrp="1" noRot="1" noChangeAspect="1"/>
+          </p:cNvSpPr>
+          <p:nvPr>
+            <p:ph type="sldImg"/>
+          </p:nvPr>
+        </p:nvSpPr>
+        <p:spPr/>
+      </p:sp>
+      <p:sp>
+        <p:nvSpPr>
+          <p:cNvPr id="3" name="Notes Placeholder 2"/>
+          <p:cNvSpPr>
+            <a:spLocks noGrp="1"/>
+          </p:cNvSpPr>
+          <p:nvPr>
+            <p:ph type="body" idx="1"/>
+          </p:nvPr>
+        </p:nvSpPr>
+        <p:spPr/>
+        <p:txBody>
+          <a:bodyPr/>
+          <a:lstStyle/>
+          <a:p>
+            <a:r>
+              <a:rPr lang="en-US" dirty="0"/>
+              <a:t/>
+            </a:r>
+            <a:endParaRPr lang="en-US" dirty="0"/>
+          </a:p>
+        </p:txBody>
+      </p:sp>
+      <p:sp>
+        <p:nvSpPr>
+          <p:cNvPr id="4" name="Slide Number Placeholder 3"/>
+          <p:cNvSpPr>
+            <a:spLocks noGrp="1"/>
+          </p:cNvSpPr>
+          <p:nvPr>
+            <p:ph type="sldNum" sz="quarter" idx="10"/>
+          </p:nvPr>
+        </p:nvSpPr>
+        <p:spPr/>
+        <p:txBody>
+          <a:bodyPr/>
+          <a:lstStyle/>
+          <a:p>
+            <a:fld id="{F7021451-1387-4CA6-816F-3879F97B5CBC}" type="slidenum">
+              <a:rPr lang="en-US"/>
+              <a:t>22</a:t>
+            </a:fld>
+            <a:endParaRPr lang="en-US"/>
+          </a:p>
+        </p:txBody>
+      </p:sp>
+    </p:spTree>
+    <p:extLst>
+      <p:ext uri="{BB962C8B-B14F-4D97-AF65-F5344CB8AC3E}">
+        <p14:creationId xmlns:p14="http://schemas.microsoft.com/office/powerpoint/2010/main" val="1024086991"/>
+      </p:ext>
+    </p:extLst>
+  </p:cSld>
+  <p:clrMapOvr>
+    <a:masterClrMapping/>
+  </p:clrMapOvr>
+</p:notes>
+</file>
+
+<file path=ppt/notesSlides/notesSlide23.xml><?xml version="1.0" encoding="utf-8"?>
+<p:notes xmlns:a="http://schemas.openxmlformats.org/drawingml/2006/main" xmlns:r="http://schemas.openxmlformats.org/officeDocument/2006/relationships" xmlns:p="http://schemas.openxmlformats.org/presentationml/2006/main">
+  <p:cSld>
+    <p:spTree>
+      <p:nvGrpSpPr>
+        <p:cNvPr id="1" name=""/>
+        <p:cNvGrpSpPr/>
+        <p:nvPr/>
+      </p:nvGrpSpPr>
+      <p:grpSpPr>
+        <a:xfrm>
+          <a:off x="0" y="0"/>
+          <a:ext cx="0" cy="0"/>
+          <a:chOff x="0" y="0"/>
+          <a:chExt cx="0" cy="0"/>
+        </a:xfrm>
+      </p:grpSpPr>
+      <p:sp>
+        <p:nvSpPr>
+          <p:cNvPr id="2" name="Slide Image Placeholder 1"/>
+          <p:cNvSpPr>
+            <a:spLocks noGrp="1" noRot="1" noChangeAspect="1"/>
+          </p:cNvSpPr>
+          <p:nvPr>
+            <p:ph type="sldImg"/>
+          </p:nvPr>
+        </p:nvSpPr>
+        <p:spPr/>
+      </p:sp>
+      <p:sp>
+        <p:nvSpPr>
+          <p:cNvPr id="3" name="Notes Placeholder 2"/>
+          <p:cNvSpPr>
+            <a:spLocks noGrp="1"/>
+          </p:cNvSpPr>
+          <p:nvPr>
+            <p:ph type="body" idx="1"/>
+          </p:nvPr>
+        </p:nvSpPr>
+        <p:spPr/>
+        <p:txBody>
+          <a:bodyPr/>
+          <a:lstStyle/>
+          <a:p>
+            <a:r>
+              <a:rPr lang="en-US" dirty="0"/>
+              <a:t/>
+            </a:r>
+            <a:endParaRPr lang="en-US" dirty="0"/>
+          </a:p>
+        </p:txBody>
+      </p:sp>
+      <p:sp>
+        <p:nvSpPr>
+          <p:cNvPr id="4" name="Slide Number Placeholder 3"/>
+          <p:cNvSpPr>
+            <a:spLocks noGrp="1"/>
+          </p:cNvSpPr>
+          <p:nvPr>
+            <p:ph type="sldNum" sz="quarter" idx="10"/>
+          </p:nvPr>
+        </p:nvSpPr>
+        <p:spPr/>
+        <p:txBody>
+          <a:bodyPr/>
+          <a:lstStyle/>
+          <a:p>
+            <a:fld id="{F7021451-1387-4CA6-816F-3879F97B5CBC}" type="slidenum">
+              <a:rPr lang="en-US"/>
+              <a:t>23</a:t>
+            </a:fld>
+            <a:endParaRPr lang="en-US"/>
+          </a:p>
+        </p:txBody>
+      </p:sp>
+    </p:spTree>
+    <p:extLst>
+      <p:ext uri="{BB962C8B-B14F-4D97-AF65-F5344CB8AC3E}">
+        <p14:creationId xmlns:p14="http://schemas.microsoft.com/office/powerpoint/2010/main" val="1024086991"/>
+      </p:ext>
+    </p:extLst>
+  </p:cSld>
+  <p:clrMapOvr>
+    <a:masterClrMapping/>
+  </p:clrMapOvr>
+</p:notes>
+</file>
+
+<file path=ppt/notesSlides/notesSlide24.xml><?xml version="1.0" encoding="utf-8"?>
+<p:notes xmlns:a="http://schemas.openxmlformats.org/drawingml/2006/main" xmlns:r="http://schemas.openxmlformats.org/officeDocument/2006/relationships" xmlns:p="http://schemas.openxmlformats.org/presentationml/2006/main">
+  <p:cSld>
+    <p:spTree>
+      <p:nvGrpSpPr>
+        <p:cNvPr id="1" name=""/>
+        <p:cNvGrpSpPr/>
+        <p:nvPr/>
+      </p:nvGrpSpPr>
+      <p:grpSpPr>
+        <a:xfrm>
+          <a:off x="0" y="0"/>
+          <a:ext cx="0" cy="0"/>
+          <a:chOff x="0" y="0"/>
+          <a:chExt cx="0" cy="0"/>
+        </a:xfrm>
+      </p:grpSpPr>
+      <p:sp>
+        <p:nvSpPr>
+          <p:cNvPr id="2" name="Slide Image Placeholder 1"/>
+          <p:cNvSpPr>
+            <a:spLocks noGrp="1" noRot="1" noChangeAspect="1"/>
+          </p:cNvSpPr>
+          <p:nvPr>
+            <p:ph type="sldImg"/>
+          </p:nvPr>
+        </p:nvSpPr>
+        <p:spPr/>
+      </p:sp>
+      <p:sp>
+        <p:nvSpPr>
+          <p:cNvPr id="3" name="Notes Placeholder 2"/>
+          <p:cNvSpPr>
+            <a:spLocks noGrp="1"/>
+          </p:cNvSpPr>
+          <p:nvPr>
+            <p:ph type="body" idx="1"/>
+          </p:nvPr>
+        </p:nvSpPr>
+        <p:spPr/>
+        <p:txBody>
+          <a:bodyPr/>
+          <a:lstStyle/>
+          <a:p>
+            <a:r>
+              <a:rPr lang="en-US" dirty="0"/>
+              <a:t/>
+            </a:r>
+            <a:endParaRPr lang="en-US" dirty="0"/>
+          </a:p>
+        </p:txBody>
+      </p:sp>
+      <p:sp>
+        <p:nvSpPr>
+          <p:cNvPr id="4" name="Slide Number Placeholder 3"/>
+          <p:cNvSpPr>
+            <a:spLocks noGrp="1"/>
+          </p:cNvSpPr>
+          <p:nvPr>
+            <p:ph type="sldNum" sz="quarter" idx="10"/>
+          </p:nvPr>
+        </p:nvSpPr>
+        <p:spPr/>
+        <p:txBody>
+          <a:bodyPr/>
+          <a:lstStyle/>
+          <a:p>
+            <a:fld id="{F7021451-1387-4CA6-816F-3879F97B5CBC}" type="slidenum">
+              <a:rPr lang="en-US"/>
+              <a:t>24</a:t>
+            </a:fld>
+            <a:endParaRPr lang="en-US"/>
+          </a:p>
+        </p:txBody>
+      </p:sp>
+    </p:spTree>
+    <p:extLst>
+      <p:ext uri="{BB962C8B-B14F-4D97-AF65-F5344CB8AC3E}">
+        <p14:creationId xmlns:p14="http://schemas.microsoft.com/office/powerpoint/2010/main" val="1024086991"/>
+      </p:ext>
+    </p:extLst>
+  </p:cSld>
+  <p:clrMapOvr>
+    <a:masterClrMapping/>
+  </p:clrMapOvr>
+</p:notes>
+</file>
+
+<file path=ppt/notesSlides/notesSlide25.xml><?xml version="1.0" encoding="utf-8"?>
+<p:notes xmlns:a="http://schemas.openxmlformats.org/drawingml/2006/main" xmlns:r="http://schemas.openxmlformats.org/officeDocument/2006/relationships" xmlns:p="http://schemas.openxmlformats.org/presentationml/2006/main">
+  <p:cSld>
+    <p:spTree>
+      <p:nvGrpSpPr>
+        <p:cNvPr id="1" name=""/>
+        <p:cNvGrpSpPr/>
+        <p:nvPr/>
+      </p:nvGrpSpPr>
+      <p:grpSpPr>
+        <a:xfrm>
+          <a:off x="0" y="0"/>
+          <a:ext cx="0" cy="0"/>
+          <a:chOff x="0" y="0"/>
+          <a:chExt cx="0" cy="0"/>
+        </a:xfrm>
+      </p:grpSpPr>
+      <p:sp>
+        <p:nvSpPr>
+          <p:cNvPr id="2" name="Slide Image Placeholder 1"/>
+          <p:cNvSpPr>
+            <a:spLocks noGrp="1" noRot="1" noChangeAspect="1"/>
+          </p:cNvSpPr>
+          <p:nvPr>
+            <p:ph type="sldImg"/>
+          </p:nvPr>
+        </p:nvSpPr>
+        <p:spPr/>
+      </p:sp>
+      <p:sp>
+        <p:nvSpPr>
+          <p:cNvPr id="3" name="Notes Placeholder 2"/>
+          <p:cNvSpPr>
+            <a:spLocks noGrp="1"/>
+          </p:cNvSpPr>
+          <p:nvPr>
+            <p:ph type="body" idx="1"/>
+          </p:nvPr>
+        </p:nvSpPr>
+        <p:spPr/>
+        <p:txBody>
+          <a:bodyPr/>
+          <a:lstStyle/>
+          <a:p>
+            <a:r>
+              <a:rPr lang="en-US" dirty="0"/>
+              <a:t/>
+            </a:r>
+            <a:endParaRPr lang="en-US" dirty="0"/>
+          </a:p>
+        </p:txBody>
+      </p:sp>
+      <p:sp>
+        <p:nvSpPr>
+          <p:cNvPr id="4" name="Slide Number Placeholder 3"/>
+          <p:cNvSpPr>
+            <a:spLocks noGrp="1"/>
+          </p:cNvSpPr>
+          <p:nvPr>
+            <p:ph type="sldNum" sz="quarter" idx="10"/>
+          </p:nvPr>
+        </p:nvSpPr>
+        <p:spPr/>
+        <p:txBody>
+          <a:bodyPr/>
+          <a:lstStyle/>
+          <a:p>
+            <a:fld id="{F7021451-1387-4CA6-816F-3879F97B5CBC}" type="slidenum">
+              <a:rPr lang="en-US"/>
+              <a:t>25</a:t>
             </a:fld>
             <a:endParaRPr lang="en-US"/>
           </a:p>
@@ -11415,6 +11771,909 @@
     <p:bg>
       <p:bgPr>
         <a:solidFill>
+          <a:srgbClr val="16191D"/>
+        </a:solidFill>
+      </p:bgPr>
+    </p:bg>
+    <p:spTree>
+      <p:nvGrpSpPr>
+        <p:cNvPr id="1" name=""/>
+        <p:cNvGrpSpPr/>
+        <p:nvPr/>
+      </p:nvGrpSpPr>
+      <p:grpSpPr>
+        <a:xfrm>
+          <a:off x="0" y="0"/>
+          <a:ext cx="0" cy="0"/>
+          <a:chOff x="0" y="0"/>
+          <a:chExt cx="0" cy="0"/>
+        </a:xfrm>
+      </p:grpSpPr>
+      <p:sp>
+        <p:nvSpPr>
+          <p:cNvPr id="2" name="Text 0"/>
+          <p:cNvSpPr/>
+          <p:nvPr/>
+        </p:nvSpPr>
+        <p:spPr>
+          <a:xfrm>
+            <a:off x="822960" y="2194560"/>
+            <a:ext cx="2743200" cy="822960"/>
+          </a:xfrm>
+          <a:prstGeom prst="rect">
+            <a:avLst/>
+          </a:prstGeom>
+          <a:noFill/>
+          <a:ln/>
+        </p:spPr>
+        <p:txBody>
+          <a:bodyPr wrap="square" lIns="0" tIns="0" rIns="0" bIns="0" rtlCol="0" anchor="ctr"/>
+          <a:lstStyle/>
+          <a:p>
+            <a:pPr indent="0" marL="0">
+              <a:buNone/>
+            </a:pPr>
+            <a:r>
+              <a:rPr lang="en-US" sz="5600" b="1" dirty="0">
+                <a:solidFill>
+                  <a:srgbClr val="2E3A4A"/>
+                </a:solidFill>
+                <a:latin typeface="Yu Gothic" pitchFamily="34" charset="0"/>
+                <a:ea typeface="Yu Gothic" pitchFamily="34" charset="-122"/>
+                <a:cs typeface="Yu Gothic" pitchFamily="34" charset="-120"/>
+              </a:rPr>
+              <a:t>4.5</a:t>
+            </a:r>
+            <a:endParaRPr lang="en-US" sz="5600" dirty="0"/>
+          </a:p>
+        </p:txBody>
+      </p:sp>
+      <p:sp>
+        <p:nvSpPr>
+          <p:cNvPr id="3" name="Text 1"/>
+          <p:cNvSpPr/>
+          <p:nvPr/>
+        </p:nvSpPr>
+        <p:spPr>
+          <a:xfrm>
+            <a:off x="822960" y="3063240"/>
+            <a:ext cx="10607040" cy="822960"/>
+          </a:xfrm>
+          <a:prstGeom prst="rect">
+            <a:avLst/>
+          </a:prstGeom>
+          <a:noFill/>
+          <a:ln/>
+        </p:spPr>
+        <p:txBody>
+          <a:bodyPr wrap="square" lIns="0" tIns="0" rIns="0" bIns="0" rtlCol="0" anchor="ctr"/>
+          <a:lstStyle/>
+          <a:p>
+            <a:pPr indent="0" marL="0">
+              <a:buNone/>
+            </a:pPr>
+            <a:r>
+              <a:rPr lang="en-US" sz="3800" b="1" dirty="0">
+                <a:solidFill>
+                  <a:srgbClr val="FFFFFF"/>
+                </a:solidFill>
+                <a:latin typeface="Yu Gothic" pitchFamily="34" charset="0"/>
+                <a:ea typeface="Yu Gothic" pitchFamily="34" charset="-122"/>
+                <a:cs typeface="Yu Gothic" pitchFamily="34" charset="-120"/>
+              </a:rPr>
+              <a:t>書いたあと、動くと確かめるまで</a:t>
+            </a:r>
+            <a:endParaRPr lang="en-US" sz="3800" dirty="0"/>
+          </a:p>
+        </p:txBody>
+      </p:sp>
+      <p:sp>
+        <p:nvSpPr>
+          <p:cNvPr id="4" name="Text 2"/>
+          <p:cNvSpPr/>
+          <p:nvPr/>
+        </p:nvSpPr>
+        <p:spPr>
+          <a:xfrm>
+            <a:off x="822960" y="3977640"/>
+            <a:ext cx="10607040" cy="457200"/>
+          </a:xfrm>
+          <a:prstGeom prst="rect">
+            <a:avLst/>
+          </a:prstGeom>
+          <a:noFill/>
+          <a:ln/>
+        </p:spPr>
+        <p:txBody>
+          <a:bodyPr wrap="square" lIns="0" tIns="0" rIns="0" bIns="0" rtlCol="0" anchor="ctr"/>
+          <a:lstStyle/>
+          <a:p>
+            <a:pPr indent="0" marL="0">
+              <a:buNone/>
+            </a:pPr>
+            <a:r>
+              <a:rPr lang="en-US" sz="1700" dirty="0">
+                <a:solidFill>
+                  <a:srgbClr val="9AA3B0"/>
+                </a:solidFill>
+                <a:latin typeface="Yu Gothic" pitchFamily="34" charset="0"/>
+                <a:ea typeface="Yu Gothic" pitchFamily="34" charset="-122"/>
+                <a:cs typeface="Yu Gothic" pitchFamily="34" charset="-120"/>
+              </a:rPr>
+              <a:t>ここからは人間の側の仕組みである</a:t>
+            </a:r>
+            <a:endParaRPr lang="en-US" sz="1700" dirty="0"/>
+          </a:p>
+        </p:txBody>
+      </p:sp>
+      <p:sp>
+        <p:nvSpPr>
+          <p:cNvPr id="5" name="Shape 3"/>
+          <p:cNvSpPr/>
+          <p:nvPr/>
+        </p:nvSpPr>
+        <p:spPr>
+          <a:xfrm>
+            <a:off x="548640" y="5852160"/>
+            <a:ext cx="265176" cy="182880"/>
+          </a:xfrm>
+          <a:prstGeom prst="rect">
+            <a:avLst/>
+          </a:prstGeom>
+          <a:solidFill>
+            <a:srgbClr val="FFFFFF">
+              <a:alpha val="12000"/>
+            </a:srgbClr>
+          </a:solidFill>
+          <a:ln w="7620">
+            <a:solidFill>
+              <a:srgbClr val="6AB0F3">
+                <a:alpha val="45000"/>
+              </a:srgbClr>
+            </a:solidFill>
+            <a:prstDash val="solid"/>
+          </a:ln>
+        </p:spPr>
+      </p:sp>
+      <p:sp>
+        <p:nvSpPr>
+          <p:cNvPr id="6" name="Shape 4"/>
+          <p:cNvSpPr/>
+          <p:nvPr/>
+        </p:nvSpPr>
+        <p:spPr>
+          <a:xfrm>
+            <a:off x="850392" y="5852160"/>
+            <a:ext cx="265176" cy="182880"/>
+          </a:xfrm>
+          <a:prstGeom prst="rect">
+            <a:avLst/>
+          </a:prstGeom>
+          <a:solidFill>
+            <a:srgbClr val="FFFFFF">
+              <a:alpha val="12000"/>
+            </a:srgbClr>
+          </a:solidFill>
+          <a:ln w="7620">
+            <a:solidFill>
+              <a:srgbClr val="6AB0F3">
+                <a:alpha val="45000"/>
+              </a:srgbClr>
+            </a:solidFill>
+            <a:prstDash val="solid"/>
+          </a:ln>
+        </p:spPr>
+      </p:sp>
+      <p:sp>
+        <p:nvSpPr>
+          <p:cNvPr id="7" name="Shape 5"/>
+          <p:cNvSpPr/>
+          <p:nvPr/>
+        </p:nvSpPr>
+        <p:spPr>
+          <a:xfrm>
+            <a:off x="1152144" y="5852160"/>
+            <a:ext cx="265176" cy="182880"/>
+          </a:xfrm>
+          <a:prstGeom prst="rect">
+            <a:avLst/>
+          </a:prstGeom>
+          <a:solidFill>
+            <a:srgbClr val="FFFFFF">
+              <a:alpha val="12000"/>
+            </a:srgbClr>
+          </a:solidFill>
+          <a:ln w="7620">
+            <a:solidFill>
+              <a:srgbClr val="6AB0F3">
+                <a:alpha val="45000"/>
+              </a:srgbClr>
+            </a:solidFill>
+            <a:prstDash val="solid"/>
+          </a:ln>
+        </p:spPr>
+      </p:sp>
+      <p:sp>
+        <p:nvSpPr>
+          <p:cNvPr id="8" name="Shape 6"/>
+          <p:cNvSpPr/>
+          <p:nvPr/>
+        </p:nvSpPr>
+        <p:spPr>
+          <a:xfrm>
+            <a:off x="1453896" y="5852160"/>
+            <a:ext cx="265176" cy="182880"/>
+          </a:xfrm>
+          <a:prstGeom prst="rect">
+            <a:avLst/>
+          </a:prstGeom>
+          <a:solidFill>
+            <a:srgbClr val="FFFFFF">
+              <a:alpha val="12000"/>
+            </a:srgbClr>
+          </a:solidFill>
+          <a:ln w="7620">
+            <a:solidFill>
+              <a:srgbClr val="6AB0F3">
+                <a:alpha val="45000"/>
+              </a:srgbClr>
+            </a:solidFill>
+            <a:prstDash val="solid"/>
+          </a:ln>
+        </p:spPr>
+      </p:sp>
+      <p:sp>
+        <p:nvSpPr>
+          <p:cNvPr id="9" name="Shape 7"/>
+          <p:cNvSpPr/>
+          <p:nvPr/>
+        </p:nvSpPr>
+        <p:spPr>
+          <a:xfrm>
+            <a:off x="1755648" y="5852160"/>
+            <a:ext cx="265176" cy="182880"/>
+          </a:xfrm>
+          <a:prstGeom prst="rect">
+            <a:avLst/>
+          </a:prstGeom>
+          <a:solidFill>
+            <a:srgbClr val="FFFFFF">
+              <a:alpha val="12000"/>
+            </a:srgbClr>
+          </a:solidFill>
+          <a:ln w="7620">
+            <a:solidFill>
+              <a:srgbClr val="6AB0F3">
+                <a:alpha val="45000"/>
+              </a:srgbClr>
+            </a:solidFill>
+            <a:prstDash val="solid"/>
+          </a:ln>
+        </p:spPr>
+      </p:sp>
+      <p:sp>
+        <p:nvSpPr>
+          <p:cNvPr id="10" name="Shape 8"/>
+          <p:cNvSpPr/>
+          <p:nvPr/>
+        </p:nvSpPr>
+        <p:spPr>
+          <a:xfrm>
+            <a:off x="2057400" y="5852160"/>
+            <a:ext cx="265176" cy="182880"/>
+          </a:xfrm>
+          <a:prstGeom prst="rect">
+            <a:avLst/>
+          </a:prstGeom>
+          <a:solidFill>
+            <a:srgbClr val="FFFFFF">
+              <a:alpha val="12000"/>
+            </a:srgbClr>
+          </a:solidFill>
+          <a:ln w="7620">
+            <a:solidFill>
+              <a:srgbClr val="6AB0F3">
+                <a:alpha val="45000"/>
+              </a:srgbClr>
+            </a:solidFill>
+            <a:prstDash val="solid"/>
+          </a:ln>
+        </p:spPr>
+      </p:sp>
+      <p:sp>
+        <p:nvSpPr>
+          <p:cNvPr id="11" name="Shape 9"/>
+          <p:cNvSpPr/>
+          <p:nvPr/>
+        </p:nvSpPr>
+        <p:spPr>
+          <a:xfrm>
+            <a:off x="2359152" y="5852160"/>
+            <a:ext cx="265176" cy="182880"/>
+          </a:xfrm>
+          <a:prstGeom prst="rect">
+            <a:avLst/>
+          </a:prstGeom>
+          <a:solidFill>
+            <a:srgbClr val="FFFFFF">
+              <a:alpha val="12000"/>
+            </a:srgbClr>
+          </a:solidFill>
+          <a:ln w="7620">
+            <a:solidFill>
+              <a:srgbClr val="6AB0F3">
+                <a:alpha val="45000"/>
+              </a:srgbClr>
+            </a:solidFill>
+            <a:prstDash val="solid"/>
+          </a:ln>
+        </p:spPr>
+      </p:sp>
+      <p:sp>
+        <p:nvSpPr>
+          <p:cNvPr id="12" name="Shape 10"/>
+          <p:cNvSpPr/>
+          <p:nvPr/>
+        </p:nvSpPr>
+        <p:spPr>
+          <a:xfrm>
+            <a:off x="2660904" y="5852160"/>
+            <a:ext cx="265176" cy="182880"/>
+          </a:xfrm>
+          <a:prstGeom prst="rect">
+            <a:avLst/>
+          </a:prstGeom>
+          <a:solidFill>
+            <a:srgbClr val="FFFFFF">
+              <a:alpha val="12000"/>
+            </a:srgbClr>
+          </a:solidFill>
+          <a:ln w="7620">
+            <a:solidFill>
+              <a:srgbClr val="6AB0F3">
+                <a:alpha val="45000"/>
+              </a:srgbClr>
+            </a:solidFill>
+            <a:prstDash val="solid"/>
+          </a:ln>
+        </p:spPr>
+      </p:sp>
+      <p:sp>
+        <p:nvSpPr>
+          <p:cNvPr id="13" name="Shape 11"/>
+          <p:cNvSpPr/>
+          <p:nvPr/>
+        </p:nvSpPr>
+        <p:spPr>
+          <a:xfrm>
+            <a:off x="2962656" y="5852160"/>
+            <a:ext cx="265176" cy="182880"/>
+          </a:xfrm>
+          <a:prstGeom prst="rect">
+            <a:avLst/>
+          </a:prstGeom>
+          <a:solidFill>
+            <a:srgbClr val="FFFFFF">
+              <a:alpha val="12000"/>
+            </a:srgbClr>
+          </a:solidFill>
+          <a:ln w="7620">
+            <a:solidFill>
+              <a:srgbClr val="6AB0F3">
+                <a:alpha val="45000"/>
+              </a:srgbClr>
+            </a:solidFill>
+            <a:prstDash val="solid"/>
+          </a:ln>
+        </p:spPr>
+      </p:sp>
+      <p:sp>
+        <p:nvSpPr>
+          <p:cNvPr id="14" name="Shape 12"/>
+          <p:cNvSpPr/>
+          <p:nvPr/>
+        </p:nvSpPr>
+        <p:spPr>
+          <a:xfrm>
+            <a:off x="3264408" y="5852160"/>
+            <a:ext cx="265176" cy="182880"/>
+          </a:xfrm>
+          <a:prstGeom prst="rect">
+            <a:avLst/>
+          </a:prstGeom>
+          <a:solidFill>
+            <a:srgbClr val="FFFFFF">
+              <a:alpha val="12000"/>
+            </a:srgbClr>
+          </a:solidFill>
+          <a:ln w="7620">
+            <a:solidFill>
+              <a:srgbClr val="6AB0F3">
+                <a:alpha val="45000"/>
+              </a:srgbClr>
+            </a:solidFill>
+            <a:prstDash val="solid"/>
+          </a:ln>
+        </p:spPr>
+      </p:sp>
+      <p:sp>
+        <p:nvSpPr>
+          <p:cNvPr id="15" name="Shape 13"/>
+          <p:cNvSpPr/>
+          <p:nvPr/>
+        </p:nvSpPr>
+        <p:spPr>
+          <a:xfrm>
+            <a:off x="3566160" y="5852160"/>
+            <a:ext cx="265176" cy="182880"/>
+          </a:xfrm>
+          <a:prstGeom prst="rect">
+            <a:avLst/>
+          </a:prstGeom>
+          <a:solidFill>
+            <a:srgbClr val="FFFFFF">
+              <a:alpha val="12000"/>
+            </a:srgbClr>
+          </a:solidFill>
+          <a:ln w="7620">
+            <a:solidFill>
+              <a:srgbClr val="6AB0F3">
+                <a:alpha val="45000"/>
+              </a:srgbClr>
+            </a:solidFill>
+            <a:prstDash val="solid"/>
+          </a:ln>
+        </p:spPr>
+      </p:sp>
+      <p:sp>
+        <p:nvSpPr>
+          <p:cNvPr id="16" name="Shape 14"/>
+          <p:cNvSpPr/>
+          <p:nvPr/>
+        </p:nvSpPr>
+        <p:spPr>
+          <a:xfrm>
+            <a:off x="3867912" y="5852160"/>
+            <a:ext cx="265176" cy="182880"/>
+          </a:xfrm>
+          <a:prstGeom prst="rect">
+            <a:avLst/>
+          </a:prstGeom>
+          <a:solidFill>
+            <a:srgbClr val="FFFFFF">
+              <a:alpha val="12000"/>
+            </a:srgbClr>
+          </a:solidFill>
+          <a:ln w="7620">
+            <a:solidFill>
+              <a:srgbClr val="6AB0F3">
+                <a:alpha val="45000"/>
+              </a:srgbClr>
+            </a:solidFill>
+            <a:prstDash val="solid"/>
+          </a:ln>
+        </p:spPr>
+      </p:sp>
+      <p:sp>
+        <p:nvSpPr>
+          <p:cNvPr id="17" name="Shape 15"/>
+          <p:cNvSpPr/>
+          <p:nvPr/>
+        </p:nvSpPr>
+        <p:spPr>
+          <a:xfrm>
+            <a:off x="4169664" y="5852160"/>
+            <a:ext cx="265176" cy="182880"/>
+          </a:xfrm>
+          <a:prstGeom prst="rect">
+            <a:avLst/>
+          </a:prstGeom>
+          <a:solidFill>
+            <a:srgbClr val="FFFFFF">
+              <a:alpha val="12000"/>
+            </a:srgbClr>
+          </a:solidFill>
+          <a:ln w="7620">
+            <a:solidFill>
+              <a:srgbClr val="6AB0F3">
+                <a:alpha val="45000"/>
+              </a:srgbClr>
+            </a:solidFill>
+            <a:prstDash val="solid"/>
+          </a:ln>
+        </p:spPr>
+      </p:sp>
+      <p:sp>
+        <p:nvSpPr>
+          <p:cNvPr id="18" name="Shape 16"/>
+          <p:cNvSpPr/>
+          <p:nvPr/>
+        </p:nvSpPr>
+        <p:spPr>
+          <a:xfrm>
+            <a:off x="4471416" y="5852160"/>
+            <a:ext cx="265176" cy="182880"/>
+          </a:xfrm>
+          <a:prstGeom prst="rect">
+            <a:avLst/>
+          </a:prstGeom>
+          <a:solidFill>
+            <a:srgbClr val="FFFFFF">
+              <a:alpha val="12000"/>
+            </a:srgbClr>
+          </a:solidFill>
+          <a:ln w="7620">
+            <a:solidFill>
+              <a:srgbClr val="6AB0F3">
+                <a:alpha val="45000"/>
+              </a:srgbClr>
+            </a:solidFill>
+            <a:prstDash val="solid"/>
+          </a:ln>
+        </p:spPr>
+      </p:sp>
+      <p:sp>
+        <p:nvSpPr>
+          <p:cNvPr id="19" name="Shape 17"/>
+          <p:cNvSpPr/>
+          <p:nvPr/>
+        </p:nvSpPr>
+        <p:spPr>
+          <a:xfrm>
+            <a:off x="4773168" y="5852160"/>
+            <a:ext cx="265176" cy="182880"/>
+          </a:xfrm>
+          <a:prstGeom prst="rect">
+            <a:avLst/>
+          </a:prstGeom>
+          <a:solidFill>
+            <a:srgbClr val="FFFFFF">
+              <a:alpha val="12000"/>
+            </a:srgbClr>
+          </a:solidFill>
+          <a:ln w="7620">
+            <a:solidFill>
+              <a:srgbClr val="6AB0F3">
+                <a:alpha val="45000"/>
+              </a:srgbClr>
+            </a:solidFill>
+            <a:prstDash val="solid"/>
+          </a:ln>
+        </p:spPr>
+      </p:sp>
+      <p:sp>
+        <p:nvSpPr>
+          <p:cNvPr id="20" name="Shape 18"/>
+          <p:cNvSpPr/>
+          <p:nvPr/>
+        </p:nvSpPr>
+        <p:spPr>
+          <a:xfrm>
+            <a:off x="5074920" y="5852160"/>
+            <a:ext cx="265176" cy="182880"/>
+          </a:xfrm>
+          <a:prstGeom prst="rect">
+            <a:avLst/>
+          </a:prstGeom>
+          <a:solidFill>
+            <a:srgbClr val="FFFFFF">
+              <a:alpha val="12000"/>
+            </a:srgbClr>
+          </a:solidFill>
+          <a:ln w="7620">
+            <a:solidFill>
+              <a:srgbClr val="6AB0F3">
+                <a:alpha val="45000"/>
+              </a:srgbClr>
+            </a:solidFill>
+            <a:prstDash val="solid"/>
+          </a:ln>
+        </p:spPr>
+      </p:sp>
+      <p:sp>
+        <p:nvSpPr>
+          <p:cNvPr id="21" name="Shape 19"/>
+          <p:cNvSpPr/>
+          <p:nvPr/>
+        </p:nvSpPr>
+        <p:spPr>
+          <a:xfrm>
+            <a:off x="5376672" y="5852160"/>
+            <a:ext cx="265176" cy="182880"/>
+          </a:xfrm>
+          <a:prstGeom prst="rect">
+            <a:avLst/>
+          </a:prstGeom>
+          <a:solidFill>
+            <a:srgbClr val="FFFFFF">
+              <a:alpha val="12000"/>
+            </a:srgbClr>
+          </a:solidFill>
+          <a:ln w="7620">
+            <a:solidFill>
+              <a:srgbClr val="6AB0F3">
+                <a:alpha val="45000"/>
+              </a:srgbClr>
+            </a:solidFill>
+            <a:prstDash val="solid"/>
+          </a:ln>
+        </p:spPr>
+      </p:sp>
+      <p:sp>
+        <p:nvSpPr>
+          <p:cNvPr id="22" name="Shape 20"/>
+          <p:cNvSpPr/>
+          <p:nvPr/>
+        </p:nvSpPr>
+        <p:spPr>
+          <a:xfrm>
+            <a:off x="5678424" y="5852160"/>
+            <a:ext cx="265176" cy="182880"/>
+          </a:xfrm>
+          <a:prstGeom prst="rect">
+            <a:avLst/>
+          </a:prstGeom>
+          <a:solidFill>
+            <a:srgbClr val="FFFFFF">
+              <a:alpha val="12000"/>
+            </a:srgbClr>
+          </a:solidFill>
+          <a:ln w="7620">
+            <a:solidFill>
+              <a:srgbClr val="6AB0F3">
+                <a:alpha val="45000"/>
+              </a:srgbClr>
+            </a:solidFill>
+            <a:prstDash val="solid"/>
+          </a:ln>
+        </p:spPr>
+      </p:sp>
+      <p:sp>
+        <p:nvSpPr>
+          <p:cNvPr id="23" name="Shape 21"/>
+          <p:cNvSpPr/>
+          <p:nvPr/>
+        </p:nvSpPr>
+        <p:spPr>
+          <a:xfrm>
+            <a:off x="5980176" y="5852160"/>
+            <a:ext cx="265176" cy="182880"/>
+          </a:xfrm>
+          <a:prstGeom prst="rect">
+            <a:avLst/>
+          </a:prstGeom>
+          <a:solidFill>
+            <a:srgbClr val="FFFFFF">
+              <a:alpha val="12000"/>
+            </a:srgbClr>
+          </a:solidFill>
+          <a:ln w="7620">
+            <a:solidFill>
+              <a:srgbClr val="6AB0F3">
+                <a:alpha val="45000"/>
+              </a:srgbClr>
+            </a:solidFill>
+            <a:prstDash val="solid"/>
+          </a:ln>
+        </p:spPr>
+      </p:sp>
+      <p:sp>
+        <p:nvSpPr>
+          <p:cNvPr id="24" name="Shape 22"/>
+          <p:cNvSpPr/>
+          <p:nvPr/>
+        </p:nvSpPr>
+        <p:spPr>
+          <a:xfrm>
+            <a:off x="6281928" y="5852160"/>
+            <a:ext cx="265176" cy="182880"/>
+          </a:xfrm>
+          <a:prstGeom prst="rect">
+            <a:avLst/>
+          </a:prstGeom>
+          <a:solidFill>
+            <a:srgbClr val="FFFFFF">
+              <a:alpha val="12000"/>
+            </a:srgbClr>
+          </a:solidFill>
+          <a:ln w="7620">
+            <a:solidFill>
+              <a:srgbClr val="6AB0F3">
+                <a:alpha val="45000"/>
+              </a:srgbClr>
+            </a:solidFill>
+            <a:prstDash val="solid"/>
+          </a:ln>
+        </p:spPr>
+      </p:sp>
+      <p:sp>
+        <p:nvSpPr>
+          <p:cNvPr id="25" name="Shape 23"/>
+          <p:cNvSpPr/>
+          <p:nvPr/>
+        </p:nvSpPr>
+        <p:spPr>
+          <a:xfrm>
+            <a:off x="6583680" y="5852160"/>
+            <a:ext cx="265176" cy="182880"/>
+          </a:xfrm>
+          <a:prstGeom prst="rect">
+            <a:avLst/>
+          </a:prstGeom>
+          <a:solidFill>
+            <a:srgbClr val="FFFFFF">
+              <a:alpha val="12000"/>
+            </a:srgbClr>
+          </a:solidFill>
+          <a:ln w="7620">
+            <a:solidFill>
+              <a:srgbClr val="6AB0F3">
+                <a:alpha val="45000"/>
+              </a:srgbClr>
+            </a:solidFill>
+            <a:prstDash val="solid"/>
+          </a:ln>
+        </p:spPr>
+      </p:sp>
+      <p:sp>
+        <p:nvSpPr>
+          <p:cNvPr id="26" name="Shape 24"/>
+          <p:cNvSpPr/>
+          <p:nvPr/>
+        </p:nvSpPr>
+        <p:spPr>
+          <a:xfrm>
+            <a:off x="6885432" y="5852160"/>
+            <a:ext cx="265176" cy="182880"/>
+          </a:xfrm>
+          <a:prstGeom prst="rect">
+            <a:avLst/>
+          </a:prstGeom>
+          <a:solidFill>
+            <a:srgbClr val="FFFFFF">
+              <a:alpha val="12000"/>
+            </a:srgbClr>
+          </a:solidFill>
+          <a:ln w="7620">
+            <a:solidFill>
+              <a:srgbClr val="6AB0F3">
+                <a:alpha val="45000"/>
+              </a:srgbClr>
+            </a:solidFill>
+            <a:prstDash val="solid"/>
+          </a:ln>
+        </p:spPr>
+      </p:sp>
+      <p:sp>
+        <p:nvSpPr>
+          <p:cNvPr id="27" name="Shape 25"/>
+          <p:cNvSpPr/>
+          <p:nvPr/>
+        </p:nvSpPr>
+        <p:spPr>
+          <a:xfrm>
+            <a:off x="7187184" y="5852160"/>
+            <a:ext cx="265176" cy="182880"/>
+          </a:xfrm>
+          <a:prstGeom prst="rect">
+            <a:avLst/>
+          </a:prstGeom>
+          <a:solidFill>
+            <a:srgbClr val="FFFFFF">
+              <a:alpha val="12000"/>
+            </a:srgbClr>
+          </a:solidFill>
+          <a:ln w="7620">
+            <a:solidFill>
+              <a:srgbClr val="6AB0F3">
+                <a:alpha val="45000"/>
+              </a:srgbClr>
+            </a:solidFill>
+            <a:prstDash val="solid"/>
+          </a:ln>
+        </p:spPr>
+      </p:sp>
+      <p:sp>
+        <p:nvSpPr>
+          <p:cNvPr id="28" name="Shape 26"/>
+          <p:cNvSpPr/>
+          <p:nvPr/>
+        </p:nvSpPr>
+        <p:spPr>
+          <a:xfrm>
+            <a:off x="7488936" y="5852160"/>
+            <a:ext cx="265176" cy="182880"/>
+          </a:xfrm>
+          <a:prstGeom prst="rect">
+            <a:avLst/>
+          </a:prstGeom>
+          <a:solidFill>
+            <a:srgbClr val="FFFFFF">
+              <a:alpha val="12000"/>
+            </a:srgbClr>
+          </a:solidFill>
+          <a:ln w="7620">
+            <a:solidFill>
+              <a:srgbClr val="6AB0F3">
+                <a:alpha val="45000"/>
+              </a:srgbClr>
+            </a:solidFill>
+            <a:prstDash val="solid"/>
+          </a:ln>
+        </p:spPr>
+      </p:sp>
+      <p:sp>
+        <p:nvSpPr>
+          <p:cNvPr id="29" name="Shape 27"/>
+          <p:cNvSpPr/>
+          <p:nvPr/>
+        </p:nvSpPr>
+        <p:spPr>
+          <a:xfrm>
+            <a:off x="7790688" y="5852160"/>
+            <a:ext cx="265176" cy="182880"/>
+          </a:xfrm>
+          <a:prstGeom prst="rect">
+            <a:avLst/>
+          </a:prstGeom>
+          <a:solidFill>
+            <a:srgbClr val="FFFFFF">
+              <a:alpha val="12000"/>
+            </a:srgbClr>
+          </a:solidFill>
+          <a:ln w="7620">
+            <a:solidFill>
+              <a:srgbClr val="6AB0F3">
+                <a:alpha val="45000"/>
+              </a:srgbClr>
+            </a:solidFill>
+            <a:prstDash val="solid"/>
+          </a:ln>
+        </p:spPr>
+      </p:sp>
+      <p:sp>
+        <p:nvSpPr>
+          <p:cNvPr id="30" name="Shape 28"/>
+          <p:cNvSpPr/>
+          <p:nvPr/>
+        </p:nvSpPr>
+        <p:spPr>
+          <a:xfrm>
+            <a:off x="8092440" y="5852160"/>
+            <a:ext cx="265176" cy="182880"/>
+          </a:xfrm>
+          <a:prstGeom prst="rect">
+            <a:avLst/>
+          </a:prstGeom>
+          <a:solidFill>
+            <a:srgbClr val="FFFFFF">
+              <a:alpha val="12000"/>
+            </a:srgbClr>
+          </a:solidFill>
+          <a:ln w="7620">
+            <a:solidFill>
+              <a:srgbClr val="6AB0F3">
+                <a:alpha val="45000"/>
+              </a:srgbClr>
+            </a:solidFill>
+            <a:prstDash val="solid"/>
+          </a:ln>
+        </p:spPr>
+      </p:sp>
+    </p:spTree>
+  </p:cSld>
+  <p:clrMapOvr>
+    <a:masterClrMapping/>
+  </p:clrMapOvr>
+</p:sld>
+</file>
+
+<file path=ppt/slides/slide21.xml><?xml version="1.0" encoding="utf-8"?>
+<p:sld xmlns:a="http://schemas.openxmlformats.org/drawingml/2006/main" xmlns:r="http://schemas.openxmlformats.org/officeDocument/2006/relationships" xmlns:p="http://schemas.openxmlformats.org/presentationml/2006/main">
+  <p:cSld name="Slide 21">
+    <p:bg>
+      <p:bgPr>
+        <a:solidFill>
           <a:srgbClr val="FFFFFF"/>
         </a:solidFill>
       </p:bgPr>
@@ -11466,7 +12725,7 @@
                 <a:ea typeface="Yu Gothic" pitchFamily="34" charset="-122"/>
                 <a:cs typeface="Yu Gothic" pitchFamily="34" charset="-120"/>
               </a:rPr>
-              <a:t>第4回</a:t>
+              <a:t>4.5　バージョン管理</a:t>
             </a:r>
             <a:endParaRPr lang="en-US" sz="1200" dirty="0"/>
           </a:p>
@@ -11505,7 +12764,7 @@
                 <a:ea typeface="Yu Gothic" pitchFamily="34" charset="-122"/>
                 <a:cs typeface="Yu Gothic" pitchFamily="34" charset="-120"/>
               </a:rPr>
-              <a:t>演習</a:t>
+              <a:t>バージョン管理が解決すること</a:t>
             </a:r>
             <a:endParaRPr lang="en-US" sz="3000" dirty="0"/>
           </a:p>
@@ -11544,7 +12803,7 @@
                 <a:ea typeface="Yu Gothic" pitchFamily="34" charset="-122"/>
                 <a:cs typeface="Yu Gothic" pitchFamily="34" charset="-120"/>
               </a:rPr>
-              <a:t>20</a:t>
+              <a:t>21</a:t>
             </a:r>
             <a:endParaRPr lang="en-US" sz="1000" dirty="0"/>
           </a:p>
@@ -11552,41 +12811,14 @@
       </p:sp>
       <p:sp>
         <p:nvSpPr>
-          <p:cNvPr id="5" name="Shape 3"/>
-          <p:cNvSpPr/>
-          <p:nvPr/>
-        </p:nvSpPr>
-        <p:spPr>
-          <a:xfrm>
-            <a:off x="685800" y="1691640"/>
-            <a:ext cx="868680" cy="402336"/>
-          </a:xfrm>
-          <a:prstGeom prst="roundRect">
-            <a:avLst>
-              <a:gd name="adj" fmla="val 18182"/>
-            </a:avLst>
-          </a:prstGeom>
-          <a:solidFill>
-            <a:srgbClr val="D9E6F4"/>
-          </a:solidFill>
-          <a:ln w="12700">
-            <a:solidFill>
-              <a:srgbClr val="0B5CAD"/>
-            </a:solidFill>
-            <a:prstDash val="solid"/>
-          </a:ln>
-        </p:spPr>
-      </p:sp>
-      <p:sp>
-        <p:nvSpPr>
-          <p:cNvPr id="6" name="Text 4"/>
-          <p:cNvSpPr/>
-          <p:nvPr/>
-        </p:nvSpPr>
-        <p:spPr>
-          <a:xfrm>
-            <a:off x="685800" y="1691640"/>
-            <a:ext cx="868680" cy="402336"/>
+          <p:cNvPr id="5" name="Text 3"/>
+          <p:cNvSpPr/>
+          <p:nvPr/>
+        </p:nvSpPr>
+        <p:spPr>
+          <a:xfrm>
+            <a:off x="685800" y="1481328"/>
+            <a:ext cx="10789920" cy="365760"/>
           </a:xfrm>
           <a:prstGeom prst="rect">
             <a:avLst/>
@@ -11598,53 +12830,14 @@
           <a:bodyPr wrap="square" lIns="0" tIns="0" rIns="0" bIns="0" rtlCol="0" anchor="ctr"/>
           <a:lstStyle/>
           <a:p>
-            <a:pPr algn="ctr" indent="0" marL="0">
-              <a:buNone/>
-            </a:pPr>
-            <a:r>
-              <a:rPr lang="en-US" sz="1300" b="1" dirty="0">
-                <a:solidFill>
-                  <a:srgbClr val="0B5CAD"/>
-                </a:solidFill>
-                <a:latin typeface="Courier New" pitchFamily="34" charset="0"/>
-                <a:ea typeface="Courier New" pitchFamily="34" charset="-122"/>
-                <a:cs typeface="Courier New" pitchFamily="34" charset="-120"/>
-              </a:rPr>
-              <a:t>4-1</a:t>
-            </a:r>
-            <a:endParaRPr lang="en-US" sz="1300" dirty="0"/>
-          </a:p>
-        </p:txBody>
-      </p:sp>
-      <p:sp>
-        <p:nvSpPr>
-          <p:cNvPr id="7" name="Text 5"/>
-          <p:cNvSpPr/>
-          <p:nvPr/>
-        </p:nvSpPr>
-        <p:spPr>
-          <a:xfrm>
-            <a:off x="1783080" y="1673352"/>
-            <a:ext cx="9692640" cy="932688"/>
-          </a:xfrm>
-          <a:prstGeom prst="rect">
-            <a:avLst/>
-          </a:prstGeom>
-          <a:noFill/>
-          <a:ln/>
-        </p:spPr>
-        <p:txBody>
-          <a:bodyPr wrap="square" lIns="0" tIns="0" rIns="0" bIns="0" rtlCol="0" anchor="t"/>
-          <a:lstStyle/>
-          <a:p>
             <a:pPr indent="0" marL="0">
               <a:lnSpc>
-                <a:spcPts val="2100"/>
+                <a:spcPts val="2200"/>
               </a:lnSpc>
               <a:buNone/>
             </a:pPr>
             <a:r>
-              <a:rPr lang="en-US" sz="1400" dirty="0">
+              <a:rPr lang="en-US" sz="1500" dirty="0">
                 <a:solidFill>
                   <a:srgbClr val="16191D"/>
                 </a:solidFill>
@@ -11652,34 +12845,34 @@
                 <a:ea typeface="Yu Gothic" pitchFamily="34" charset="-122"/>
                 <a:cs typeface="Yu Gothic" pitchFamily="34" charset="-120"/>
               </a:rPr>
-              <a:t>高級言語で書いたプログラムが、そのままでは CPU で実行できないのはなぜか。第3回の内容に触れて説明せよ。</a:t>
-            </a:r>
-            <a:endParaRPr lang="en-US" sz="1400" dirty="0"/>
-          </a:p>
-        </p:txBody>
-      </p:sp>
-      <p:sp>
-        <p:nvSpPr>
-          <p:cNvPr id="8" name="Shape 6"/>
-          <p:cNvSpPr/>
-          <p:nvPr/>
-        </p:nvSpPr>
-        <p:spPr>
-          <a:xfrm>
-            <a:off x="685800" y="2770632"/>
-            <a:ext cx="868680" cy="402336"/>
+              <a:t>ソースコードは1回書いて終わりではない。直し、戻し、複数人で同時に触る。</a:t>
+            </a:r>
+            <a:endParaRPr lang="en-US" sz="1500" dirty="0"/>
+          </a:p>
+        </p:txBody>
+      </p:sp>
+      <p:sp>
+        <p:nvSpPr>
+          <p:cNvPr id="6" name="Shape 4"/>
+          <p:cNvSpPr/>
+          <p:nvPr/>
+        </p:nvSpPr>
+        <p:spPr>
+          <a:xfrm>
+            <a:off x="685800" y="1883664"/>
+            <a:ext cx="2526030" cy="1371600"/>
           </a:xfrm>
           <a:prstGeom prst="roundRect">
             <a:avLst>
-              <a:gd name="adj" fmla="val 18182"/>
+              <a:gd name="adj" fmla="val 4000"/>
             </a:avLst>
           </a:prstGeom>
           <a:solidFill>
-            <a:srgbClr val="D9E6F4"/>
+            <a:srgbClr val="EEF1F5"/>
           </a:solidFill>
           <a:ln w="12700">
             <a:solidFill>
-              <a:srgbClr val="0B5CAD"/>
+              <a:srgbClr val="DDE4EC"/>
             </a:solidFill>
             <a:prstDash val="solid"/>
           </a:ln>
@@ -11687,14 +12880,14 @@
       </p:sp>
       <p:sp>
         <p:nvSpPr>
-          <p:cNvPr id="9" name="Text 7"/>
-          <p:cNvSpPr/>
-          <p:nvPr/>
-        </p:nvSpPr>
-        <p:spPr>
-          <a:xfrm>
-            <a:off x="685800" y="2770632"/>
-            <a:ext cx="868680" cy="402336"/>
+          <p:cNvPr id="7" name="Text 5"/>
+          <p:cNvSpPr/>
+          <p:nvPr/>
+        </p:nvSpPr>
+        <p:spPr>
+          <a:xfrm>
+            <a:off x="868680" y="2020824"/>
+            <a:ext cx="2160270" cy="310896"/>
           </a:xfrm>
           <a:prstGeom prst="rect">
             <a:avLst/>
@@ -11706,53 +12899,11 @@
           <a:bodyPr wrap="square" lIns="0" tIns="0" rIns="0" bIns="0" rtlCol="0" anchor="ctr"/>
           <a:lstStyle/>
           <a:p>
-            <a:pPr algn="ctr" indent="0" marL="0">
+            <a:pPr indent="0" marL="0">
               <a:buNone/>
             </a:pPr>
             <a:r>
-              <a:rPr lang="en-US" sz="1300" b="1" dirty="0">
-                <a:solidFill>
-                  <a:srgbClr val="0B5CAD"/>
-                </a:solidFill>
-                <a:latin typeface="Courier New" pitchFamily="34" charset="0"/>
-                <a:ea typeface="Courier New" pitchFamily="34" charset="-122"/>
-                <a:cs typeface="Courier New" pitchFamily="34" charset="-120"/>
-              </a:rPr>
-              <a:t>4-2</a:t>
-            </a:r>
-            <a:endParaRPr lang="en-US" sz="1300" dirty="0"/>
-          </a:p>
-        </p:txBody>
-      </p:sp>
-      <p:sp>
-        <p:nvSpPr>
-          <p:cNvPr id="10" name="Text 8"/>
-          <p:cNvSpPr/>
-          <p:nvPr/>
-        </p:nvSpPr>
-        <p:spPr>
-          <a:xfrm>
-            <a:off x="1783080" y="2752344"/>
-            <a:ext cx="9692640" cy="932688"/>
-          </a:xfrm>
-          <a:prstGeom prst="rect">
-            <a:avLst/>
-          </a:prstGeom>
-          <a:noFill/>
-          <a:ln/>
-        </p:spPr>
-        <p:txBody>
-          <a:bodyPr wrap="square" lIns="0" tIns="0" rIns="0" bIns="0" rtlCol="0" anchor="t"/>
-          <a:lstStyle/>
-          <a:p>
-            <a:pPr indent="0" marL="0">
-              <a:lnSpc>
-                <a:spcPts val="2100"/>
-              </a:lnSpc>
-              <a:buNone/>
-            </a:pPr>
-            <a:r>
-              <a:rPr lang="en-US" sz="1400" dirty="0">
+              <a:rPr lang="en-US" sz="1400" b="1" dirty="0">
                 <a:solidFill>
                   <a:srgbClr val="16191D"/>
                 </a:solidFill>
@@ -11760,7 +12911,7 @@
                 <a:ea typeface="Yu Gothic" pitchFamily="34" charset="-122"/>
                 <a:cs typeface="Yu Gothic" pitchFamily="34" charset="-120"/>
               </a:rPr>
-              <a:t>JIT コンパイルが事前コンパイルより有利になりうる理由を1つ挙げよ。「実行時にしか分からない情報」の具体例を含めること。</a:t>
+              <a:t>履歴を残す</a:t>
             </a:r>
             <a:endParaRPr lang="en-US" sz="1400" dirty="0"/>
           </a:p>
@@ -11768,41 +12919,14 @@
       </p:sp>
       <p:sp>
         <p:nvSpPr>
-          <p:cNvPr id="11" name="Shape 9"/>
-          <p:cNvSpPr/>
-          <p:nvPr/>
-        </p:nvSpPr>
-        <p:spPr>
-          <a:xfrm>
-            <a:off x="685800" y="3849624"/>
-            <a:ext cx="868680" cy="402336"/>
-          </a:xfrm>
-          <a:prstGeom prst="roundRect">
-            <a:avLst>
-              <a:gd name="adj" fmla="val 18182"/>
-            </a:avLst>
-          </a:prstGeom>
-          <a:solidFill>
-            <a:srgbClr val="D9E6F4"/>
-          </a:solidFill>
-          <a:ln w="12700">
-            <a:solidFill>
-              <a:srgbClr val="0B5CAD"/>
-            </a:solidFill>
-            <a:prstDash val="solid"/>
-          </a:ln>
-        </p:spPr>
-      </p:sp>
-      <p:sp>
-        <p:nvSpPr>
-          <p:cNvPr id="12" name="Text 10"/>
-          <p:cNvSpPr/>
-          <p:nvPr/>
-        </p:nvSpPr>
-        <p:spPr>
-          <a:xfrm>
-            <a:off x="685800" y="3849624"/>
-            <a:ext cx="868680" cy="402336"/>
+          <p:cNvPr id="8" name="Text 6"/>
+          <p:cNvSpPr/>
+          <p:nvPr/>
+        </p:nvSpPr>
+        <p:spPr>
+          <a:xfrm>
+            <a:off x="868680" y="2368296"/>
+            <a:ext cx="2160270" cy="731520"/>
           </a:xfrm>
           <a:prstGeom prst="rect">
             <a:avLst/>
@@ -11811,91 +12935,52 @@
           <a:ln/>
         </p:spPr>
         <p:txBody>
-          <a:bodyPr wrap="square" lIns="0" tIns="0" rIns="0" bIns="0" rtlCol="0" anchor="ctr"/>
-          <a:lstStyle/>
-          <a:p>
-            <a:pPr algn="ctr" indent="0" marL="0">
-              <a:buNone/>
-            </a:pPr>
-            <a:r>
-              <a:rPr lang="en-US" sz="1300" b="1" dirty="0">
-                <a:solidFill>
-                  <a:srgbClr val="0B5CAD"/>
-                </a:solidFill>
-                <a:latin typeface="Courier New" pitchFamily="34" charset="0"/>
-                <a:ea typeface="Courier New" pitchFamily="34" charset="-122"/>
-                <a:cs typeface="Courier New" pitchFamily="34" charset="-120"/>
-              </a:rPr>
-              <a:t>4-3</a:t>
-            </a:r>
-            <a:endParaRPr lang="en-US" sz="1300" dirty="0"/>
-          </a:p>
-        </p:txBody>
-      </p:sp>
-      <p:sp>
-        <p:nvSpPr>
-          <p:cNvPr id="13" name="Text 11"/>
-          <p:cNvSpPr/>
-          <p:nvPr/>
-        </p:nvSpPr>
-        <p:spPr>
-          <a:xfrm>
-            <a:off x="1783080" y="3831336"/>
-            <a:ext cx="9692640" cy="932688"/>
-          </a:xfrm>
-          <a:prstGeom prst="rect">
-            <a:avLst/>
-          </a:prstGeom>
-          <a:noFill/>
-          <a:ln/>
-        </p:spPr>
-        <p:txBody>
           <a:bodyPr wrap="square" lIns="0" tIns="0" rIns="0" bIns="0" rtlCol="0" anchor="t"/>
           <a:lstStyle/>
           <a:p>
             <a:pPr indent="0" marL="0">
               <a:lnSpc>
-                <a:spcPts val="2100"/>
+                <a:spcPts val="1600"/>
               </a:lnSpc>
               <a:buNone/>
             </a:pPr>
             <a:r>
-              <a:rPr lang="en-US" sz="1400" dirty="0">
-                <a:solidFill>
-                  <a:srgbClr val="16191D"/>
+              <a:rPr lang="en-US" sz="1200" dirty="0">
+                <a:solidFill>
+                  <a:srgbClr val="5F6672"/>
                 </a:solidFill>
                 <a:latin typeface="Yu Gothic" pitchFamily="34" charset="0"/>
                 <a:ea typeface="Yu Gothic" pitchFamily="34" charset="-122"/>
                 <a:cs typeface="Yu Gothic" pitchFamily="34" charset="-120"/>
               </a:rPr>
-              <a:t>静的リンクと動的リンクについて、それぞれが有利になる状況を1つずつ挙げよ。</a:t>
-            </a:r>
-            <a:endParaRPr lang="en-US" sz="1400" dirty="0"/>
-          </a:p>
-        </p:txBody>
-      </p:sp>
-      <p:sp>
-        <p:nvSpPr>
-          <p:cNvPr id="14" name="Shape 12"/>
-          <p:cNvSpPr/>
-          <p:nvPr/>
-        </p:nvSpPr>
-        <p:spPr>
-          <a:xfrm>
-            <a:off x="685800" y="4928616"/>
-            <a:ext cx="868680" cy="402336"/>
+              <a:t>「なぜこう書いたか」が後から追える</a:t>
+            </a:r>
+            <a:endParaRPr lang="en-US" sz="1200" dirty="0"/>
+          </a:p>
+        </p:txBody>
+      </p:sp>
+      <p:sp>
+        <p:nvSpPr>
+          <p:cNvPr id="9" name="Shape 7"/>
+          <p:cNvSpPr/>
+          <p:nvPr/>
+        </p:nvSpPr>
+        <p:spPr>
+          <a:xfrm>
+            <a:off x="3440430" y="1883664"/>
+            <a:ext cx="2526030" cy="1371600"/>
           </a:xfrm>
           <a:prstGeom prst="roundRect">
             <a:avLst>
-              <a:gd name="adj" fmla="val 18182"/>
+              <a:gd name="adj" fmla="val 4000"/>
             </a:avLst>
           </a:prstGeom>
           <a:solidFill>
-            <a:srgbClr val="D9E6F4"/>
+            <a:srgbClr val="EEF1F5"/>
           </a:solidFill>
           <a:ln w="12700">
             <a:solidFill>
-              <a:srgbClr val="0B5CAD"/>
+              <a:srgbClr val="DDE4EC"/>
             </a:solidFill>
             <a:prstDash val="solid"/>
           </a:ln>
@@ -11903,14 +12988,14 @@
       </p:sp>
       <p:sp>
         <p:nvSpPr>
-          <p:cNvPr id="15" name="Text 13"/>
-          <p:cNvSpPr/>
-          <p:nvPr/>
-        </p:nvSpPr>
-        <p:spPr>
-          <a:xfrm>
-            <a:off x="685800" y="4928616"/>
-            <a:ext cx="868680" cy="402336"/>
+          <p:cNvPr id="10" name="Text 8"/>
+          <p:cNvSpPr/>
+          <p:nvPr/>
+        </p:nvSpPr>
+        <p:spPr>
+          <a:xfrm>
+            <a:off x="3623310" y="2020824"/>
+            <a:ext cx="2160270" cy="310896"/>
           </a:xfrm>
           <a:prstGeom prst="rect">
             <a:avLst/>
@@ -11922,53 +13007,11 @@
           <a:bodyPr wrap="square" lIns="0" tIns="0" rIns="0" bIns="0" rtlCol="0" anchor="ctr"/>
           <a:lstStyle/>
           <a:p>
-            <a:pPr algn="ctr" indent="0" marL="0">
+            <a:pPr indent="0" marL="0">
               <a:buNone/>
             </a:pPr>
             <a:r>
-              <a:rPr lang="en-US" sz="1300" b="1" dirty="0">
-                <a:solidFill>
-                  <a:srgbClr val="0B5CAD"/>
-                </a:solidFill>
-                <a:latin typeface="Courier New" pitchFamily="34" charset="0"/>
-                <a:ea typeface="Courier New" pitchFamily="34" charset="-122"/>
-                <a:cs typeface="Courier New" pitchFamily="34" charset="-120"/>
-              </a:rPr>
-              <a:t>4-4</a:t>
-            </a:r>
-            <a:endParaRPr lang="en-US" sz="1300" dirty="0"/>
-          </a:p>
-        </p:txBody>
-      </p:sp>
-      <p:sp>
-        <p:nvSpPr>
-          <p:cNvPr id="16" name="Text 14"/>
-          <p:cNvSpPr/>
-          <p:nvPr/>
-        </p:nvSpPr>
-        <p:spPr>
-          <a:xfrm>
-            <a:off x="1783080" y="4910328"/>
-            <a:ext cx="9692640" cy="932688"/>
-          </a:xfrm>
-          <a:prstGeom prst="rect">
-            <a:avLst/>
-          </a:prstGeom>
-          <a:noFill/>
-          <a:ln/>
-        </p:spPr>
-        <p:txBody>
-          <a:bodyPr wrap="square" lIns="0" tIns="0" rIns="0" bIns="0" rtlCol="0" anchor="t"/>
-          <a:lstStyle/>
-          <a:p>
-            <a:pPr indent="0" marL="0">
-              <a:lnSpc>
-                <a:spcPts val="2100"/>
-              </a:lnSpc>
-              <a:buNone/>
-            </a:pPr>
-            <a:r>
-              <a:rPr lang="en-US" sz="1400" dirty="0">
+              <a:rPr lang="en-US" sz="1400" b="1" dirty="0">
                 <a:solidFill>
                   <a:srgbClr val="16191D"/>
                 </a:solidFill>
@@ -11976,9 +13019,414 @@
                 <a:ea typeface="Yu Gothic" pitchFamily="34" charset="-122"/>
                 <a:cs typeface="Yu Gothic" pitchFamily="34" charset="-120"/>
               </a:rPr>
-              <a:t>次の C 関数の誤りを、メモリ配置を参照して説明せよ。char *f(void) { char buf[64]; sprintf(buf, "hello"); return buf; }</a:t>
+              <a:t>任意の時点に戻せる</a:t>
             </a:r>
             <a:endParaRPr lang="en-US" sz="1400" dirty="0"/>
+          </a:p>
+        </p:txBody>
+      </p:sp>
+      <p:sp>
+        <p:nvSpPr>
+          <p:cNvPr id="11" name="Text 9"/>
+          <p:cNvSpPr/>
+          <p:nvPr/>
+        </p:nvSpPr>
+        <p:spPr>
+          <a:xfrm>
+            <a:off x="3623310" y="2368296"/>
+            <a:ext cx="2160270" cy="731520"/>
+          </a:xfrm>
+          <a:prstGeom prst="rect">
+            <a:avLst/>
+          </a:prstGeom>
+          <a:noFill/>
+          <a:ln/>
+        </p:spPr>
+        <p:txBody>
+          <a:bodyPr wrap="square" lIns="0" tIns="0" rIns="0" bIns="0" rtlCol="0" anchor="t"/>
+          <a:lstStyle/>
+          <a:p>
+            <a:pPr indent="0" marL="0">
+              <a:lnSpc>
+                <a:spcPts val="1600"/>
+              </a:lnSpc>
+              <a:buNone/>
+            </a:pPr>
+            <a:r>
+              <a:rPr lang="en-US" sz="1200" dirty="0">
+                <a:solidFill>
+                  <a:srgbClr val="5F6672"/>
+                </a:solidFill>
+                <a:latin typeface="Yu Gothic" pitchFamily="34" charset="0"/>
+                <a:ea typeface="Yu Gothic" pitchFamily="34" charset="-122"/>
+                <a:cs typeface="Yu Gothic" pitchFamily="34" charset="-120"/>
+              </a:rPr>
+              <a:t>壊したときに引き返せる</a:t>
+            </a:r>
+            <a:endParaRPr lang="en-US" sz="1200" dirty="0"/>
+          </a:p>
+        </p:txBody>
+      </p:sp>
+      <p:sp>
+        <p:nvSpPr>
+          <p:cNvPr id="12" name="Shape 10"/>
+          <p:cNvSpPr/>
+          <p:nvPr/>
+        </p:nvSpPr>
+        <p:spPr>
+          <a:xfrm>
+            <a:off x="6195060" y="1883664"/>
+            <a:ext cx="2526030" cy="1371600"/>
+          </a:xfrm>
+          <a:prstGeom prst="roundRect">
+            <a:avLst>
+              <a:gd name="adj" fmla="val 4000"/>
+            </a:avLst>
+          </a:prstGeom>
+          <a:solidFill>
+            <a:srgbClr val="EEF1F5"/>
+          </a:solidFill>
+          <a:ln w="12700">
+            <a:solidFill>
+              <a:srgbClr val="DDE4EC"/>
+            </a:solidFill>
+            <a:prstDash val="solid"/>
+          </a:ln>
+        </p:spPr>
+      </p:sp>
+      <p:sp>
+        <p:nvSpPr>
+          <p:cNvPr id="13" name="Text 11"/>
+          <p:cNvSpPr/>
+          <p:nvPr/>
+        </p:nvSpPr>
+        <p:spPr>
+          <a:xfrm>
+            <a:off x="6377940" y="2020824"/>
+            <a:ext cx="2160270" cy="310896"/>
+          </a:xfrm>
+          <a:prstGeom prst="rect">
+            <a:avLst/>
+          </a:prstGeom>
+          <a:noFill/>
+          <a:ln/>
+        </p:spPr>
+        <p:txBody>
+          <a:bodyPr wrap="square" lIns="0" tIns="0" rIns="0" bIns="0" rtlCol="0" anchor="ctr"/>
+          <a:lstStyle/>
+          <a:p>
+            <a:pPr indent="0" marL="0">
+              <a:buNone/>
+            </a:pPr>
+            <a:r>
+              <a:rPr lang="en-US" sz="1400" b="1" dirty="0">
+                <a:solidFill>
+                  <a:srgbClr val="16191D"/>
+                </a:solidFill>
+                <a:latin typeface="Yu Gothic" pitchFamily="34" charset="0"/>
+                <a:ea typeface="Yu Gothic" pitchFamily="34" charset="-122"/>
+                <a:cs typeface="Yu Gothic" pitchFamily="34" charset="-120"/>
+              </a:rPr>
+              <a:t>変更を統合できる</a:t>
+            </a:r>
+            <a:endParaRPr lang="en-US" sz="1400" dirty="0"/>
+          </a:p>
+        </p:txBody>
+      </p:sp>
+      <p:sp>
+        <p:nvSpPr>
+          <p:cNvPr id="14" name="Text 12"/>
+          <p:cNvSpPr/>
+          <p:nvPr/>
+        </p:nvSpPr>
+        <p:spPr>
+          <a:xfrm>
+            <a:off x="6377940" y="2368296"/>
+            <a:ext cx="2160270" cy="731520"/>
+          </a:xfrm>
+          <a:prstGeom prst="rect">
+            <a:avLst/>
+          </a:prstGeom>
+          <a:noFill/>
+          <a:ln/>
+        </p:spPr>
+        <p:txBody>
+          <a:bodyPr wrap="square" lIns="0" tIns="0" rIns="0" bIns="0" rtlCol="0" anchor="t"/>
+          <a:lstStyle/>
+          <a:p>
+            <a:pPr indent="0" marL="0">
+              <a:lnSpc>
+                <a:spcPts val="1600"/>
+              </a:lnSpc>
+              <a:buNone/>
+            </a:pPr>
+            <a:r>
+              <a:rPr lang="en-US" sz="1200" dirty="0">
+                <a:solidFill>
+                  <a:srgbClr val="5F6672"/>
+                </a:solidFill>
+                <a:latin typeface="Yu Gothic" pitchFamily="34" charset="0"/>
+                <a:ea typeface="Yu Gothic" pitchFamily="34" charset="-122"/>
+                <a:cs typeface="Yu Gothic" pitchFamily="34" charset="-120"/>
+              </a:rPr>
+              <a:t>同じファイルを同時に触っても失われない</a:t>
+            </a:r>
+            <a:endParaRPr lang="en-US" sz="1200" dirty="0"/>
+          </a:p>
+        </p:txBody>
+      </p:sp>
+      <p:sp>
+        <p:nvSpPr>
+          <p:cNvPr id="15" name="Shape 13"/>
+          <p:cNvSpPr/>
+          <p:nvPr/>
+        </p:nvSpPr>
+        <p:spPr>
+          <a:xfrm>
+            <a:off x="8949690" y="1883664"/>
+            <a:ext cx="2526030" cy="1371600"/>
+          </a:xfrm>
+          <a:prstGeom prst="roundRect">
+            <a:avLst>
+              <a:gd name="adj" fmla="val 4000"/>
+            </a:avLst>
+          </a:prstGeom>
+          <a:solidFill>
+            <a:srgbClr val="EEF1F5"/>
+          </a:solidFill>
+          <a:ln w="12700">
+            <a:solidFill>
+              <a:srgbClr val="DDE4EC"/>
+            </a:solidFill>
+            <a:prstDash val="solid"/>
+          </a:ln>
+        </p:spPr>
+      </p:sp>
+      <p:sp>
+        <p:nvSpPr>
+          <p:cNvPr id="16" name="Text 14"/>
+          <p:cNvSpPr/>
+          <p:nvPr/>
+        </p:nvSpPr>
+        <p:spPr>
+          <a:xfrm>
+            <a:off x="9132570" y="2020824"/>
+            <a:ext cx="2160270" cy="310896"/>
+          </a:xfrm>
+          <a:prstGeom prst="rect">
+            <a:avLst/>
+          </a:prstGeom>
+          <a:noFill/>
+          <a:ln/>
+        </p:spPr>
+        <p:txBody>
+          <a:bodyPr wrap="square" lIns="0" tIns="0" rIns="0" bIns="0" rtlCol="0" anchor="ctr"/>
+          <a:lstStyle/>
+          <a:p>
+            <a:pPr indent="0" marL="0">
+              <a:buNone/>
+            </a:pPr>
+            <a:r>
+              <a:rPr lang="en-US" sz="1400" b="1" dirty="0">
+                <a:solidFill>
+                  <a:srgbClr val="16191D"/>
+                </a:solidFill>
+                <a:latin typeface="Yu Gothic" pitchFamily="34" charset="0"/>
+                <a:ea typeface="Yu Gothic" pitchFamily="34" charset="-122"/>
+                <a:cs typeface="Yu Gothic" pitchFamily="34" charset="-120"/>
+              </a:rPr>
+              <a:t>分岐して試せる</a:t>
+            </a:r>
+            <a:endParaRPr lang="en-US" sz="1400" dirty="0"/>
+          </a:p>
+        </p:txBody>
+      </p:sp>
+      <p:sp>
+        <p:nvSpPr>
+          <p:cNvPr id="17" name="Text 15"/>
+          <p:cNvSpPr/>
+          <p:nvPr/>
+        </p:nvSpPr>
+        <p:spPr>
+          <a:xfrm>
+            <a:off x="9132570" y="2368296"/>
+            <a:ext cx="2160270" cy="731520"/>
+          </a:xfrm>
+          <a:prstGeom prst="rect">
+            <a:avLst/>
+          </a:prstGeom>
+          <a:noFill/>
+          <a:ln/>
+        </p:spPr>
+        <p:txBody>
+          <a:bodyPr wrap="square" lIns="0" tIns="0" rIns="0" bIns="0" rtlCol="0" anchor="t"/>
+          <a:lstStyle/>
+          <a:p>
+            <a:pPr indent="0" marL="0">
+              <a:lnSpc>
+                <a:spcPts val="1600"/>
+              </a:lnSpc>
+              <a:buNone/>
+            </a:pPr>
+            <a:r>
+              <a:rPr lang="en-US" sz="1200" dirty="0">
+                <a:solidFill>
+                  <a:srgbClr val="5F6672"/>
+                </a:solidFill>
+                <a:latin typeface="Yu Gothic" pitchFamily="34" charset="0"/>
+                <a:ea typeface="Yu Gothic" pitchFamily="34" charset="-122"/>
+                <a:cs typeface="Yu Gothic" pitchFamily="34" charset="-120"/>
+              </a:rPr>
+              <a:t>本流を壊さずに実験できる</a:t>
+            </a:r>
+            <a:endParaRPr lang="en-US" sz="1200" dirty="0"/>
+          </a:p>
+        </p:txBody>
+      </p:sp>
+      <p:sp>
+        <p:nvSpPr>
+          <p:cNvPr id="18" name="Shape 16"/>
+          <p:cNvSpPr/>
+          <p:nvPr/>
+        </p:nvSpPr>
+        <p:spPr>
+          <a:xfrm>
+            <a:off x="685800" y="3547872"/>
+            <a:ext cx="10789920" cy="786384"/>
+          </a:xfrm>
+          <a:prstGeom prst="roundRect">
+            <a:avLst>
+              <a:gd name="adj" fmla="val 6977"/>
+            </a:avLst>
+          </a:prstGeom>
+          <a:solidFill>
+            <a:srgbClr val="FFFFFF"/>
+          </a:solidFill>
+          <a:ln w="19050">
+            <a:solidFill>
+              <a:srgbClr val="0B5CAD"/>
+            </a:solidFill>
+            <a:prstDash val="dash"/>
+          </a:ln>
+        </p:spPr>
+      </p:sp>
+      <p:sp>
+        <p:nvSpPr>
+          <p:cNvPr id="19" name="Text 17"/>
+          <p:cNvSpPr/>
+          <p:nvPr/>
+        </p:nvSpPr>
+        <p:spPr>
+          <a:xfrm>
+            <a:off x="914400" y="3675888"/>
+            <a:ext cx="10332720" cy="292608"/>
+          </a:xfrm>
+          <a:prstGeom prst="rect">
+            <a:avLst/>
+          </a:prstGeom>
+          <a:noFill/>
+          <a:ln/>
+        </p:spPr>
+        <p:txBody>
+          <a:bodyPr wrap="square" lIns="0" tIns="0" rIns="0" bIns="0" rtlCol="0" anchor="ctr"/>
+          <a:lstStyle/>
+          <a:p>
+            <a:pPr indent="0" marL="0">
+              <a:buNone/>
+            </a:pPr>
+            <a:r>
+              <a:rPr lang="en-US" sz="1500" b="1" dirty="0">
+                <a:solidFill>
+                  <a:srgbClr val="0B5CAD"/>
+                </a:solidFill>
+                <a:latin typeface="Yu Gothic" pitchFamily="34" charset="0"/>
+                <a:ea typeface="Yu Gothic" pitchFamily="34" charset="-122"/>
+                <a:cs typeface="Yu Gothic" pitchFamily="34" charset="-120"/>
+              </a:rPr>
+              <a:t>「いつ壊れたか」は二分探索で特定できる</a:t>
+            </a:r>
+            <a:endParaRPr lang="en-US" sz="1500" dirty="0"/>
+          </a:p>
+        </p:txBody>
+      </p:sp>
+      <p:sp>
+        <p:nvSpPr>
+          <p:cNvPr id="20" name="Text 18"/>
+          <p:cNvSpPr/>
+          <p:nvPr/>
+        </p:nvSpPr>
+        <p:spPr>
+          <a:xfrm>
+            <a:off x="914400" y="3986784"/>
+            <a:ext cx="10332720" cy="292608"/>
+          </a:xfrm>
+          <a:prstGeom prst="rect">
+            <a:avLst/>
+          </a:prstGeom>
+          <a:noFill/>
+          <a:ln/>
+        </p:spPr>
+        <p:txBody>
+          <a:bodyPr wrap="square" lIns="0" tIns="0" rIns="0" bIns="0" rtlCol="0" anchor="ctr"/>
+          <a:lstStyle/>
+          <a:p>
+            <a:pPr indent="0" marL="0">
+              <a:buNone/>
+            </a:pPr>
+            <a:r>
+              <a:rPr lang="en-US" sz="1250" dirty="0">
+                <a:solidFill>
+                  <a:srgbClr val="5F6672"/>
+                </a:solidFill>
+                <a:latin typeface="Yu Gothic" pitchFamily="34" charset="0"/>
+                <a:ea typeface="Yu Gothic" pitchFamily="34" charset="-122"/>
+                <a:cs typeface="Yu Gothic" pitchFamily="34" charset="-120"/>
+              </a:rPr>
+              <a:t>1か月前は動いていたが、いま動かない。その間にコミットが100個ある。真ん中で試し、動けば後半、動かなければ前半に絞る —— 7回で1個になる（第2回の二分探索。git bisect が自動化する）。</a:t>
+            </a:r>
+            <a:endParaRPr lang="en-US" sz="1250" dirty="0"/>
+          </a:p>
+        </p:txBody>
+      </p:sp>
+      <p:sp>
+        <p:nvSpPr>
+          <p:cNvPr id="21" name="Text 19"/>
+          <p:cNvSpPr/>
+          <p:nvPr/>
+        </p:nvSpPr>
+        <p:spPr>
+          <a:xfrm>
+            <a:off x="685800" y="5760720"/>
+            <a:ext cx="10789920" cy="512064"/>
+          </a:xfrm>
+          <a:prstGeom prst="rect">
+            <a:avLst/>
+          </a:prstGeom>
+          <a:noFill/>
+          <a:ln/>
+        </p:spPr>
+        <p:txBody>
+          <a:bodyPr wrap="square" lIns="0" tIns="0" rIns="0" bIns="0" rtlCol="0" anchor="ctr"/>
+          <a:lstStyle/>
+          <a:p>
+            <a:pPr indent="0" marL="0">
+              <a:lnSpc>
+                <a:spcPts val="1900"/>
+              </a:lnSpc>
+              <a:buNone/>
+            </a:pPr>
+            <a:r>
+              <a:rPr lang="en-US" sz="1300" b="1" dirty="0">
+                <a:solidFill>
+                  <a:srgbClr val="0B5CAD"/>
+                </a:solidFill>
+                <a:latin typeface="Yu Gothic" pitchFamily="34" charset="0"/>
+                <a:ea typeface="Yu Gothic" pitchFamily="34" charset="-122"/>
+                <a:cs typeface="Yu Gothic" pitchFamily="34" charset="-120"/>
+              </a:rPr>
+              <a:t>コミットは「中途半端な状態を記録しない」単位である。第11回のトランザクションと同じ考え方。</a:t>
+            </a:r>
+            <a:endParaRPr lang="en-US" sz="1300" dirty="0"/>
           </a:p>
         </p:txBody>
       </p:sp>
@@ -11990,9 +13438,2537 @@
 </p:sld>
 </file>
 
-<file path=ppt/slides/slide21.xml><?xml version="1.0" encoding="utf-8"?>
+<file path=ppt/slides/slide22.xml><?xml version="1.0" encoding="utf-8"?>
 <p:sld xmlns:a="http://schemas.openxmlformats.org/drawingml/2006/main" xmlns:r="http://schemas.openxmlformats.org/officeDocument/2006/relationships" xmlns:p="http://schemas.openxmlformats.org/presentationml/2006/main">
-  <p:cSld name="Slide 21">
+  <p:cSld name="Slide 22">
+    <p:bg>
+      <p:bgPr>
+        <a:solidFill>
+          <a:srgbClr val="FFFFFF"/>
+        </a:solidFill>
+      </p:bgPr>
+    </p:bg>
+    <p:spTree>
+      <p:nvGrpSpPr>
+        <p:cNvPr id="1" name=""/>
+        <p:cNvGrpSpPr/>
+        <p:nvPr/>
+      </p:nvGrpSpPr>
+      <p:grpSpPr>
+        <a:xfrm>
+          <a:off x="0" y="0"/>
+          <a:ext cx="0" cy="0"/>
+          <a:chOff x="0" y="0"/>
+          <a:chExt cx="0" cy="0"/>
+        </a:xfrm>
+      </p:grpSpPr>
+      <p:sp>
+        <p:nvSpPr>
+          <p:cNvPr id="2" name="Text 0"/>
+          <p:cNvSpPr/>
+          <p:nvPr/>
+        </p:nvSpPr>
+        <p:spPr>
+          <a:xfrm>
+            <a:off x="566928" y="310896"/>
+            <a:ext cx="4572000" cy="256032"/>
+          </a:xfrm>
+          <a:prstGeom prst="rect">
+            <a:avLst/>
+          </a:prstGeom>
+          <a:noFill/>
+          <a:ln/>
+        </p:spPr>
+        <p:txBody>
+          <a:bodyPr wrap="square" lIns="0" tIns="0" rIns="0" bIns="0" rtlCol="0" anchor="ctr"/>
+          <a:lstStyle/>
+          <a:p>
+            <a:pPr indent="0" marL="0">
+              <a:buNone/>
+            </a:pPr>
+            <a:r>
+              <a:rPr lang="en-US" sz="1200" b="1" dirty="0">
+                <a:solidFill>
+                  <a:srgbClr val="0B5CAD"/>
+                </a:solidFill>
+                <a:latin typeface="Yu Gothic" pitchFamily="34" charset="0"/>
+                <a:ea typeface="Yu Gothic" pitchFamily="34" charset="-122"/>
+                <a:cs typeface="Yu Gothic" pitchFamily="34" charset="-120"/>
+              </a:rPr>
+              <a:t>4.5　テスト</a:t>
+            </a:r>
+            <a:endParaRPr lang="en-US" sz="1200" dirty="0"/>
+          </a:p>
+        </p:txBody>
+      </p:sp>
+      <p:sp>
+        <p:nvSpPr>
+          <p:cNvPr id="3" name="Text 1"/>
+          <p:cNvSpPr/>
+          <p:nvPr/>
+        </p:nvSpPr>
+        <p:spPr>
+          <a:xfrm>
+            <a:off x="548640" y="603504"/>
+            <a:ext cx="11064240" cy="731520"/>
+          </a:xfrm>
+          <a:prstGeom prst="rect">
+            <a:avLst/>
+          </a:prstGeom>
+          <a:noFill/>
+          <a:ln/>
+        </p:spPr>
+        <p:txBody>
+          <a:bodyPr wrap="square" lIns="0" tIns="0" rIns="0" bIns="0" rtlCol="0" anchor="t"/>
+          <a:lstStyle/>
+          <a:p>
+            <a:pPr indent="0" marL="0">
+              <a:buNone/>
+            </a:pPr>
+            <a:r>
+              <a:rPr lang="en-US" sz="3000" b="1" dirty="0">
+                <a:solidFill>
+                  <a:srgbClr val="16191D"/>
+                </a:solidFill>
+                <a:latin typeface="Yu Gothic" pitchFamily="34" charset="0"/>
+                <a:ea typeface="Yu Gothic" pitchFamily="34" charset="-122"/>
+                <a:cs typeface="Yu Gothic" pitchFamily="34" charset="-120"/>
+              </a:rPr>
+              <a:t>テストは、バグが無いことを証明しない</a:t>
+            </a:r>
+            <a:endParaRPr lang="en-US" sz="3000" dirty="0"/>
+          </a:p>
+        </p:txBody>
+      </p:sp>
+      <p:sp>
+        <p:nvSpPr>
+          <p:cNvPr id="4" name="Text 2"/>
+          <p:cNvSpPr/>
+          <p:nvPr/>
+        </p:nvSpPr>
+        <p:spPr>
+          <a:xfrm>
+            <a:off x="11247120" y="6355080"/>
+            <a:ext cx="548640" cy="274320"/>
+          </a:xfrm>
+          <a:prstGeom prst="rect">
+            <a:avLst/>
+          </a:prstGeom>
+          <a:noFill/>
+          <a:ln/>
+        </p:spPr>
+        <p:txBody>
+          <a:bodyPr wrap="square" lIns="0" tIns="0" rIns="0" bIns="0" rtlCol="0" anchor="ctr"/>
+          <a:lstStyle/>
+          <a:p>
+            <a:pPr algn="r" indent="0" marL="0">
+              <a:buNone/>
+            </a:pPr>
+            <a:r>
+              <a:rPr lang="en-US" sz="1000" dirty="0">
+                <a:solidFill>
+                  <a:srgbClr val="5F6672"/>
+                </a:solidFill>
+                <a:latin typeface="Yu Gothic" pitchFamily="34" charset="0"/>
+                <a:ea typeface="Yu Gothic" pitchFamily="34" charset="-122"/>
+                <a:cs typeface="Yu Gothic" pitchFamily="34" charset="-120"/>
+              </a:rPr>
+              <a:t>22</a:t>
+            </a:r>
+            <a:endParaRPr lang="en-US" sz="1000" dirty="0"/>
+          </a:p>
+        </p:txBody>
+      </p:sp>
+      <p:sp>
+        <p:nvSpPr>
+          <p:cNvPr id="5" name="Text 3"/>
+          <p:cNvSpPr/>
+          <p:nvPr/>
+        </p:nvSpPr>
+        <p:spPr>
+          <a:xfrm>
+            <a:off x="685800" y="1481328"/>
+            <a:ext cx="10789920" cy="566928"/>
+          </a:xfrm>
+          <a:prstGeom prst="rect">
+            <a:avLst/>
+          </a:prstGeom>
+          <a:noFill/>
+          <a:ln/>
+        </p:spPr>
+        <p:txBody>
+          <a:bodyPr wrap="square" lIns="0" tIns="0" rIns="0" bIns="0" rtlCol="0" anchor="ctr"/>
+          <a:lstStyle/>
+          <a:p>
+            <a:pPr indent="0" marL="0">
+              <a:lnSpc>
+                <a:spcPts val="2200"/>
+              </a:lnSpc>
+              <a:buNone/>
+            </a:pPr>
+            <a:r>
+              <a:rPr lang="en-US" sz="1500" dirty="0">
+                <a:solidFill>
+                  <a:srgbClr val="16191D"/>
+                </a:solidFill>
+                <a:latin typeface="Yu Gothic" pitchFamily="34" charset="0"/>
+                <a:ea typeface="Yu Gothic" pitchFamily="34" charset="-122"/>
+                <a:cs typeface="Yu Gothic" pitchFamily="34" charset="-120"/>
+              </a:rPr>
+              <a:t>単体・結合・回帰の3種類がある。自動化がいちばん効くのは回帰テストである —— 人間は一度直した箇所を二度と確かめないが、機械は毎回確かめる。</a:t>
+            </a:r>
+            <a:endParaRPr lang="en-US" sz="1500" dirty="0"/>
+          </a:p>
+        </p:txBody>
+      </p:sp>
+      <p:sp>
+        <p:nvSpPr>
+          <p:cNvPr id="6" name="Shape 4"/>
+          <p:cNvSpPr/>
+          <p:nvPr/>
+        </p:nvSpPr>
+        <p:spPr>
+          <a:xfrm>
+            <a:off x="685800" y="2130552"/>
+            <a:ext cx="10789920" cy="713232"/>
+          </a:xfrm>
+          <a:prstGeom prst="roundRect">
+            <a:avLst>
+              <a:gd name="adj" fmla="val 7692"/>
+            </a:avLst>
+          </a:prstGeom>
+          <a:solidFill>
+            <a:srgbClr val="D9E6F4"/>
+          </a:solidFill>
+          <a:ln w="19050">
+            <a:solidFill>
+              <a:srgbClr val="0B5CAD"/>
+            </a:solidFill>
+            <a:prstDash val="solid"/>
+          </a:ln>
+        </p:spPr>
+      </p:sp>
+      <p:sp>
+        <p:nvSpPr>
+          <p:cNvPr id="7" name="Text 5"/>
+          <p:cNvSpPr/>
+          <p:nvPr/>
+        </p:nvSpPr>
+        <p:spPr>
+          <a:xfrm>
+            <a:off x="914400" y="2286000"/>
+            <a:ext cx="10332720" cy="402336"/>
+          </a:xfrm>
+          <a:prstGeom prst="rect">
+            <a:avLst/>
+          </a:prstGeom>
+          <a:noFill/>
+          <a:ln/>
+        </p:spPr>
+        <p:txBody>
+          <a:bodyPr wrap="square" lIns="0" tIns="0" rIns="0" bIns="0" rtlCol="0" anchor="ctr"/>
+          <a:lstStyle/>
+          <a:p>
+            <a:pPr indent="0" marL="0">
+              <a:buNone/>
+            </a:pPr>
+            <a:r>
+              <a:rPr lang="en-US" sz="1700" b="1" dirty="0">
+                <a:solidFill>
+                  <a:srgbClr val="0B5CAD"/>
+                </a:solidFill>
+                <a:latin typeface="Yu Gothic" pitchFamily="34" charset="0"/>
+                <a:ea typeface="Yu Gothic" pitchFamily="34" charset="-122"/>
+                <a:cs typeface="Yu Gothic" pitchFamily="34" charset="-120"/>
+              </a:rPr>
+              <a:t>テストはバグの存在を示せるが、不在は示せない</a:t>
+            </a:r>
+            <a:endParaRPr lang="en-US" sz="1700" dirty="0"/>
+          </a:p>
+        </p:txBody>
+      </p:sp>
+      <p:sp>
+        <p:nvSpPr>
+          <p:cNvPr id="8" name="Text 6"/>
+          <p:cNvSpPr/>
+          <p:nvPr/>
+        </p:nvSpPr>
+        <p:spPr>
+          <a:xfrm>
+            <a:off x="1188720" y="3090672"/>
+            <a:ext cx="4572000" cy="457200"/>
+          </a:xfrm>
+          <a:prstGeom prst="rect">
+            <a:avLst/>
+          </a:prstGeom>
+          <a:noFill/>
+          <a:ln/>
+        </p:spPr>
+        <p:txBody>
+          <a:bodyPr wrap="square" lIns="0" tIns="0" rIns="0" bIns="0" rtlCol="0" anchor="ctr"/>
+          <a:lstStyle/>
+          <a:p>
+            <a:pPr algn="r" indent="0" marL="0">
+              <a:buNone/>
+            </a:pPr>
+            <a:r>
+              <a:rPr lang="en-US" sz="1500" dirty="0">
+                <a:solidFill>
+                  <a:srgbClr val="16191D"/>
+                </a:solidFill>
+                <a:latin typeface="Yu Gothic" pitchFamily="34" charset="0"/>
+                <a:ea typeface="Yu Gothic" pitchFamily="34" charset="-122"/>
+                <a:cs typeface="Yu Gothic" pitchFamily="34" charset="-120"/>
+              </a:rPr>
+              <a:t>テストが通った</a:t>
+            </a:r>
+            <a:endParaRPr lang="en-US" sz="1500" dirty="0"/>
+          </a:p>
+        </p:txBody>
+      </p:sp>
+      <p:sp>
+        <p:nvSpPr>
+          <p:cNvPr id="9" name="Shape 7"/>
+          <p:cNvSpPr/>
+          <p:nvPr/>
+        </p:nvSpPr>
+        <p:spPr>
+          <a:xfrm>
+            <a:off x="5943600" y="3218688"/>
+            <a:ext cx="640080" cy="201168"/>
+          </a:xfrm>
+          <a:prstGeom prst="rightArrow">
+            <a:avLst/>
+          </a:prstGeom>
+          <a:solidFill>
+            <a:srgbClr val="0B5CAD"/>
+          </a:solidFill>
+          <a:ln/>
+        </p:spPr>
+      </p:sp>
+      <p:sp>
+        <p:nvSpPr>
+          <p:cNvPr id="10" name="Text 8"/>
+          <p:cNvSpPr/>
+          <p:nvPr/>
+        </p:nvSpPr>
+        <p:spPr>
+          <a:xfrm>
+            <a:off x="6766560" y="3090672"/>
+            <a:ext cx="4206240" cy="457200"/>
+          </a:xfrm>
+          <a:prstGeom prst="rect">
+            <a:avLst/>
+          </a:prstGeom>
+          <a:noFill/>
+          <a:ln/>
+        </p:spPr>
+        <p:txBody>
+          <a:bodyPr wrap="square" lIns="0" tIns="0" rIns="0" bIns="0" rtlCol="0" anchor="ctr"/>
+          <a:lstStyle/>
+          <a:p>
+            <a:pPr indent="0" marL="0">
+              <a:buNone/>
+            </a:pPr>
+            <a:r>
+              <a:rPr lang="en-US" sz="1600" b="1" dirty="0">
+                <a:solidFill>
+                  <a:srgbClr val="0B5CAD"/>
+                </a:solidFill>
+                <a:latin typeface="Yu Gothic" pitchFamily="34" charset="0"/>
+                <a:ea typeface="Yu Gothic" pitchFamily="34" charset="-122"/>
+                <a:cs typeface="Yu Gothic" pitchFamily="34" charset="-120"/>
+              </a:rPr>
+              <a:t>バグが見つからなかった</a:t>
+            </a:r>
+            <a:endParaRPr lang="en-US" sz="1600" dirty="0"/>
+          </a:p>
+        </p:txBody>
+      </p:sp>
+      <p:sp>
+        <p:nvSpPr>
+          <p:cNvPr id="11" name="Text 9"/>
+          <p:cNvSpPr/>
+          <p:nvPr/>
+        </p:nvSpPr>
+        <p:spPr>
+          <a:xfrm>
+            <a:off x="1188720" y="3712464"/>
+            <a:ext cx="4572000" cy="457200"/>
+          </a:xfrm>
+          <a:prstGeom prst="rect">
+            <a:avLst/>
+          </a:prstGeom>
+          <a:noFill/>
+          <a:ln/>
+        </p:spPr>
+        <p:txBody>
+          <a:bodyPr wrap="square" lIns="0" tIns="0" rIns="0" bIns="0" rtlCol="0" anchor="ctr"/>
+          <a:lstStyle/>
+          <a:p>
+            <a:pPr algn="r" indent="0" marL="0">
+              <a:buNone/>
+            </a:pPr>
+            <a:r>
+              <a:rPr lang="en-US" sz="1500" dirty="0">
+                <a:solidFill>
+                  <a:srgbClr val="16191D"/>
+                </a:solidFill>
+                <a:latin typeface="Yu Gothic" pitchFamily="34" charset="0"/>
+                <a:ea typeface="Yu Gothic" pitchFamily="34" charset="-122"/>
+                <a:cs typeface="Yu Gothic" pitchFamily="34" charset="-120"/>
+              </a:rPr>
+              <a:t>バグが無い</a:t>
+            </a:r>
+            <a:endParaRPr lang="en-US" sz="1500" dirty="0"/>
+          </a:p>
+        </p:txBody>
+      </p:sp>
+      <p:sp>
+        <p:nvSpPr>
+          <p:cNvPr id="12" name="Shape 10"/>
+          <p:cNvSpPr/>
+          <p:nvPr/>
+        </p:nvSpPr>
+        <p:spPr>
+          <a:xfrm>
+            <a:off x="5943600" y="3840480"/>
+            <a:ext cx="640080" cy="201168"/>
+          </a:xfrm>
+          <a:prstGeom prst="rightArrow">
+            <a:avLst/>
+          </a:prstGeom>
+          <a:solidFill>
+            <a:srgbClr val="0B5CAD"/>
+          </a:solidFill>
+          <a:ln/>
+        </p:spPr>
+      </p:sp>
+      <p:sp>
+        <p:nvSpPr>
+          <p:cNvPr id="13" name="Text 11"/>
+          <p:cNvSpPr/>
+          <p:nvPr/>
+        </p:nvSpPr>
+        <p:spPr>
+          <a:xfrm>
+            <a:off x="6766560" y="3712464"/>
+            <a:ext cx="4206240" cy="457200"/>
+          </a:xfrm>
+          <a:prstGeom prst="rect">
+            <a:avLst/>
+          </a:prstGeom>
+          <a:noFill/>
+          <a:ln/>
+        </p:spPr>
+        <p:txBody>
+          <a:bodyPr wrap="square" lIns="0" tIns="0" rIns="0" bIns="0" rtlCol="0" anchor="ctr"/>
+          <a:lstStyle/>
+          <a:p>
+            <a:pPr indent="0" marL="0">
+              <a:buNone/>
+            </a:pPr>
+            <a:r>
+              <a:rPr lang="en-US" sz="1600" b="1" dirty="0">
+                <a:solidFill>
+                  <a:srgbClr val="0B5CAD"/>
+                </a:solidFill>
+                <a:latin typeface="Yu Gothic" pitchFamily="34" charset="0"/>
+                <a:ea typeface="Yu Gothic" pitchFamily="34" charset="-122"/>
+                <a:cs typeface="Yu Gothic" pitchFamily="34" charset="-120"/>
+              </a:rPr>
+              <a:t>別の主張</a:t>
+            </a:r>
+            <a:endParaRPr lang="en-US" sz="1600" dirty="0"/>
+          </a:p>
+        </p:txBody>
+      </p:sp>
+      <p:sp>
+        <p:nvSpPr>
+          <p:cNvPr id="14" name="Text 12"/>
+          <p:cNvSpPr/>
+          <p:nvPr/>
+        </p:nvSpPr>
+        <p:spPr>
+          <a:xfrm>
+            <a:off x="685800" y="4425696"/>
+            <a:ext cx="10789920" cy="457200"/>
+          </a:xfrm>
+          <a:prstGeom prst="rect">
+            <a:avLst/>
+          </a:prstGeom>
+          <a:noFill/>
+          <a:ln/>
+        </p:spPr>
+        <p:txBody>
+          <a:bodyPr wrap="square" lIns="0" tIns="0" rIns="0" bIns="0" rtlCol="0" anchor="ctr"/>
+          <a:lstStyle/>
+          <a:p>
+            <a:pPr indent="0" marL="0">
+              <a:lnSpc>
+                <a:spcPts val="2000"/>
+              </a:lnSpc>
+              <a:buNone/>
+            </a:pPr>
+            <a:r>
+              <a:rPr lang="en-US" sz="1300" dirty="0">
+                <a:solidFill>
+                  <a:srgbClr val="5F6672"/>
+                </a:solidFill>
+                <a:latin typeface="Yu Gothic" pitchFamily="34" charset="0"/>
+                <a:ea typeface="Yu Gothic" pitchFamily="34" charset="-122"/>
+                <a:cs typeface="Yu Gothic" pitchFamily="34" charset="-120"/>
+              </a:rPr>
+              <a:t>第1回のライスの定理 —— プログラムの振る舞いに関する自明でない性質は、すべて決定不能である。</a:t>
+            </a:r>
+            <a:endParaRPr lang="en-US" sz="1300" dirty="0"/>
+          </a:p>
+          <a:p>
+            <a:pPr indent="0" marL="0">
+              <a:lnSpc>
+                <a:spcPts val="2000"/>
+              </a:lnSpc>
+              <a:buNone/>
+            </a:pPr>
+            <a:r>
+              <a:rPr lang="en-US" sz="1300" dirty="0">
+                <a:solidFill>
+                  <a:srgbClr val="5F6672"/>
+                </a:solidFill>
+                <a:latin typeface="Yu Gothic" pitchFamily="34" charset="0"/>
+                <a:ea typeface="Yu Gothic" pitchFamily="34" charset="-122"/>
+                <a:cs typeface="Yu Gothic" pitchFamily="34" charset="-120"/>
+              </a:rPr>
+              <a:t>テストは有限個の入力で試すだけなので、試していない入力については何も言えない。</a:t>
+            </a:r>
+            <a:endParaRPr lang="en-US" sz="1300" dirty="0"/>
+          </a:p>
+        </p:txBody>
+      </p:sp>
+      <p:sp>
+        <p:nvSpPr>
+          <p:cNvPr id="15" name="Text 13"/>
+          <p:cNvSpPr/>
+          <p:nvPr/>
+        </p:nvSpPr>
+        <p:spPr>
+          <a:xfrm>
+            <a:off x="685800" y="5852160"/>
+            <a:ext cx="10789920" cy="512064"/>
+          </a:xfrm>
+          <a:prstGeom prst="rect">
+            <a:avLst/>
+          </a:prstGeom>
+          <a:noFill/>
+          <a:ln/>
+        </p:spPr>
+        <p:txBody>
+          <a:bodyPr wrap="square" lIns="0" tIns="0" rIns="0" bIns="0" rtlCol="0" anchor="ctr"/>
+          <a:lstStyle/>
+          <a:p>
+            <a:pPr indent="0" marL="0">
+              <a:lnSpc>
+                <a:spcPts val="1900"/>
+              </a:lnSpc>
+              <a:buNone/>
+            </a:pPr>
+            <a:r>
+              <a:rPr lang="en-US" sz="1300" b="1" dirty="0">
+                <a:solidFill>
+                  <a:srgbClr val="0B5CAD"/>
+                </a:solidFill>
+                <a:latin typeface="Yu Gothic" pitchFamily="34" charset="0"/>
+                <a:ea typeface="Yu Gothic" pitchFamily="34" charset="-122"/>
+                <a:cs typeface="Yu Gothic" pitchFamily="34" charset="-120"/>
+              </a:rPr>
+              <a:t>型検査とテストは競合しない。型は全入力について「ある種の誤りが無いこと」を保証し、テストは「ある入力で正しく動くこと」を示す。</a:t>
+            </a:r>
+            <a:endParaRPr lang="en-US" sz="1300" dirty="0"/>
+          </a:p>
+        </p:txBody>
+      </p:sp>
+    </p:spTree>
+  </p:cSld>
+  <p:clrMapOvr>
+    <a:masterClrMapping/>
+  </p:clrMapOvr>
+</p:sld>
+</file>
+
+<file path=ppt/slides/slide23.xml><?xml version="1.0" encoding="utf-8"?>
+<p:sld xmlns:a="http://schemas.openxmlformats.org/drawingml/2006/main" xmlns:r="http://schemas.openxmlformats.org/officeDocument/2006/relationships" xmlns:p="http://schemas.openxmlformats.org/presentationml/2006/main">
+  <p:cSld name="Slide 23">
+    <p:bg>
+      <p:bgPr>
+        <a:solidFill>
+          <a:srgbClr val="FFFFFF"/>
+        </a:solidFill>
+      </p:bgPr>
+    </p:bg>
+    <p:spTree>
+      <p:nvGrpSpPr>
+        <p:cNvPr id="1" name=""/>
+        <p:cNvGrpSpPr/>
+        <p:nvPr/>
+      </p:nvGrpSpPr>
+      <p:grpSpPr>
+        <a:xfrm>
+          <a:off x="0" y="0"/>
+          <a:ext cx="0" cy="0"/>
+          <a:chOff x="0" y="0"/>
+          <a:chExt cx="0" cy="0"/>
+        </a:xfrm>
+      </p:grpSpPr>
+      <p:sp>
+        <p:nvSpPr>
+          <p:cNvPr id="2" name="Text 0"/>
+          <p:cNvSpPr/>
+          <p:nvPr/>
+        </p:nvSpPr>
+        <p:spPr>
+          <a:xfrm>
+            <a:off x="566928" y="310896"/>
+            <a:ext cx="4572000" cy="256032"/>
+          </a:xfrm>
+          <a:prstGeom prst="rect">
+            <a:avLst/>
+          </a:prstGeom>
+          <a:noFill/>
+          <a:ln/>
+        </p:spPr>
+        <p:txBody>
+          <a:bodyPr wrap="square" lIns="0" tIns="0" rIns="0" bIns="0" rtlCol="0" anchor="ctr"/>
+          <a:lstStyle/>
+          <a:p>
+            <a:pPr indent="0" marL="0">
+              <a:buNone/>
+            </a:pPr>
+            <a:r>
+              <a:rPr lang="en-US" sz="1200" b="1" dirty="0">
+                <a:solidFill>
+                  <a:srgbClr val="0B5CAD"/>
+                </a:solidFill>
+                <a:latin typeface="Yu Gothic" pitchFamily="34" charset="0"/>
+                <a:ea typeface="Yu Gothic" pitchFamily="34" charset="-122"/>
+                <a:cs typeface="Yu Gothic" pitchFamily="34" charset="-120"/>
+              </a:rPr>
+              <a:t>4.5　テスト</a:t>
+            </a:r>
+            <a:endParaRPr lang="en-US" sz="1200" dirty="0"/>
+          </a:p>
+        </p:txBody>
+      </p:sp>
+      <p:sp>
+        <p:nvSpPr>
+          <p:cNvPr id="3" name="Text 1"/>
+          <p:cNvSpPr/>
+          <p:nvPr/>
+        </p:nvSpPr>
+        <p:spPr>
+          <a:xfrm>
+            <a:off x="548640" y="603504"/>
+            <a:ext cx="11064240" cy="731520"/>
+          </a:xfrm>
+          <a:prstGeom prst="rect">
+            <a:avLst/>
+          </a:prstGeom>
+          <a:noFill/>
+          <a:ln/>
+        </p:spPr>
+        <p:txBody>
+          <a:bodyPr wrap="square" lIns="0" tIns="0" rIns="0" bIns="0" rtlCol="0" anchor="t"/>
+          <a:lstStyle/>
+          <a:p>
+            <a:pPr indent="0" marL="0">
+              <a:buNone/>
+            </a:pPr>
+            <a:r>
+              <a:rPr lang="en-US" sz="3000" b="1" dirty="0">
+                <a:solidFill>
+                  <a:srgbClr val="16191D"/>
+                </a:solidFill>
+                <a:latin typeface="Yu Gothic" pitchFamily="34" charset="0"/>
+                <a:ea typeface="Yu Gothic" pitchFamily="34" charset="-122"/>
+                <a:cs typeface="Yu Gothic" pitchFamily="34" charset="-120"/>
+              </a:rPr>
+              <a:t>第1回の3つの迂回策が、そのまま道具になる</a:t>
+            </a:r>
+            <a:endParaRPr lang="en-US" sz="3000" dirty="0"/>
+          </a:p>
+        </p:txBody>
+      </p:sp>
+      <p:sp>
+        <p:nvSpPr>
+          <p:cNvPr id="4" name="Text 2"/>
+          <p:cNvSpPr/>
+          <p:nvPr/>
+        </p:nvSpPr>
+        <p:spPr>
+          <a:xfrm>
+            <a:off x="11247120" y="6355080"/>
+            <a:ext cx="548640" cy="274320"/>
+          </a:xfrm>
+          <a:prstGeom prst="rect">
+            <a:avLst/>
+          </a:prstGeom>
+          <a:noFill/>
+          <a:ln/>
+        </p:spPr>
+        <p:txBody>
+          <a:bodyPr wrap="square" lIns="0" tIns="0" rIns="0" bIns="0" rtlCol="0" anchor="ctr"/>
+          <a:lstStyle/>
+          <a:p>
+            <a:pPr algn="r" indent="0" marL="0">
+              <a:buNone/>
+            </a:pPr>
+            <a:r>
+              <a:rPr lang="en-US" sz="1000" dirty="0">
+                <a:solidFill>
+                  <a:srgbClr val="5F6672"/>
+                </a:solidFill>
+                <a:latin typeface="Yu Gothic" pitchFamily="34" charset="0"/>
+                <a:ea typeface="Yu Gothic" pitchFamily="34" charset="-122"/>
+                <a:cs typeface="Yu Gothic" pitchFamily="34" charset="-120"/>
+              </a:rPr>
+              <a:t>23</a:t>
+            </a:r>
+            <a:endParaRPr lang="en-US" sz="1000" dirty="0"/>
+          </a:p>
+        </p:txBody>
+      </p:sp>
+      <p:sp>
+        <p:nvSpPr>
+          <p:cNvPr id="5" name="Text 3"/>
+          <p:cNvSpPr/>
+          <p:nvPr/>
+        </p:nvSpPr>
+        <p:spPr>
+          <a:xfrm>
+            <a:off x="685800" y="1481328"/>
+            <a:ext cx="10789920" cy="365760"/>
+          </a:xfrm>
+          <a:prstGeom prst="rect">
+            <a:avLst/>
+          </a:prstGeom>
+          <a:noFill/>
+          <a:ln/>
+        </p:spPr>
+        <p:txBody>
+          <a:bodyPr wrap="square" lIns="0" tIns="0" rIns="0" bIns="0" rtlCol="0" anchor="ctr"/>
+          <a:lstStyle/>
+          <a:p>
+            <a:pPr indent="0" marL="0">
+              <a:lnSpc>
+                <a:spcPts val="2200"/>
+              </a:lnSpc>
+              <a:buNone/>
+            </a:pPr>
+            <a:r>
+              <a:rPr lang="en-US" sz="1500" dirty="0">
+                <a:solidFill>
+                  <a:srgbClr val="16191D"/>
+                </a:solidFill>
+                <a:latin typeface="Yu Gothic" pitchFamily="34" charset="0"/>
+                <a:ea typeface="Yu Gothic" pitchFamily="34" charset="-122"/>
+                <a:cs typeface="Yu Gothic" pitchFamily="34" charset="-120"/>
+              </a:rPr>
+              <a:t>決定不能性は技術の未熟さではない。だから「迂回する」ことが開発の道具立てそのものになる。</a:t>
+            </a:r>
+            <a:endParaRPr lang="en-US" sz="1500" dirty="0"/>
+          </a:p>
+        </p:txBody>
+      </p:sp>
+      <p:graphicFrame>
+        <p:nvGraphicFramePr>
+          <p:cNvPr id="24" name="Table 0"/>
+          <p:cNvGraphicFramePr>
+            <a:graphicFrameLocks noGrp="1"/>
+          </p:cNvGraphicFramePr>
+          <p:nvPr>
+            <p:extLst>
+              <p:ext uri="{D42A27DB-BD31-4B8C-83A1-F6EECF244321}">
+                <p14:modId xmlns:p14="http://schemas.microsoft.com/office/powerpoint/2010/main" val="1579011935"/>
+              </p:ext>
+            </p:extLst>
+          </p:nvPr>
+        </p:nvGraphicFramePr>
+        <p:xfrm>
+          <a:off x="685800" y="1883664"/>
+          <a:ext cx="10789920" cy="914400"/>
+        </p:xfrm>
+        <a:graphic>
+          <a:graphicData uri="http://schemas.openxmlformats.org/drawingml/2006/table">
+            <a:tbl>
+              <a:tblPr/>
+              <a:tblGrid>
+                <a:gridCol w="2651760"/>
+                <a:gridCol w="3017520"/>
+                <a:gridCol w="5120640"/>
+              </a:tblGrid>
+              <a:tr h="457200">
+                <a:tc>
+                  <a:txBody>
+                    <a:bodyPr/>
+                    <a:lstStyle/>
+                    <a:p>
+                      <a:pPr algn="l" indent="0" marL="0">
+                        <a:buNone/>
+                      </a:pPr>
+                      <a:r>
+                        <a:rPr lang="en-US" sz="1300" b="1" dirty="0">
+                          <a:solidFill>
+                            <a:srgbClr val="000000"/>
+                          </a:solidFill>
+                          <a:latin typeface="Yu Gothic" pitchFamily="34" charset="0"/>
+                          <a:ea typeface="Yu Gothic" pitchFamily="34" charset="-122"/>
+                          <a:cs typeface="Yu Gothic" pitchFamily="34" charset="-120"/>
+                        </a:rPr>
+                        <a:t>第1回の迂回策</a:t>
+                      </a:r>
+                      <a:endParaRPr lang="en-US" sz="1300" dirty="0">
+                        <a:latin typeface="Yu Gothic" charset="0"/>
+                        <a:ea typeface="Yu Gothic" charset="0"/>
+                        <a:cs typeface="Yu Gothic" charset="0"/>
+                      </a:endParaRPr>
+                    </a:p>
+                  </a:txBody>
+                  <a:tcPr marL="91440" marR="91440" marT="45720" marB="45720" anchor="ctr">
+                    <a:lnL w="12700" cap="flat" cmpd="sng" algn="ctr">
+                      <a:solidFill>
+                        <a:srgbClr val="DDE4EC"/>
+                      </a:solidFill>
+                      <a:prstDash val="solid"/>
+                      <a:round/>
+                      <a:headEnd type="none" w="med" len="med"/>
+                      <a:tailEnd type="none" w="med" len="med"/>
+                    </a:lnL>
+                    <a:lnR w="12700" cap="flat" cmpd="sng" algn="ctr">
+                      <a:solidFill>
+                        <a:srgbClr val="DDE4EC"/>
+                      </a:solidFill>
+                      <a:prstDash val="solid"/>
+                      <a:round/>
+                      <a:headEnd type="none" w="med" len="med"/>
+                      <a:tailEnd type="none" w="med" len="med"/>
+                    </a:lnR>
+                    <a:lnT w="12700" cap="flat" cmpd="sng" algn="ctr">
+                      <a:solidFill>
+                        <a:srgbClr val="DDE4EC"/>
+                      </a:solidFill>
+                      <a:prstDash val="solid"/>
+                      <a:round/>
+                      <a:headEnd type="none" w="med" len="med"/>
+                      <a:tailEnd type="none" w="med" len="med"/>
+                    </a:lnT>
+                    <a:lnB w="12700" cap="flat" cmpd="sng" algn="ctr">
+                      <a:solidFill>
+                        <a:srgbClr val="DDE4EC"/>
+                      </a:solidFill>
+                      <a:prstDash val="solid"/>
+                      <a:round/>
+                      <a:headEnd type="none" w="med" len="med"/>
+                      <a:tailEnd type="none" w="med" len="med"/>
+                    </a:lnB>
+                    <a:solidFill>
+                      <a:srgbClr val="EEF1F5"/>
+                    </a:solidFill>
+                  </a:tcPr>
+                </a:tc>
+                <a:tc>
+                  <a:txBody>
+                    <a:bodyPr/>
+                    <a:lstStyle/>
+                    <a:p>
+                      <a:pPr algn="l" indent="0" marL="0">
+                        <a:buNone/>
+                      </a:pPr>
+                      <a:r>
+                        <a:rPr lang="en-US" sz="1300" b="1" dirty="0">
+                          <a:solidFill>
+                            <a:srgbClr val="000000"/>
+                          </a:solidFill>
+                          <a:latin typeface="Yu Gothic" pitchFamily="34" charset="0"/>
+                          <a:ea typeface="Yu Gothic" pitchFamily="34" charset="-122"/>
+                          <a:cs typeface="Yu Gothic" pitchFamily="34" charset="-120"/>
+                        </a:rPr>
+                        <a:t>対応する道具</a:t>
+                      </a:r>
+                      <a:endParaRPr lang="en-US" sz="1300" dirty="0">
+                        <a:latin typeface="Yu Gothic" charset="0"/>
+                        <a:ea typeface="Yu Gothic" charset="0"/>
+                        <a:cs typeface="Yu Gothic" charset="0"/>
+                      </a:endParaRPr>
+                    </a:p>
+                  </a:txBody>
+                  <a:tcPr marL="91440" marR="91440" marT="45720" marB="45720" anchor="ctr">
+                    <a:lnL w="12700" cap="flat" cmpd="sng" algn="ctr">
+                      <a:solidFill>
+                        <a:srgbClr val="DDE4EC"/>
+                      </a:solidFill>
+                      <a:prstDash val="solid"/>
+                      <a:round/>
+                      <a:headEnd type="none" w="med" len="med"/>
+                      <a:tailEnd type="none" w="med" len="med"/>
+                    </a:lnL>
+                    <a:lnR w="12700" cap="flat" cmpd="sng" algn="ctr">
+                      <a:solidFill>
+                        <a:srgbClr val="DDE4EC"/>
+                      </a:solidFill>
+                      <a:prstDash val="solid"/>
+                      <a:round/>
+                      <a:headEnd type="none" w="med" len="med"/>
+                      <a:tailEnd type="none" w="med" len="med"/>
+                    </a:lnR>
+                    <a:lnT w="12700" cap="flat" cmpd="sng" algn="ctr">
+                      <a:solidFill>
+                        <a:srgbClr val="DDE4EC"/>
+                      </a:solidFill>
+                      <a:prstDash val="solid"/>
+                      <a:round/>
+                      <a:headEnd type="none" w="med" len="med"/>
+                      <a:tailEnd type="none" w="med" len="med"/>
+                    </a:lnT>
+                    <a:lnB w="12700" cap="flat" cmpd="sng" algn="ctr">
+                      <a:solidFill>
+                        <a:srgbClr val="DDE4EC"/>
+                      </a:solidFill>
+                      <a:prstDash val="solid"/>
+                      <a:round/>
+                      <a:headEnd type="none" w="med" len="med"/>
+                      <a:tailEnd type="none" w="med" len="med"/>
+                    </a:lnB>
+                    <a:solidFill>
+                      <a:srgbClr val="EEF1F5"/>
+                    </a:solidFill>
+                  </a:tcPr>
+                </a:tc>
+                <a:tc>
+                  <a:txBody>
+                    <a:bodyPr/>
+                    <a:lstStyle/>
+                    <a:p>
+                      <a:pPr algn="l" indent="0" marL="0">
+                        <a:buNone/>
+                      </a:pPr>
+                      <a:r>
+                        <a:rPr lang="en-US" sz="1300" b="1" dirty="0">
+                          <a:solidFill>
+                            <a:srgbClr val="000000"/>
+                          </a:solidFill>
+                          <a:latin typeface="Yu Gothic" pitchFamily="34" charset="0"/>
+                          <a:ea typeface="Yu Gothic" pitchFamily="34" charset="-122"/>
+                          <a:cs typeface="Yu Gothic" pitchFamily="34" charset="-120"/>
+                        </a:rPr>
+                        <a:t>何をしているか</a:t>
+                      </a:r>
+                      <a:endParaRPr lang="en-US" sz="1300" dirty="0">
+                        <a:latin typeface="Yu Gothic" charset="0"/>
+                        <a:ea typeface="Yu Gothic" charset="0"/>
+                        <a:cs typeface="Yu Gothic" charset="0"/>
+                      </a:endParaRPr>
+                    </a:p>
+                  </a:txBody>
+                  <a:tcPr marL="91440" marR="91440" marT="45720" marB="45720" anchor="ctr">
+                    <a:lnL w="12700" cap="flat" cmpd="sng" algn="ctr">
+                      <a:solidFill>
+                        <a:srgbClr val="DDE4EC"/>
+                      </a:solidFill>
+                      <a:prstDash val="solid"/>
+                      <a:round/>
+                      <a:headEnd type="none" w="med" len="med"/>
+                      <a:tailEnd type="none" w="med" len="med"/>
+                    </a:lnL>
+                    <a:lnR w="12700" cap="flat" cmpd="sng" algn="ctr">
+                      <a:solidFill>
+                        <a:srgbClr val="DDE4EC"/>
+                      </a:solidFill>
+                      <a:prstDash val="solid"/>
+                      <a:round/>
+                      <a:headEnd type="none" w="med" len="med"/>
+                      <a:tailEnd type="none" w="med" len="med"/>
+                    </a:lnR>
+                    <a:lnT w="12700" cap="flat" cmpd="sng" algn="ctr">
+                      <a:solidFill>
+                        <a:srgbClr val="DDE4EC"/>
+                      </a:solidFill>
+                      <a:prstDash val="solid"/>
+                      <a:round/>
+                      <a:headEnd type="none" w="med" len="med"/>
+                      <a:tailEnd type="none" w="med" len="med"/>
+                    </a:lnT>
+                    <a:lnB w="12700" cap="flat" cmpd="sng" algn="ctr">
+                      <a:solidFill>
+                        <a:srgbClr val="DDE4EC"/>
+                      </a:solidFill>
+                      <a:prstDash val="solid"/>
+                      <a:round/>
+                      <a:headEnd type="none" w="med" len="med"/>
+                      <a:tailEnd type="none" w="med" len="med"/>
+                    </a:lnB>
+                    <a:solidFill>
+                      <a:srgbClr val="EEF1F5"/>
+                    </a:solidFill>
+                  </a:tcPr>
+                </a:tc>
+              </a:tr>
+              <a:tr h="457200">
+                <a:tc>
+                  <a:txBody>
+                    <a:bodyPr/>
+                    <a:lstStyle/>
+                    <a:p>
+                      <a:pPr algn="l" indent="0" marL="0">
+                        <a:buNone/>
+                      </a:pPr>
+                      <a:r>
+                        <a:rPr lang="en-US" sz="1300" dirty="0">
+                          <a:solidFill>
+                            <a:srgbClr val="000000"/>
+                          </a:solidFill>
+                          <a:latin typeface="Yu Gothic" pitchFamily="34" charset="0"/>
+                          <a:ea typeface="Yu Gothic" pitchFamily="34" charset="-122"/>
+                          <a:cs typeface="Yu Gothic" pitchFamily="34" charset="-120"/>
+                        </a:rPr>
+                        <a:t>近似する</a:t>
+                      </a:r>
+                      <a:endParaRPr lang="en-US" sz="1300" dirty="0">
+                        <a:latin typeface="Yu Gothic" charset="0"/>
+                        <a:ea typeface="Yu Gothic" charset="0"/>
+                        <a:cs typeface="Yu Gothic" charset="0"/>
+                      </a:endParaRPr>
+                    </a:p>
+                  </a:txBody>
+                  <a:tcPr marL="91440" marR="91440" marT="45720" marB="45720" anchor="ctr">
+                    <a:lnL w="12700" cap="flat" cmpd="sng" algn="ctr">
+                      <a:solidFill>
+                        <a:srgbClr val="DDE4EC"/>
+                      </a:solidFill>
+                      <a:prstDash val="solid"/>
+                      <a:round/>
+                      <a:headEnd type="none" w="med" len="med"/>
+                      <a:tailEnd type="none" w="med" len="med"/>
+                    </a:lnL>
+                    <a:lnR w="12700" cap="flat" cmpd="sng" algn="ctr">
+                      <a:solidFill>
+                        <a:srgbClr val="DDE4EC"/>
+                      </a:solidFill>
+                      <a:prstDash val="solid"/>
+                      <a:round/>
+                      <a:headEnd type="none" w="med" len="med"/>
+                      <a:tailEnd type="none" w="med" len="med"/>
+                    </a:lnR>
+                    <a:lnT w="12700" cap="flat" cmpd="sng" algn="ctr">
+                      <a:solidFill>
+                        <a:srgbClr val="DDE4EC"/>
+                      </a:solidFill>
+                      <a:prstDash val="solid"/>
+                      <a:round/>
+                      <a:headEnd type="none" w="med" len="med"/>
+                      <a:tailEnd type="none" w="med" len="med"/>
+                    </a:lnT>
+                    <a:lnB w="12700" cap="flat" cmpd="sng" algn="ctr">
+                      <a:solidFill>
+                        <a:srgbClr val="DDE4EC"/>
+                      </a:solidFill>
+                      <a:prstDash val="solid"/>
+                      <a:round/>
+                      <a:headEnd type="none" w="med" len="med"/>
+                      <a:tailEnd type="none" w="med" len="med"/>
+                    </a:lnB>
+                    <a:solidFill>
+                      <a:srgbClr val="FFFFFF"/>
+                    </a:solidFill>
+                  </a:tcPr>
+                </a:tc>
+                <a:tc>
+                  <a:txBody>
+                    <a:bodyPr/>
+                    <a:lstStyle/>
+                    <a:p>
+                      <a:pPr algn="l" indent="0" marL="0">
+                        <a:buNone/>
+                      </a:pPr>
+                      <a:r>
+                        <a:rPr lang="en-US" sz="1300" dirty="0">
+                          <a:solidFill>
+                            <a:srgbClr val="000000"/>
+                          </a:solidFill>
+                          <a:latin typeface="Yu Gothic" pitchFamily="34" charset="0"/>
+                          <a:ea typeface="Yu Gothic" pitchFamily="34" charset="-122"/>
+                          <a:cs typeface="Yu Gothic" pitchFamily="34" charset="-120"/>
+                        </a:rPr>
+                        <a:t>テスト、静的解析</a:t>
+                      </a:r>
+                      <a:endParaRPr lang="en-US" sz="1300" dirty="0">
+                        <a:latin typeface="Yu Gothic" charset="0"/>
+                        <a:ea typeface="Yu Gothic" charset="0"/>
+                        <a:cs typeface="Yu Gothic" charset="0"/>
+                      </a:endParaRPr>
+                    </a:p>
+                  </a:txBody>
+                  <a:tcPr marL="91440" marR="91440" marT="45720" marB="45720" anchor="ctr">
+                    <a:lnL w="12700" cap="flat" cmpd="sng" algn="ctr">
+                      <a:solidFill>
+                        <a:srgbClr val="DDE4EC"/>
+                      </a:solidFill>
+                      <a:prstDash val="solid"/>
+                      <a:round/>
+                      <a:headEnd type="none" w="med" len="med"/>
+                      <a:tailEnd type="none" w="med" len="med"/>
+                    </a:lnL>
+                    <a:lnR w="12700" cap="flat" cmpd="sng" algn="ctr">
+                      <a:solidFill>
+                        <a:srgbClr val="DDE4EC"/>
+                      </a:solidFill>
+                      <a:prstDash val="solid"/>
+                      <a:round/>
+                      <a:headEnd type="none" w="med" len="med"/>
+                      <a:tailEnd type="none" w="med" len="med"/>
+                    </a:lnR>
+                    <a:lnT w="12700" cap="flat" cmpd="sng" algn="ctr">
+                      <a:solidFill>
+                        <a:srgbClr val="DDE4EC"/>
+                      </a:solidFill>
+                      <a:prstDash val="solid"/>
+                      <a:round/>
+                      <a:headEnd type="none" w="med" len="med"/>
+                      <a:tailEnd type="none" w="med" len="med"/>
+                    </a:lnT>
+                    <a:lnB w="12700" cap="flat" cmpd="sng" algn="ctr">
+                      <a:solidFill>
+                        <a:srgbClr val="DDE4EC"/>
+                      </a:solidFill>
+                      <a:prstDash val="solid"/>
+                      <a:round/>
+                      <a:headEnd type="none" w="med" len="med"/>
+                      <a:tailEnd type="none" w="med" len="med"/>
+                    </a:lnB>
+                    <a:solidFill>
+                      <a:srgbClr val="FFFFFF"/>
+                    </a:solidFill>
+                  </a:tcPr>
+                </a:tc>
+                <a:tc>
+                  <a:txBody>
+                    <a:bodyPr/>
+                    <a:lstStyle/>
+                    <a:p>
+                      <a:pPr algn="l" indent="0" marL="0">
+                        <a:buNone/>
+                      </a:pPr>
+                      <a:r>
+                        <a:rPr lang="en-US" sz="1300" dirty="0">
+                          <a:solidFill>
+                            <a:srgbClr val="000000"/>
+                          </a:solidFill>
+                          <a:latin typeface="Yu Gothic" pitchFamily="34" charset="0"/>
+                          <a:ea typeface="Yu Gothic" pitchFamily="34" charset="-122"/>
+                          <a:cs typeface="Yu Gothic" pitchFamily="34" charset="-120"/>
+                        </a:rPr>
+                        <a:t>有限個の入力で試す。危ない箇所を過剰に報告する</a:t>
+                      </a:r>
+                      <a:endParaRPr lang="en-US" sz="1300" dirty="0">
+                        <a:latin typeface="Yu Gothic" charset="0"/>
+                        <a:ea typeface="Yu Gothic" charset="0"/>
+                        <a:cs typeface="Yu Gothic" charset="0"/>
+                      </a:endParaRPr>
+                    </a:p>
+                  </a:txBody>
+                  <a:tcPr marL="91440" marR="91440" marT="45720" marB="45720" anchor="ctr">
+                    <a:lnL w="12700" cap="flat" cmpd="sng" algn="ctr">
+                      <a:solidFill>
+                        <a:srgbClr val="DDE4EC"/>
+                      </a:solidFill>
+                      <a:prstDash val="solid"/>
+                      <a:round/>
+                      <a:headEnd type="none" w="med" len="med"/>
+                      <a:tailEnd type="none" w="med" len="med"/>
+                    </a:lnL>
+                    <a:lnR w="12700" cap="flat" cmpd="sng" algn="ctr">
+                      <a:solidFill>
+                        <a:srgbClr val="DDE4EC"/>
+                      </a:solidFill>
+                      <a:prstDash val="solid"/>
+                      <a:round/>
+                      <a:headEnd type="none" w="med" len="med"/>
+                      <a:tailEnd type="none" w="med" len="med"/>
+                    </a:lnR>
+                    <a:lnT w="12700" cap="flat" cmpd="sng" algn="ctr">
+                      <a:solidFill>
+                        <a:srgbClr val="DDE4EC"/>
+                      </a:solidFill>
+                      <a:prstDash val="solid"/>
+                      <a:round/>
+                      <a:headEnd type="none" w="med" len="med"/>
+                      <a:tailEnd type="none" w="med" len="med"/>
+                    </a:lnT>
+                    <a:lnB w="12700" cap="flat" cmpd="sng" algn="ctr">
+                      <a:solidFill>
+                        <a:srgbClr val="DDE4EC"/>
+                      </a:solidFill>
+                      <a:prstDash val="solid"/>
+                      <a:round/>
+                      <a:headEnd type="none" w="med" len="med"/>
+                      <a:tailEnd type="none" w="med" len="med"/>
+                    </a:lnB>
+                    <a:solidFill>
+                      <a:srgbClr val="FFFFFF"/>
+                    </a:solidFill>
+                  </a:tcPr>
+                </a:tc>
+              </a:tr>
+              <a:tr h="457200">
+                <a:tc>
+                  <a:txBody>
+                    <a:bodyPr/>
+                    <a:lstStyle/>
+                    <a:p>
+                      <a:pPr algn="l" indent="0" marL="0">
+                        <a:buNone/>
+                      </a:pPr>
+                      <a:r>
+                        <a:rPr lang="en-US" sz="1300" dirty="0">
+                          <a:solidFill>
+                            <a:srgbClr val="000000"/>
+                          </a:solidFill>
+                          <a:latin typeface="Yu Gothic" pitchFamily="34" charset="0"/>
+                          <a:ea typeface="Yu Gothic" pitchFamily="34" charset="-122"/>
+                          <a:cs typeface="Yu Gothic" pitchFamily="34" charset="-120"/>
+                        </a:rPr>
+                        <a:t>対象を狭める</a:t>
+                      </a:r>
+                      <a:endParaRPr lang="en-US" sz="1300" dirty="0">
+                        <a:latin typeface="Yu Gothic" charset="0"/>
+                        <a:ea typeface="Yu Gothic" charset="0"/>
+                        <a:cs typeface="Yu Gothic" charset="0"/>
+                      </a:endParaRPr>
+                    </a:p>
+                  </a:txBody>
+                  <a:tcPr marL="91440" marR="91440" marT="45720" marB="45720" anchor="ctr">
+                    <a:lnL w="12700" cap="flat" cmpd="sng" algn="ctr">
+                      <a:solidFill>
+                        <a:srgbClr val="DDE4EC"/>
+                      </a:solidFill>
+                      <a:prstDash val="solid"/>
+                      <a:round/>
+                      <a:headEnd type="none" w="med" len="med"/>
+                      <a:tailEnd type="none" w="med" len="med"/>
+                    </a:lnL>
+                    <a:lnR w="12700" cap="flat" cmpd="sng" algn="ctr">
+                      <a:solidFill>
+                        <a:srgbClr val="DDE4EC"/>
+                      </a:solidFill>
+                      <a:prstDash val="solid"/>
+                      <a:round/>
+                      <a:headEnd type="none" w="med" len="med"/>
+                      <a:tailEnd type="none" w="med" len="med"/>
+                    </a:lnR>
+                    <a:lnT w="12700" cap="flat" cmpd="sng" algn="ctr">
+                      <a:solidFill>
+                        <a:srgbClr val="DDE4EC"/>
+                      </a:solidFill>
+                      <a:prstDash val="solid"/>
+                      <a:round/>
+                      <a:headEnd type="none" w="med" len="med"/>
+                      <a:tailEnd type="none" w="med" len="med"/>
+                    </a:lnT>
+                    <a:lnB w="12700" cap="flat" cmpd="sng" algn="ctr">
+                      <a:solidFill>
+                        <a:srgbClr val="DDE4EC"/>
+                      </a:solidFill>
+                      <a:prstDash val="solid"/>
+                      <a:round/>
+                      <a:headEnd type="none" w="med" len="med"/>
+                      <a:tailEnd type="none" w="med" len="med"/>
+                    </a:lnB>
+                    <a:solidFill>
+                      <a:srgbClr val="FFFFFF"/>
+                    </a:solidFill>
+                  </a:tcPr>
+                </a:tc>
+                <a:tc>
+                  <a:txBody>
+                    <a:bodyPr/>
+                    <a:lstStyle/>
+                    <a:p>
+                      <a:pPr algn="l" indent="0" marL="0">
+                        <a:buNone/>
+                      </a:pPr>
+                      <a:r>
+                        <a:rPr lang="en-US" sz="1300" dirty="0">
+                          <a:solidFill>
+                            <a:srgbClr val="000000"/>
+                          </a:solidFill>
+                          <a:latin typeface="Yu Gothic" pitchFamily="34" charset="0"/>
+                          <a:ea typeface="Yu Gothic" pitchFamily="34" charset="-122"/>
+                          <a:cs typeface="Yu Gothic" pitchFamily="34" charset="-120"/>
+                        </a:rPr>
+                        <a:t>型システム（4.4）</a:t>
+                      </a:r>
+                      <a:endParaRPr lang="en-US" sz="1300" dirty="0">
+                        <a:latin typeface="Yu Gothic" charset="0"/>
+                        <a:ea typeface="Yu Gothic" charset="0"/>
+                        <a:cs typeface="Yu Gothic" charset="0"/>
+                      </a:endParaRPr>
+                    </a:p>
+                  </a:txBody>
+                  <a:tcPr marL="91440" marR="91440" marT="45720" marB="45720" anchor="ctr">
+                    <a:lnL w="12700" cap="flat" cmpd="sng" algn="ctr">
+                      <a:solidFill>
+                        <a:srgbClr val="DDE4EC"/>
+                      </a:solidFill>
+                      <a:prstDash val="solid"/>
+                      <a:round/>
+                      <a:headEnd type="none" w="med" len="med"/>
+                      <a:tailEnd type="none" w="med" len="med"/>
+                    </a:lnL>
+                    <a:lnR w="12700" cap="flat" cmpd="sng" algn="ctr">
+                      <a:solidFill>
+                        <a:srgbClr val="DDE4EC"/>
+                      </a:solidFill>
+                      <a:prstDash val="solid"/>
+                      <a:round/>
+                      <a:headEnd type="none" w="med" len="med"/>
+                      <a:tailEnd type="none" w="med" len="med"/>
+                    </a:lnR>
+                    <a:lnT w="12700" cap="flat" cmpd="sng" algn="ctr">
+                      <a:solidFill>
+                        <a:srgbClr val="DDE4EC"/>
+                      </a:solidFill>
+                      <a:prstDash val="solid"/>
+                      <a:round/>
+                      <a:headEnd type="none" w="med" len="med"/>
+                      <a:tailEnd type="none" w="med" len="med"/>
+                    </a:lnT>
+                    <a:lnB w="12700" cap="flat" cmpd="sng" algn="ctr">
+                      <a:solidFill>
+                        <a:srgbClr val="DDE4EC"/>
+                      </a:solidFill>
+                      <a:prstDash val="solid"/>
+                      <a:round/>
+                      <a:headEnd type="none" w="med" len="med"/>
+                      <a:tailEnd type="none" w="med" len="med"/>
+                    </a:lnB>
+                    <a:solidFill>
+                      <a:srgbClr val="FFFFFF"/>
+                    </a:solidFill>
+                  </a:tcPr>
+                </a:tc>
+                <a:tc>
+                  <a:txBody>
+                    <a:bodyPr/>
+                    <a:lstStyle/>
+                    <a:p>
+                      <a:pPr algn="l" indent="0" marL="0">
+                        <a:buNone/>
+                      </a:pPr>
+                      <a:r>
+                        <a:rPr lang="en-US" sz="1300" dirty="0">
+                          <a:solidFill>
+                            <a:srgbClr val="000000"/>
+                          </a:solidFill>
+                          <a:latin typeface="Yu Gothic" pitchFamily="34" charset="0"/>
+                          <a:ea typeface="Yu Gothic" pitchFamily="34" charset="-122"/>
+                          <a:cs typeface="Yu Gothic" pitchFamily="34" charset="-120"/>
+                        </a:rPr>
+                        <a:t>決定可能な性質だけを、機械が全入力について保証する</a:t>
+                      </a:r>
+                      <a:endParaRPr lang="en-US" sz="1300" dirty="0">
+                        <a:latin typeface="Yu Gothic" charset="0"/>
+                        <a:ea typeface="Yu Gothic" charset="0"/>
+                        <a:cs typeface="Yu Gothic" charset="0"/>
+                      </a:endParaRPr>
+                    </a:p>
+                  </a:txBody>
+                  <a:tcPr marL="91440" marR="91440" marT="45720" marB="45720" anchor="ctr">
+                    <a:lnL w="12700" cap="flat" cmpd="sng" algn="ctr">
+                      <a:solidFill>
+                        <a:srgbClr val="DDE4EC"/>
+                      </a:solidFill>
+                      <a:prstDash val="solid"/>
+                      <a:round/>
+                      <a:headEnd type="none" w="med" len="med"/>
+                      <a:tailEnd type="none" w="med" len="med"/>
+                    </a:lnL>
+                    <a:lnR w="12700" cap="flat" cmpd="sng" algn="ctr">
+                      <a:solidFill>
+                        <a:srgbClr val="DDE4EC"/>
+                      </a:solidFill>
+                      <a:prstDash val="solid"/>
+                      <a:round/>
+                      <a:headEnd type="none" w="med" len="med"/>
+                      <a:tailEnd type="none" w="med" len="med"/>
+                    </a:lnR>
+                    <a:lnT w="12700" cap="flat" cmpd="sng" algn="ctr">
+                      <a:solidFill>
+                        <a:srgbClr val="DDE4EC"/>
+                      </a:solidFill>
+                      <a:prstDash val="solid"/>
+                      <a:round/>
+                      <a:headEnd type="none" w="med" len="med"/>
+                      <a:tailEnd type="none" w="med" len="med"/>
+                    </a:lnT>
+                    <a:lnB w="12700" cap="flat" cmpd="sng" algn="ctr">
+                      <a:solidFill>
+                        <a:srgbClr val="DDE4EC"/>
+                      </a:solidFill>
+                      <a:prstDash val="solid"/>
+                      <a:round/>
+                      <a:headEnd type="none" w="med" len="med"/>
+                      <a:tailEnd type="none" w="med" len="med"/>
+                    </a:lnB>
+                    <a:solidFill>
+                      <a:srgbClr val="FFFFFF"/>
+                    </a:solidFill>
+                  </a:tcPr>
+                </a:tc>
+              </a:tr>
+              <a:tr h="457200">
+                <a:tc>
+                  <a:txBody>
+                    <a:bodyPr/>
+                    <a:lstStyle/>
+                    <a:p>
+                      <a:pPr algn="l" indent="0" marL="0">
+                        <a:buNone/>
+                      </a:pPr>
+                      <a:r>
+                        <a:rPr lang="en-US" sz="1300" dirty="0">
+                          <a:solidFill>
+                            <a:srgbClr val="000000"/>
+                          </a:solidFill>
+                          <a:latin typeface="Yu Gothic" pitchFamily="34" charset="0"/>
+                          <a:ea typeface="Yu Gothic" pitchFamily="34" charset="-122"/>
+                          <a:cs typeface="Yu Gothic" pitchFamily="34" charset="-120"/>
+                        </a:rPr>
+                        <a:t>人間を入れる</a:t>
+                      </a:r>
+                      <a:endParaRPr lang="en-US" sz="1300" dirty="0">
+                        <a:latin typeface="Yu Gothic" charset="0"/>
+                        <a:ea typeface="Yu Gothic" charset="0"/>
+                        <a:cs typeface="Yu Gothic" charset="0"/>
+                      </a:endParaRPr>
+                    </a:p>
+                  </a:txBody>
+                  <a:tcPr marL="91440" marR="91440" marT="45720" marB="45720" anchor="ctr">
+                    <a:lnL w="12700" cap="flat" cmpd="sng" algn="ctr">
+                      <a:solidFill>
+                        <a:srgbClr val="DDE4EC"/>
+                      </a:solidFill>
+                      <a:prstDash val="solid"/>
+                      <a:round/>
+                      <a:headEnd type="none" w="med" len="med"/>
+                      <a:tailEnd type="none" w="med" len="med"/>
+                    </a:lnL>
+                    <a:lnR w="12700" cap="flat" cmpd="sng" algn="ctr">
+                      <a:solidFill>
+                        <a:srgbClr val="DDE4EC"/>
+                      </a:solidFill>
+                      <a:prstDash val="solid"/>
+                      <a:round/>
+                      <a:headEnd type="none" w="med" len="med"/>
+                      <a:tailEnd type="none" w="med" len="med"/>
+                    </a:lnR>
+                    <a:lnT w="12700" cap="flat" cmpd="sng" algn="ctr">
+                      <a:solidFill>
+                        <a:srgbClr val="DDE4EC"/>
+                      </a:solidFill>
+                      <a:prstDash val="solid"/>
+                      <a:round/>
+                      <a:headEnd type="none" w="med" len="med"/>
+                      <a:tailEnd type="none" w="med" len="med"/>
+                    </a:lnT>
+                    <a:lnB w="12700" cap="flat" cmpd="sng" algn="ctr">
+                      <a:solidFill>
+                        <a:srgbClr val="DDE4EC"/>
+                      </a:solidFill>
+                      <a:prstDash val="solid"/>
+                      <a:round/>
+                      <a:headEnd type="none" w="med" len="med"/>
+                      <a:tailEnd type="none" w="med" len="med"/>
+                    </a:lnB>
+                    <a:solidFill>
+                      <a:srgbClr val="FFFFFF"/>
+                    </a:solidFill>
+                  </a:tcPr>
+                </a:tc>
+                <a:tc>
+                  <a:txBody>
+                    <a:bodyPr/>
+                    <a:lstStyle/>
+                    <a:p>
+                      <a:pPr algn="l" indent="0" marL="0">
+                        <a:buNone/>
+                      </a:pPr>
+                      <a:r>
+                        <a:rPr lang="en-US" sz="1300" dirty="0">
+                          <a:solidFill>
+                            <a:srgbClr val="000000"/>
+                          </a:solidFill>
+                          <a:latin typeface="Yu Gothic" pitchFamily="34" charset="0"/>
+                          <a:ea typeface="Yu Gothic" pitchFamily="34" charset="-122"/>
+                          <a:cs typeface="Yu Gothic" pitchFamily="34" charset="-120"/>
+                        </a:rPr>
+                        <a:t>コードレビュー</a:t>
+                      </a:r>
+                      <a:endParaRPr lang="en-US" sz="1300" dirty="0">
+                        <a:latin typeface="Yu Gothic" charset="0"/>
+                        <a:ea typeface="Yu Gothic" charset="0"/>
+                        <a:cs typeface="Yu Gothic" charset="0"/>
+                      </a:endParaRPr>
+                    </a:p>
+                  </a:txBody>
+                  <a:tcPr marL="91440" marR="91440" marT="45720" marB="45720" anchor="ctr">
+                    <a:lnL w="12700" cap="flat" cmpd="sng" algn="ctr">
+                      <a:solidFill>
+                        <a:srgbClr val="DDE4EC"/>
+                      </a:solidFill>
+                      <a:prstDash val="solid"/>
+                      <a:round/>
+                      <a:headEnd type="none" w="med" len="med"/>
+                      <a:tailEnd type="none" w="med" len="med"/>
+                    </a:lnL>
+                    <a:lnR w="12700" cap="flat" cmpd="sng" algn="ctr">
+                      <a:solidFill>
+                        <a:srgbClr val="DDE4EC"/>
+                      </a:solidFill>
+                      <a:prstDash val="solid"/>
+                      <a:round/>
+                      <a:headEnd type="none" w="med" len="med"/>
+                      <a:tailEnd type="none" w="med" len="med"/>
+                    </a:lnR>
+                    <a:lnT w="12700" cap="flat" cmpd="sng" algn="ctr">
+                      <a:solidFill>
+                        <a:srgbClr val="DDE4EC"/>
+                      </a:solidFill>
+                      <a:prstDash val="solid"/>
+                      <a:round/>
+                      <a:headEnd type="none" w="med" len="med"/>
+                      <a:tailEnd type="none" w="med" len="med"/>
+                    </a:lnT>
+                    <a:lnB w="12700" cap="flat" cmpd="sng" algn="ctr">
+                      <a:solidFill>
+                        <a:srgbClr val="DDE4EC"/>
+                      </a:solidFill>
+                      <a:prstDash val="solid"/>
+                      <a:round/>
+                      <a:headEnd type="none" w="med" len="med"/>
+                      <a:tailEnd type="none" w="med" len="med"/>
+                    </a:lnB>
+                    <a:solidFill>
+                      <a:srgbClr val="FFFFFF"/>
+                    </a:solidFill>
+                  </a:tcPr>
+                </a:tc>
+                <a:tc>
+                  <a:txBody>
+                    <a:bodyPr/>
+                    <a:lstStyle/>
+                    <a:p>
+                      <a:pPr algn="l" indent="0" marL="0">
+                        <a:buNone/>
+                      </a:pPr>
+                      <a:r>
+                        <a:rPr lang="en-US" sz="1300" dirty="0">
+                          <a:solidFill>
+                            <a:srgbClr val="000000"/>
+                          </a:solidFill>
+                          <a:latin typeface="Yu Gothic" pitchFamily="34" charset="0"/>
+                          <a:ea typeface="Yu Gothic" pitchFamily="34" charset="-122"/>
+                          <a:cs typeface="Yu Gothic" pitchFamily="34" charset="-120"/>
+                        </a:rPr>
+                        <a:t>機械に判定できないことを人が見る</a:t>
+                      </a:r>
+                      <a:endParaRPr lang="en-US" sz="1300" dirty="0">
+                        <a:latin typeface="Yu Gothic" charset="0"/>
+                        <a:ea typeface="Yu Gothic" charset="0"/>
+                        <a:cs typeface="Yu Gothic" charset="0"/>
+                      </a:endParaRPr>
+                    </a:p>
+                  </a:txBody>
+                  <a:tcPr marL="91440" marR="91440" marT="45720" marB="45720" anchor="ctr">
+                    <a:lnL w="12700" cap="flat" cmpd="sng" algn="ctr">
+                      <a:solidFill>
+                        <a:srgbClr val="DDE4EC"/>
+                      </a:solidFill>
+                      <a:prstDash val="solid"/>
+                      <a:round/>
+                      <a:headEnd type="none" w="med" len="med"/>
+                      <a:tailEnd type="none" w="med" len="med"/>
+                    </a:lnL>
+                    <a:lnR w="12700" cap="flat" cmpd="sng" algn="ctr">
+                      <a:solidFill>
+                        <a:srgbClr val="DDE4EC"/>
+                      </a:solidFill>
+                      <a:prstDash val="solid"/>
+                      <a:round/>
+                      <a:headEnd type="none" w="med" len="med"/>
+                      <a:tailEnd type="none" w="med" len="med"/>
+                    </a:lnR>
+                    <a:lnT w="12700" cap="flat" cmpd="sng" algn="ctr">
+                      <a:solidFill>
+                        <a:srgbClr val="DDE4EC"/>
+                      </a:solidFill>
+                      <a:prstDash val="solid"/>
+                      <a:round/>
+                      <a:headEnd type="none" w="med" len="med"/>
+                      <a:tailEnd type="none" w="med" len="med"/>
+                    </a:lnT>
+                    <a:lnB w="12700" cap="flat" cmpd="sng" algn="ctr">
+                      <a:solidFill>
+                        <a:srgbClr val="DDE4EC"/>
+                      </a:solidFill>
+                      <a:prstDash val="solid"/>
+                      <a:round/>
+                      <a:headEnd type="none" w="med" len="med"/>
+                      <a:tailEnd type="none" w="med" len="med"/>
+                    </a:lnB>
+                    <a:solidFill>
+                      <a:srgbClr val="FFFFFF"/>
+                    </a:solidFill>
+                  </a:tcPr>
+                </a:tc>
+              </a:tr>
+            </a:tbl>
+          </a:graphicData>
+        </a:graphic>
+      </p:graphicFrame>
+      <p:sp>
+        <p:nvSpPr>
+          <p:cNvPr id="7" name="Shape 4"/>
+          <p:cNvSpPr/>
+          <p:nvPr/>
+        </p:nvSpPr>
+        <p:spPr>
+          <a:xfrm>
+            <a:off x="685800" y="3941064"/>
+            <a:ext cx="10789920" cy="658368"/>
+          </a:xfrm>
+          <a:prstGeom prst="roundRect">
+            <a:avLst>
+              <a:gd name="adj" fmla="val 8333"/>
+            </a:avLst>
+          </a:prstGeom>
+          <a:solidFill>
+            <a:srgbClr val="D9E6F4"/>
+          </a:solidFill>
+          <a:ln w="19050">
+            <a:solidFill>
+              <a:srgbClr val="0B5CAD"/>
+            </a:solidFill>
+            <a:prstDash val="solid"/>
+          </a:ln>
+        </p:spPr>
+      </p:sp>
+      <p:sp>
+        <p:nvSpPr>
+          <p:cNvPr id="8" name="Text 5"/>
+          <p:cNvSpPr/>
+          <p:nvPr/>
+        </p:nvSpPr>
+        <p:spPr>
+          <a:xfrm>
+            <a:off x="914400" y="4087368"/>
+            <a:ext cx="10332720" cy="365760"/>
+          </a:xfrm>
+          <a:prstGeom prst="rect">
+            <a:avLst/>
+          </a:prstGeom>
+          <a:noFill/>
+          <a:ln/>
+        </p:spPr>
+        <p:txBody>
+          <a:bodyPr wrap="square" lIns="0" tIns="0" rIns="0" bIns="0" rtlCol="0" anchor="ctr"/>
+          <a:lstStyle/>
+          <a:p>
+            <a:pPr indent="0" marL="0">
+              <a:buNone/>
+            </a:pPr>
+            <a:r>
+              <a:rPr lang="en-US" sz="1500" b="1" dirty="0">
+                <a:solidFill>
+                  <a:srgbClr val="0B5CAD"/>
+                </a:solidFill>
+                <a:latin typeface="Yu Gothic" pitchFamily="34" charset="0"/>
+                <a:ea typeface="Yu Gothic" pitchFamily="34" charset="-122"/>
+                <a:cs typeface="Yu Gothic" pitchFamily="34" charset="-120"/>
+              </a:rPr>
+              <a:t>継続的インテグレーション（CI）—— コミットごとに自動でビルドしてテストを走らせる</a:t>
+            </a:r>
+            <a:endParaRPr lang="en-US" sz="1500" dirty="0"/>
+          </a:p>
+        </p:txBody>
+      </p:sp>
+      <p:sp>
+        <p:nvSpPr>
+          <p:cNvPr id="9" name="Text 6"/>
+          <p:cNvSpPr/>
+          <p:nvPr/>
+        </p:nvSpPr>
+        <p:spPr>
+          <a:xfrm>
+            <a:off x="685800" y="4764024"/>
+            <a:ext cx="10789920" cy="457200"/>
+          </a:xfrm>
+          <a:prstGeom prst="rect">
+            <a:avLst/>
+          </a:prstGeom>
+          <a:noFill/>
+          <a:ln/>
+        </p:spPr>
+        <p:txBody>
+          <a:bodyPr wrap="square" lIns="0" tIns="0" rIns="0" bIns="0" rtlCol="0" anchor="ctr"/>
+          <a:lstStyle/>
+          <a:p>
+            <a:pPr indent="0" marL="0">
+              <a:lnSpc>
+                <a:spcPts val="2000"/>
+              </a:lnSpc>
+              <a:buNone/>
+            </a:pPr>
+            <a:r>
+              <a:rPr lang="en-US" sz="1300" dirty="0">
+                <a:solidFill>
+                  <a:srgbClr val="5F6672"/>
+                </a:solidFill>
+                <a:latin typeface="Yu Gothic" pitchFamily="34" charset="0"/>
+                <a:ea typeface="Yu Gothic" pitchFamily="34" charset="-122"/>
+                <a:cs typeface="Yu Gothic" pitchFamily="34" charset="-120"/>
+              </a:rPr>
+              <a:t>狙いは1つ。壊れたことを早く知る。壊れてから気づくまでが長いほど原因の候補が増える。</a:t>
+            </a:r>
+            <a:endParaRPr lang="en-US" sz="1300" dirty="0"/>
+          </a:p>
+          <a:p>
+            <a:pPr indent="0" marL="0">
+              <a:lnSpc>
+                <a:spcPts val="2000"/>
+              </a:lnSpc>
+              <a:buNone/>
+            </a:pPr>
+            <a:r>
+              <a:rPr lang="en-US" sz="1300" dirty="0">
+                <a:solidFill>
+                  <a:srgbClr val="5F6672"/>
+                </a:solidFill>
+                <a:latin typeface="Yu Gothic" pitchFamily="34" charset="0"/>
+                <a:ea typeface="Yu Gothic" pitchFamily="34" charset="-122"/>
+                <a:cs typeface="Yu Gothic" pitchFamily="34" charset="-120"/>
+              </a:rPr>
+              <a:t>コミットごとに確かめれば候補は常に1個なので、二分探索する必要すらなくなる。</a:t>
+            </a:r>
+            <a:endParaRPr lang="en-US" sz="1300" dirty="0"/>
+          </a:p>
+        </p:txBody>
+      </p:sp>
+    </p:spTree>
+  </p:cSld>
+  <p:clrMapOvr>
+    <a:masterClrMapping/>
+  </p:clrMapOvr>
+</p:sld>
+</file>
+
+<file path=ppt/slides/slide24.xml><?xml version="1.0" encoding="utf-8"?>
+<p:sld xmlns:a="http://schemas.openxmlformats.org/drawingml/2006/main" xmlns:r="http://schemas.openxmlformats.org/officeDocument/2006/relationships" xmlns:p="http://schemas.openxmlformats.org/presentationml/2006/main">
+  <p:cSld name="Slide 24">
+    <p:bg>
+      <p:bgPr>
+        <a:solidFill>
+          <a:srgbClr val="FFFFFF"/>
+        </a:solidFill>
+      </p:bgPr>
+    </p:bg>
+    <p:spTree>
+      <p:nvGrpSpPr>
+        <p:cNvPr id="1" name=""/>
+        <p:cNvGrpSpPr/>
+        <p:nvPr/>
+      </p:nvGrpSpPr>
+      <p:grpSpPr>
+        <a:xfrm>
+          <a:off x="0" y="0"/>
+          <a:ext cx="0" cy="0"/>
+          <a:chOff x="0" y="0"/>
+          <a:chExt cx="0" cy="0"/>
+        </a:xfrm>
+      </p:grpSpPr>
+      <p:sp>
+        <p:nvSpPr>
+          <p:cNvPr id="2" name="Text 0"/>
+          <p:cNvSpPr/>
+          <p:nvPr/>
+        </p:nvSpPr>
+        <p:spPr>
+          <a:xfrm>
+            <a:off x="566928" y="310896"/>
+            <a:ext cx="4572000" cy="256032"/>
+          </a:xfrm>
+          <a:prstGeom prst="rect">
+            <a:avLst/>
+          </a:prstGeom>
+          <a:noFill/>
+          <a:ln/>
+        </p:spPr>
+        <p:txBody>
+          <a:bodyPr wrap="square" lIns="0" tIns="0" rIns="0" bIns="0" rtlCol="0" anchor="ctr"/>
+          <a:lstStyle/>
+          <a:p>
+            <a:pPr indent="0" marL="0">
+              <a:buNone/>
+            </a:pPr>
+            <a:r>
+              <a:rPr lang="en-US" sz="1200" b="1" dirty="0">
+                <a:solidFill>
+                  <a:srgbClr val="0B5CAD"/>
+                </a:solidFill>
+                <a:latin typeface="Yu Gothic" pitchFamily="34" charset="0"/>
+                <a:ea typeface="Yu Gothic" pitchFamily="34" charset="-122"/>
+                <a:cs typeface="Yu Gothic" pitchFamily="34" charset="-120"/>
+              </a:rPr>
+              <a:t>第4回</a:t>
+            </a:r>
+            <a:endParaRPr lang="en-US" sz="1200" dirty="0"/>
+          </a:p>
+        </p:txBody>
+      </p:sp>
+      <p:sp>
+        <p:nvSpPr>
+          <p:cNvPr id="3" name="Text 1"/>
+          <p:cNvSpPr/>
+          <p:nvPr/>
+        </p:nvSpPr>
+        <p:spPr>
+          <a:xfrm>
+            <a:off x="548640" y="603504"/>
+            <a:ext cx="11064240" cy="731520"/>
+          </a:xfrm>
+          <a:prstGeom prst="rect">
+            <a:avLst/>
+          </a:prstGeom>
+          <a:noFill/>
+          <a:ln/>
+        </p:spPr>
+        <p:txBody>
+          <a:bodyPr wrap="square" lIns="0" tIns="0" rIns="0" bIns="0" rtlCol="0" anchor="t"/>
+          <a:lstStyle/>
+          <a:p>
+            <a:pPr indent="0" marL="0">
+              <a:buNone/>
+            </a:pPr>
+            <a:r>
+              <a:rPr lang="en-US" sz="3000" b="1" dirty="0">
+                <a:solidFill>
+                  <a:srgbClr val="16191D"/>
+                </a:solidFill>
+                <a:latin typeface="Yu Gothic" pitchFamily="34" charset="0"/>
+                <a:ea typeface="Yu Gothic" pitchFamily="34" charset="-122"/>
+                <a:cs typeface="Yu Gothic" pitchFamily="34" charset="-120"/>
+              </a:rPr>
+              <a:t>演習</a:t>
+            </a:r>
+            <a:endParaRPr lang="en-US" sz="3000" dirty="0"/>
+          </a:p>
+        </p:txBody>
+      </p:sp>
+      <p:sp>
+        <p:nvSpPr>
+          <p:cNvPr id="4" name="Text 2"/>
+          <p:cNvSpPr/>
+          <p:nvPr/>
+        </p:nvSpPr>
+        <p:spPr>
+          <a:xfrm>
+            <a:off x="11247120" y="6355080"/>
+            <a:ext cx="548640" cy="274320"/>
+          </a:xfrm>
+          <a:prstGeom prst="rect">
+            <a:avLst/>
+          </a:prstGeom>
+          <a:noFill/>
+          <a:ln/>
+        </p:spPr>
+        <p:txBody>
+          <a:bodyPr wrap="square" lIns="0" tIns="0" rIns="0" bIns="0" rtlCol="0" anchor="ctr"/>
+          <a:lstStyle/>
+          <a:p>
+            <a:pPr algn="r" indent="0" marL="0">
+              <a:buNone/>
+            </a:pPr>
+            <a:r>
+              <a:rPr lang="en-US" sz="1000" dirty="0">
+                <a:solidFill>
+                  <a:srgbClr val="5F6672"/>
+                </a:solidFill>
+                <a:latin typeface="Yu Gothic" pitchFamily="34" charset="0"/>
+                <a:ea typeface="Yu Gothic" pitchFamily="34" charset="-122"/>
+                <a:cs typeface="Yu Gothic" pitchFamily="34" charset="-120"/>
+              </a:rPr>
+              <a:t>24</a:t>
+            </a:r>
+            <a:endParaRPr lang="en-US" sz="1000" dirty="0"/>
+          </a:p>
+        </p:txBody>
+      </p:sp>
+      <p:sp>
+        <p:nvSpPr>
+          <p:cNvPr id="5" name="Shape 3"/>
+          <p:cNvSpPr/>
+          <p:nvPr/>
+        </p:nvSpPr>
+        <p:spPr>
+          <a:xfrm>
+            <a:off x="685800" y="1691640"/>
+            <a:ext cx="868680" cy="402336"/>
+          </a:xfrm>
+          <a:prstGeom prst="roundRect">
+            <a:avLst>
+              <a:gd name="adj" fmla="val 18182"/>
+            </a:avLst>
+          </a:prstGeom>
+          <a:solidFill>
+            <a:srgbClr val="D9E6F4"/>
+          </a:solidFill>
+          <a:ln w="12700">
+            <a:solidFill>
+              <a:srgbClr val="0B5CAD"/>
+            </a:solidFill>
+            <a:prstDash val="solid"/>
+          </a:ln>
+        </p:spPr>
+      </p:sp>
+      <p:sp>
+        <p:nvSpPr>
+          <p:cNvPr id="6" name="Text 4"/>
+          <p:cNvSpPr/>
+          <p:nvPr/>
+        </p:nvSpPr>
+        <p:spPr>
+          <a:xfrm>
+            <a:off x="685800" y="1691640"/>
+            <a:ext cx="868680" cy="402336"/>
+          </a:xfrm>
+          <a:prstGeom prst="rect">
+            <a:avLst/>
+          </a:prstGeom>
+          <a:noFill/>
+          <a:ln/>
+        </p:spPr>
+        <p:txBody>
+          <a:bodyPr wrap="square" lIns="0" tIns="0" rIns="0" bIns="0" rtlCol="0" anchor="ctr"/>
+          <a:lstStyle/>
+          <a:p>
+            <a:pPr algn="ctr" indent="0" marL="0">
+              <a:buNone/>
+            </a:pPr>
+            <a:r>
+              <a:rPr lang="en-US" sz="1300" b="1" dirty="0">
+                <a:solidFill>
+                  <a:srgbClr val="0B5CAD"/>
+                </a:solidFill>
+                <a:latin typeface="Courier New" pitchFamily="34" charset="0"/>
+                <a:ea typeface="Courier New" pitchFamily="34" charset="-122"/>
+                <a:cs typeface="Courier New" pitchFamily="34" charset="-120"/>
+              </a:rPr>
+              <a:t>4-1</a:t>
+            </a:r>
+            <a:endParaRPr lang="en-US" sz="1300" dirty="0"/>
+          </a:p>
+        </p:txBody>
+      </p:sp>
+      <p:sp>
+        <p:nvSpPr>
+          <p:cNvPr id="7" name="Text 5"/>
+          <p:cNvSpPr/>
+          <p:nvPr/>
+        </p:nvSpPr>
+        <p:spPr>
+          <a:xfrm>
+            <a:off x="1783080" y="1673352"/>
+            <a:ext cx="9692640" cy="722376"/>
+          </a:xfrm>
+          <a:prstGeom prst="rect">
+            <a:avLst/>
+          </a:prstGeom>
+          <a:noFill/>
+          <a:ln/>
+        </p:spPr>
+        <p:txBody>
+          <a:bodyPr wrap="square" lIns="0" tIns="0" rIns="0" bIns="0" rtlCol="0" anchor="t"/>
+          <a:lstStyle/>
+          <a:p>
+            <a:pPr indent="0" marL="0">
+              <a:lnSpc>
+                <a:spcPts val="2100"/>
+              </a:lnSpc>
+              <a:buNone/>
+            </a:pPr>
+            <a:r>
+              <a:rPr lang="en-US" sz="1400" dirty="0">
+                <a:solidFill>
+                  <a:srgbClr val="16191D"/>
+                </a:solidFill>
+                <a:latin typeface="Yu Gothic" pitchFamily="34" charset="0"/>
+                <a:ea typeface="Yu Gothic" pitchFamily="34" charset="-122"/>
+                <a:cs typeface="Yu Gothic" pitchFamily="34" charset="-120"/>
+              </a:rPr>
+              <a:t>高級言語で書いたプログラムが、そのままでは CPU で実行できないのはなぜか。第3回の内容に触れて説明せよ。</a:t>
+            </a:r>
+            <a:endParaRPr lang="en-US" sz="1400" dirty="0"/>
+          </a:p>
+        </p:txBody>
+      </p:sp>
+      <p:sp>
+        <p:nvSpPr>
+          <p:cNvPr id="8" name="Shape 6"/>
+          <p:cNvSpPr/>
+          <p:nvPr/>
+        </p:nvSpPr>
+        <p:spPr>
+          <a:xfrm>
+            <a:off x="685800" y="2560320"/>
+            <a:ext cx="868680" cy="402336"/>
+          </a:xfrm>
+          <a:prstGeom prst="roundRect">
+            <a:avLst>
+              <a:gd name="adj" fmla="val 18182"/>
+            </a:avLst>
+          </a:prstGeom>
+          <a:solidFill>
+            <a:srgbClr val="D9E6F4"/>
+          </a:solidFill>
+          <a:ln w="12700">
+            <a:solidFill>
+              <a:srgbClr val="0B5CAD"/>
+            </a:solidFill>
+            <a:prstDash val="solid"/>
+          </a:ln>
+        </p:spPr>
+      </p:sp>
+      <p:sp>
+        <p:nvSpPr>
+          <p:cNvPr id="9" name="Text 7"/>
+          <p:cNvSpPr/>
+          <p:nvPr/>
+        </p:nvSpPr>
+        <p:spPr>
+          <a:xfrm>
+            <a:off x="685800" y="2560320"/>
+            <a:ext cx="868680" cy="402336"/>
+          </a:xfrm>
+          <a:prstGeom prst="rect">
+            <a:avLst/>
+          </a:prstGeom>
+          <a:noFill/>
+          <a:ln/>
+        </p:spPr>
+        <p:txBody>
+          <a:bodyPr wrap="square" lIns="0" tIns="0" rIns="0" bIns="0" rtlCol="0" anchor="ctr"/>
+          <a:lstStyle/>
+          <a:p>
+            <a:pPr algn="ctr" indent="0" marL="0">
+              <a:buNone/>
+            </a:pPr>
+            <a:r>
+              <a:rPr lang="en-US" sz="1300" b="1" dirty="0">
+                <a:solidFill>
+                  <a:srgbClr val="0B5CAD"/>
+                </a:solidFill>
+                <a:latin typeface="Courier New" pitchFamily="34" charset="0"/>
+                <a:ea typeface="Courier New" pitchFamily="34" charset="-122"/>
+                <a:cs typeface="Courier New" pitchFamily="34" charset="-120"/>
+              </a:rPr>
+              <a:t>4-2</a:t>
+            </a:r>
+            <a:endParaRPr lang="en-US" sz="1300" dirty="0"/>
+          </a:p>
+        </p:txBody>
+      </p:sp>
+      <p:sp>
+        <p:nvSpPr>
+          <p:cNvPr id="10" name="Text 8"/>
+          <p:cNvSpPr/>
+          <p:nvPr/>
+        </p:nvSpPr>
+        <p:spPr>
+          <a:xfrm>
+            <a:off x="1783080" y="2542032"/>
+            <a:ext cx="9692640" cy="722376"/>
+          </a:xfrm>
+          <a:prstGeom prst="rect">
+            <a:avLst/>
+          </a:prstGeom>
+          <a:noFill/>
+          <a:ln/>
+        </p:spPr>
+        <p:txBody>
+          <a:bodyPr wrap="square" lIns="0" tIns="0" rIns="0" bIns="0" rtlCol="0" anchor="t"/>
+          <a:lstStyle/>
+          <a:p>
+            <a:pPr indent="0" marL="0">
+              <a:lnSpc>
+                <a:spcPts val="2100"/>
+              </a:lnSpc>
+              <a:buNone/>
+            </a:pPr>
+            <a:r>
+              <a:rPr lang="en-US" sz="1400" dirty="0">
+                <a:solidFill>
+                  <a:srgbClr val="16191D"/>
+                </a:solidFill>
+                <a:latin typeface="Yu Gothic" pitchFamily="34" charset="0"/>
+                <a:ea typeface="Yu Gothic" pitchFamily="34" charset="-122"/>
+                <a:cs typeface="Yu Gothic" pitchFamily="34" charset="-120"/>
+              </a:rPr>
+              <a:t>JIT コンパイルが事前コンパイルより有利になりうる理由を1つ挙げよ。「実行時にしか分からない情報」の具体例を含めること。</a:t>
+            </a:r>
+            <a:endParaRPr lang="en-US" sz="1400" dirty="0"/>
+          </a:p>
+        </p:txBody>
+      </p:sp>
+      <p:sp>
+        <p:nvSpPr>
+          <p:cNvPr id="11" name="Shape 9"/>
+          <p:cNvSpPr/>
+          <p:nvPr/>
+        </p:nvSpPr>
+        <p:spPr>
+          <a:xfrm>
+            <a:off x="685800" y="3429000"/>
+            <a:ext cx="868680" cy="402336"/>
+          </a:xfrm>
+          <a:prstGeom prst="roundRect">
+            <a:avLst>
+              <a:gd name="adj" fmla="val 18182"/>
+            </a:avLst>
+          </a:prstGeom>
+          <a:solidFill>
+            <a:srgbClr val="D9E6F4"/>
+          </a:solidFill>
+          <a:ln w="12700">
+            <a:solidFill>
+              <a:srgbClr val="0B5CAD"/>
+            </a:solidFill>
+            <a:prstDash val="solid"/>
+          </a:ln>
+        </p:spPr>
+      </p:sp>
+      <p:sp>
+        <p:nvSpPr>
+          <p:cNvPr id="12" name="Text 10"/>
+          <p:cNvSpPr/>
+          <p:nvPr/>
+        </p:nvSpPr>
+        <p:spPr>
+          <a:xfrm>
+            <a:off x="685800" y="3429000"/>
+            <a:ext cx="868680" cy="402336"/>
+          </a:xfrm>
+          <a:prstGeom prst="rect">
+            <a:avLst/>
+          </a:prstGeom>
+          <a:noFill/>
+          <a:ln/>
+        </p:spPr>
+        <p:txBody>
+          <a:bodyPr wrap="square" lIns="0" tIns="0" rIns="0" bIns="0" rtlCol="0" anchor="ctr"/>
+          <a:lstStyle/>
+          <a:p>
+            <a:pPr algn="ctr" indent="0" marL="0">
+              <a:buNone/>
+            </a:pPr>
+            <a:r>
+              <a:rPr lang="en-US" sz="1300" b="1" dirty="0">
+                <a:solidFill>
+                  <a:srgbClr val="0B5CAD"/>
+                </a:solidFill>
+                <a:latin typeface="Courier New" pitchFamily="34" charset="0"/>
+                <a:ea typeface="Courier New" pitchFamily="34" charset="-122"/>
+                <a:cs typeface="Courier New" pitchFamily="34" charset="-120"/>
+              </a:rPr>
+              <a:t>4-3</a:t>
+            </a:r>
+            <a:endParaRPr lang="en-US" sz="1300" dirty="0"/>
+          </a:p>
+        </p:txBody>
+      </p:sp>
+      <p:sp>
+        <p:nvSpPr>
+          <p:cNvPr id="13" name="Text 11"/>
+          <p:cNvSpPr/>
+          <p:nvPr/>
+        </p:nvSpPr>
+        <p:spPr>
+          <a:xfrm>
+            <a:off x="1783080" y="3410712"/>
+            <a:ext cx="9692640" cy="722376"/>
+          </a:xfrm>
+          <a:prstGeom prst="rect">
+            <a:avLst/>
+          </a:prstGeom>
+          <a:noFill/>
+          <a:ln/>
+        </p:spPr>
+        <p:txBody>
+          <a:bodyPr wrap="square" lIns="0" tIns="0" rIns="0" bIns="0" rtlCol="0" anchor="t"/>
+          <a:lstStyle/>
+          <a:p>
+            <a:pPr indent="0" marL="0">
+              <a:lnSpc>
+                <a:spcPts val="2100"/>
+              </a:lnSpc>
+              <a:buNone/>
+            </a:pPr>
+            <a:r>
+              <a:rPr lang="en-US" sz="1400" dirty="0">
+                <a:solidFill>
+                  <a:srgbClr val="16191D"/>
+                </a:solidFill>
+                <a:latin typeface="Yu Gothic" pitchFamily="34" charset="0"/>
+                <a:ea typeface="Yu Gothic" pitchFamily="34" charset="-122"/>
+                <a:cs typeface="Yu Gothic" pitchFamily="34" charset="-120"/>
+              </a:rPr>
+              <a:t>静的リンクと動的リンクについて、それぞれが有利になる状況を1つずつ挙げよ。</a:t>
+            </a:r>
+            <a:endParaRPr lang="en-US" sz="1400" dirty="0"/>
+          </a:p>
+        </p:txBody>
+      </p:sp>
+      <p:sp>
+        <p:nvSpPr>
+          <p:cNvPr id="14" name="Shape 12"/>
+          <p:cNvSpPr/>
+          <p:nvPr/>
+        </p:nvSpPr>
+        <p:spPr>
+          <a:xfrm>
+            <a:off x="685800" y="4297680"/>
+            <a:ext cx="868680" cy="402336"/>
+          </a:xfrm>
+          <a:prstGeom prst="roundRect">
+            <a:avLst>
+              <a:gd name="adj" fmla="val 18182"/>
+            </a:avLst>
+          </a:prstGeom>
+          <a:solidFill>
+            <a:srgbClr val="D9E6F4"/>
+          </a:solidFill>
+          <a:ln w="12700">
+            <a:solidFill>
+              <a:srgbClr val="0B5CAD"/>
+            </a:solidFill>
+            <a:prstDash val="solid"/>
+          </a:ln>
+        </p:spPr>
+      </p:sp>
+      <p:sp>
+        <p:nvSpPr>
+          <p:cNvPr id="15" name="Text 13"/>
+          <p:cNvSpPr/>
+          <p:nvPr/>
+        </p:nvSpPr>
+        <p:spPr>
+          <a:xfrm>
+            <a:off x="685800" y="4297680"/>
+            <a:ext cx="868680" cy="402336"/>
+          </a:xfrm>
+          <a:prstGeom prst="rect">
+            <a:avLst/>
+          </a:prstGeom>
+          <a:noFill/>
+          <a:ln/>
+        </p:spPr>
+        <p:txBody>
+          <a:bodyPr wrap="square" lIns="0" tIns="0" rIns="0" bIns="0" rtlCol="0" anchor="ctr"/>
+          <a:lstStyle/>
+          <a:p>
+            <a:pPr algn="ctr" indent="0" marL="0">
+              <a:buNone/>
+            </a:pPr>
+            <a:r>
+              <a:rPr lang="en-US" sz="1300" b="1" dirty="0">
+                <a:solidFill>
+                  <a:srgbClr val="0B5CAD"/>
+                </a:solidFill>
+                <a:latin typeface="Courier New" pitchFamily="34" charset="0"/>
+                <a:ea typeface="Courier New" pitchFamily="34" charset="-122"/>
+                <a:cs typeface="Courier New" pitchFamily="34" charset="-120"/>
+              </a:rPr>
+              <a:t>4-4</a:t>
+            </a:r>
+            <a:endParaRPr lang="en-US" sz="1300" dirty="0"/>
+          </a:p>
+        </p:txBody>
+      </p:sp>
+      <p:sp>
+        <p:nvSpPr>
+          <p:cNvPr id="16" name="Text 14"/>
+          <p:cNvSpPr/>
+          <p:nvPr/>
+        </p:nvSpPr>
+        <p:spPr>
+          <a:xfrm>
+            <a:off x="1783080" y="4279392"/>
+            <a:ext cx="9692640" cy="722376"/>
+          </a:xfrm>
+          <a:prstGeom prst="rect">
+            <a:avLst/>
+          </a:prstGeom>
+          <a:noFill/>
+          <a:ln/>
+        </p:spPr>
+        <p:txBody>
+          <a:bodyPr wrap="square" lIns="0" tIns="0" rIns="0" bIns="0" rtlCol="0" anchor="t"/>
+          <a:lstStyle/>
+          <a:p>
+            <a:pPr indent="0" marL="0">
+              <a:lnSpc>
+                <a:spcPts val="2100"/>
+              </a:lnSpc>
+              <a:buNone/>
+            </a:pPr>
+            <a:r>
+              <a:rPr lang="en-US" sz="1400" dirty="0">
+                <a:solidFill>
+                  <a:srgbClr val="16191D"/>
+                </a:solidFill>
+                <a:latin typeface="Yu Gothic" pitchFamily="34" charset="0"/>
+                <a:ea typeface="Yu Gothic" pitchFamily="34" charset="-122"/>
+                <a:cs typeface="Yu Gothic" pitchFamily="34" charset="-120"/>
+              </a:rPr>
+              <a:t>次の C 関数の誤りを、メモリ配置を参照して説明せよ。char *f(void) { char buf[64]; sprintf(buf, "hello"); return buf; }</a:t>
+            </a:r>
+            <a:endParaRPr lang="en-US" sz="1400" dirty="0"/>
+          </a:p>
+        </p:txBody>
+      </p:sp>
+      <p:sp>
+        <p:nvSpPr>
+          <p:cNvPr id="17" name="Shape 15"/>
+          <p:cNvSpPr/>
+          <p:nvPr/>
+        </p:nvSpPr>
+        <p:spPr>
+          <a:xfrm>
+            <a:off x="685800" y="5166360"/>
+            <a:ext cx="868680" cy="402336"/>
+          </a:xfrm>
+          <a:prstGeom prst="roundRect">
+            <a:avLst>
+              <a:gd name="adj" fmla="val 18182"/>
+            </a:avLst>
+          </a:prstGeom>
+          <a:solidFill>
+            <a:srgbClr val="D9E6F4"/>
+          </a:solidFill>
+          <a:ln w="12700">
+            <a:solidFill>
+              <a:srgbClr val="0B5CAD"/>
+            </a:solidFill>
+            <a:prstDash val="solid"/>
+          </a:ln>
+        </p:spPr>
+      </p:sp>
+      <p:sp>
+        <p:nvSpPr>
+          <p:cNvPr id="18" name="Text 16"/>
+          <p:cNvSpPr/>
+          <p:nvPr/>
+        </p:nvSpPr>
+        <p:spPr>
+          <a:xfrm>
+            <a:off x="685800" y="5166360"/>
+            <a:ext cx="868680" cy="402336"/>
+          </a:xfrm>
+          <a:prstGeom prst="rect">
+            <a:avLst/>
+          </a:prstGeom>
+          <a:noFill/>
+          <a:ln/>
+        </p:spPr>
+        <p:txBody>
+          <a:bodyPr wrap="square" lIns="0" tIns="0" rIns="0" bIns="0" rtlCol="0" anchor="ctr"/>
+          <a:lstStyle/>
+          <a:p>
+            <a:pPr algn="ctr" indent="0" marL="0">
+              <a:buNone/>
+            </a:pPr>
+            <a:r>
+              <a:rPr lang="en-US" sz="1300" b="1" dirty="0">
+                <a:solidFill>
+                  <a:srgbClr val="0B5CAD"/>
+                </a:solidFill>
+                <a:latin typeface="Courier New" pitchFamily="34" charset="0"/>
+                <a:ea typeface="Courier New" pitchFamily="34" charset="-122"/>
+                <a:cs typeface="Courier New" pitchFamily="34" charset="-120"/>
+              </a:rPr>
+              <a:t>4-5</a:t>
+            </a:r>
+            <a:endParaRPr lang="en-US" sz="1300" dirty="0"/>
+          </a:p>
+        </p:txBody>
+      </p:sp>
+      <p:sp>
+        <p:nvSpPr>
+          <p:cNvPr id="19" name="Text 17"/>
+          <p:cNvSpPr/>
+          <p:nvPr/>
+        </p:nvSpPr>
+        <p:spPr>
+          <a:xfrm>
+            <a:off x="1783080" y="5148072"/>
+            <a:ext cx="9692640" cy="722376"/>
+          </a:xfrm>
+          <a:prstGeom prst="rect">
+            <a:avLst/>
+          </a:prstGeom>
+          <a:noFill/>
+          <a:ln/>
+        </p:spPr>
+        <p:txBody>
+          <a:bodyPr wrap="square" lIns="0" tIns="0" rIns="0" bIns="0" rtlCol="0" anchor="t"/>
+          <a:lstStyle/>
+          <a:p>
+            <a:pPr indent="0" marL="0">
+              <a:lnSpc>
+                <a:spcPts val="2100"/>
+              </a:lnSpc>
+              <a:buNone/>
+            </a:pPr>
+            <a:r>
+              <a:rPr lang="en-US" sz="1400" dirty="0">
+                <a:solidFill>
+                  <a:srgbClr val="16191D"/>
+                </a:solidFill>
+                <a:latin typeface="Yu Gothic" pitchFamily="34" charset="0"/>
+                <a:ea typeface="Yu Gothic" pitchFamily="34" charset="-122"/>
+                <a:cs typeface="Yu Gothic" pitchFamily="34" charset="-120"/>
+              </a:rPr>
+              <a:t>「テストが全部通ったので、このプログラムにバグは無い」という主張に反論せよ。第1回の内容に触れること。</a:t>
+            </a:r>
+            <a:endParaRPr lang="en-US" sz="1400" dirty="0"/>
+          </a:p>
+        </p:txBody>
+      </p:sp>
+      <p:sp>
+        <p:nvSpPr>
+          <p:cNvPr id="20" name="Shape 18"/>
+          <p:cNvSpPr/>
+          <p:nvPr/>
+        </p:nvSpPr>
+        <p:spPr>
+          <a:xfrm>
+            <a:off x="685800" y="6035040"/>
+            <a:ext cx="868680" cy="402336"/>
+          </a:xfrm>
+          <a:prstGeom prst="roundRect">
+            <a:avLst>
+              <a:gd name="adj" fmla="val 18182"/>
+            </a:avLst>
+          </a:prstGeom>
+          <a:solidFill>
+            <a:srgbClr val="D9E6F4"/>
+          </a:solidFill>
+          <a:ln w="12700">
+            <a:solidFill>
+              <a:srgbClr val="0B5CAD"/>
+            </a:solidFill>
+            <a:prstDash val="solid"/>
+          </a:ln>
+        </p:spPr>
+      </p:sp>
+      <p:sp>
+        <p:nvSpPr>
+          <p:cNvPr id="21" name="Text 19"/>
+          <p:cNvSpPr/>
+          <p:nvPr/>
+        </p:nvSpPr>
+        <p:spPr>
+          <a:xfrm>
+            <a:off x="685800" y="6035040"/>
+            <a:ext cx="868680" cy="402336"/>
+          </a:xfrm>
+          <a:prstGeom prst="rect">
+            <a:avLst/>
+          </a:prstGeom>
+          <a:noFill/>
+          <a:ln/>
+        </p:spPr>
+        <p:txBody>
+          <a:bodyPr wrap="square" lIns="0" tIns="0" rIns="0" bIns="0" rtlCol="0" anchor="ctr"/>
+          <a:lstStyle/>
+          <a:p>
+            <a:pPr algn="ctr" indent="0" marL="0">
+              <a:buNone/>
+            </a:pPr>
+            <a:r>
+              <a:rPr lang="en-US" sz="1300" b="1" dirty="0">
+                <a:solidFill>
+                  <a:srgbClr val="0B5CAD"/>
+                </a:solidFill>
+                <a:latin typeface="Courier New" pitchFamily="34" charset="0"/>
+                <a:ea typeface="Courier New" pitchFamily="34" charset="-122"/>
+                <a:cs typeface="Courier New" pitchFamily="34" charset="-120"/>
+              </a:rPr>
+              <a:t>4-6</a:t>
+            </a:r>
+            <a:endParaRPr lang="en-US" sz="1300" dirty="0"/>
+          </a:p>
+        </p:txBody>
+      </p:sp>
+      <p:sp>
+        <p:nvSpPr>
+          <p:cNvPr id="22" name="Text 20"/>
+          <p:cNvSpPr/>
+          <p:nvPr/>
+        </p:nvSpPr>
+        <p:spPr>
+          <a:xfrm>
+            <a:off x="1783080" y="6016752"/>
+            <a:ext cx="9692640" cy="722376"/>
+          </a:xfrm>
+          <a:prstGeom prst="rect">
+            <a:avLst/>
+          </a:prstGeom>
+          <a:noFill/>
+          <a:ln/>
+        </p:spPr>
+        <p:txBody>
+          <a:bodyPr wrap="square" lIns="0" tIns="0" rIns="0" bIns="0" rtlCol="0" anchor="t"/>
+          <a:lstStyle/>
+          <a:p>
+            <a:pPr indent="0" marL="0">
+              <a:lnSpc>
+                <a:spcPts val="2100"/>
+              </a:lnSpc>
+              <a:buNone/>
+            </a:pPr>
+            <a:r>
+              <a:rPr lang="en-US" sz="1400" dirty="0">
+                <a:solidFill>
+                  <a:srgbClr val="16191D"/>
+                </a:solidFill>
+                <a:latin typeface="Yu Gothic" pitchFamily="34" charset="0"/>
+                <a:ea typeface="Yu Gothic" pitchFamily="34" charset="-122"/>
+                <a:cs typeface="Yu Gothic" pitchFamily="34" charset="-120"/>
+              </a:rPr>
+              <a:t>1か月前は動いていたが、いま動かない。その間にコミットが100個ある。原因のコミットを特定するのに最小で何回試せばよいか。方法も述べよ。</a:t>
+            </a:r>
+            <a:endParaRPr lang="en-US" sz="1400" dirty="0"/>
+          </a:p>
+        </p:txBody>
+      </p:sp>
+    </p:spTree>
+  </p:cSld>
+  <p:clrMapOvr>
+    <a:masterClrMapping/>
+  </p:clrMapOvr>
+</p:sld>
+</file>
+
+<file path=ppt/slides/slide25.xml><?xml version="1.0" encoding="utf-8"?>
+<p:sld xmlns:a="http://schemas.openxmlformats.org/drawingml/2006/main" xmlns:r="http://schemas.openxmlformats.org/officeDocument/2006/relationships" xmlns:p="http://schemas.openxmlformats.org/presentationml/2006/main">
+  <p:cSld name="Slide 25">
     <p:bg>
       <p:bgPr>
         <a:solidFill>
@@ -12078,7 +16054,7 @@
               <a:buNone/>
             </a:pPr>
             <a:r>
-              <a:rPr lang="en-US" sz="1500" b="1" dirty="0">
+              <a:rPr lang="en-US" sz="1400" b="1" dirty="0">
                 <a:solidFill>
                   <a:srgbClr val="6AB0F3"/>
                 </a:solidFill>
@@ -12088,7 +16064,7 @@
               </a:rPr>
               <a:t>機械語とアセンブリ</a:t>
             </a:r>
-            <a:endParaRPr lang="en-US" sz="1500" dirty="0"/>
+            <a:endParaRPr lang="en-US" sz="1400" dirty="0"/>
           </a:p>
         </p:txBody>
       </p:sp>
@@ -12101,7 +16077,7 @@
         <p:spPr>
           <a:xfrm>
             <a:off x="4297680" y="1380744"/>
-            <a:ext cx="7132320" cy="758952"/>
+            <a:ext cx="7132320" cy="640080"/>
           </a:xfrm>
           <a:prstGeom prst="rect">
             <a:avLst/>
@@ -12120,7 +16096,7 @@
               <a:buNone/>
             </a:pPr>
             <a:r>
-              <a:rPr lang="en-US" sz="1350" dirty="0">
+              <a:rPr lang="en-US" sz="1250" dirty="0">
                 <a:solidFill>
                   <a:srgbClr val="E8EBEF"/>
                 </a:solidFill>
@@ -12130,7 +16106,7 @@
               </a:rPr>
               <a:t>ほぼ1対1に対応する。ラベルを番地に直すのがアセンブラの仕事</a:t>
             </a:r>
-            <a:endParaRPr lang="en-US" sz="1350" dirty="0"/>
+            <a:endParaRPr lang="en-US" sz="1250" dirty="0"/>
           </a:p>
         </p:txBody>
       </p:sp>
@@ -12142,7 +16118,7 @@
         </p:nvSpPr>
         <p:spPr>
           <a:xfrm>
-            <a:off x="822960" y="2286000"/>
+            <a:off x="822960" y="2167128"/>
             <a:ext cx="3291840" cy="320040"/>
           </a:xfrm>
           <a:prstGeom prst="rect">
@@ -12159,7 +16135,7 @@
               <a:buNone/>
             </a:pPr>
             <a:r>
-              <a:rPr lang="en-US" sz="1500" b="1" dirty="0">
+              <a:rPr lang="en-US" sz="1400" b="1" dirty="0">
                 <a:solidFill>
                   <a:srgbClr val="6AB0F3"/>
                 </a:solidFill>
@@ -12169,7 +16145,7 @@
               </a:rPr>
               <a:t>処理系</a:t>
             </a:r>
-            <a:endParaRPr lang="en-US" sz="1500" dirty="0"/>
+            <a:endParaRPr lang="en-US" sz="1400" dirty="0"/>
           </a:p>
         </p:txBody>
       </p:sp>
@@ -12181,8 +16157,8 @@
         </p:nvSpPr>
         <p:spPr>
           <a:xfrm>
-            <a:off x="4297680" y="2249424"/>
-            <a:ext cx="7132320" cy="758952"/>
+            <a:off x="4297680" y="2130552"/>
+            <a:ext cx="7132320" cy="640080"/>
           </a:xfrm>
           <a:prstGeom prst="rect">
             <a:avLst/>
@@ -12201,7 +16177,7 @@
               <a:buNone/>
             </a:pPr>
             <a:r>
-              <a:rPr lang="en-US" sz="1350" dirty="0">
+              <a:rPr lang="en-US" sz="1250" dirty="0">
                 <a:solidFill>
                   <a:srgbClr val="E8EBEF"/>
                 </a:solidFill>
@@ -12211,7 +16187,7 @@
               </a:rPr>
               <a:t>コンパイラ・インタプリタ・仮想機械・JIT。現代の言語は複数を組み合わせている</a:t>
             </a:r>
-            <a:endParaRPr lang="en-US" sz="1350" dirty="0"/>
+            <a:endParaRPr lang="en-US" sz="1250" dirty="0"/>
           </a:p>
         </p:txBody>
       </p:sp>
@@ -12223,7 +16199,7 @@
         </p:nvSpPr>
         <p:spPr>
           <a:xfrm>
-            <a:off x="822960" y="3154680"/>
+            <a:off x="822960" y="2916936"/>
             <a:ext cx="3291840" cy="320040"/>
           </a:xfrm>
           <a:prstGeom prst="rect">
@@ -12240,7 +16216,7 @@
               <a:buNone/>
             </a:pPr>
             <a:r>
-              <a:rPr lang="en-US" sz="1500" b="1" dirty="0">
+              <a:rPr lang="en-US" sz="1400" b="1" dirty="0">
                 <a:solidFill>
                   <a:srgbClr val="6AB0F3"/>
                 </a:solidFill>
@@ -12250,7 +16226,7 @@
               </a:rPr>
               <a:t>ビルド</a:t>
             </a:r>
-            <a:endParaRPr lang="en-US" sz="1500" dirty="0"/>
+            <a:endParaRPr lang="en-US" sz="1400" dirty="0"/>
           </a:p>
         </p:txBody>
       </p:sp>
@@ -12262,8 +16238,8 @@
         </p:nvSpPr>
         <p:spPr>
           <a:xfrm>
-            <a:off x="4297680" y="3118104"/>
-            <a:ext cx="7132320" cy="758952"/>
+            <a:off x="4297680" y="2880360"/>
+            <a:ext cx="7132320" cy="640080"/>
           </a:xfrm>
           <a:prstGeom prst="rect">
             <a:avLst/>
@@ -12282,7 +16258,7 @@
               <a:buNone/>
             </a:pPr>
             <a:r>
-              <a:rPr lang="en-US" sz="1350" dirty="0">
+              <a:rPr lang="en-US" sz="1250" dirty="0">
                 <a:solidFill>
                   <a:srgbClr val="E8EBEF"/>
                 </a:solidFill>
@@ -12292,7 +16268,7 @@
               </a:rPr>
               <a:t>前処理→コンパイル→アセンブル→リンク→ロード。リンクで未解決の番地が埋まる</a:t>
             </a:r>
-            <a:endParaRPr lang="en-US" sz="1350" dirty="0"/>
+            <a:endParaRPr lang="en-US" sz="1250" dirty="0"/>
           </a:p>
         </p:txBody>
       </p:sp>
@@ -12304,7 +16280,7 @@
         </p:nvSpPr>
         <p:spPr>
           <a:xfrm>
-            <a:off x="822960" y="4023360"/>
+            <a:off x="822960" y="3666744"/>
             <a:ext cx="3291840" cy="320040"/>
           </a:xfrm>
           <a:prstGeom prst="rect">
@@ -12321,7 +16297,7 @@
               <a:buNone/>
             </a:pPr>
             <a:r>
-              <a:rPr lang="en-US" sz="1500" b="1" dirty="0">
+              <a:rPr lang="en-US" sz="1400" b="1" dirty="0">
                 <a:solidFill>
                   <a:srgbClr val="6AB0F3"/>
                 </a:solidFill>
@@ -12331,7 +16307,7 @@
               </a:rPr>
               <a:t>メモリ配置</a:t>
             </a:r>
-            <a:endParaRPr lang="en-US" sz="1500" dirty="0"/>
+            <a:endParaRPr lang="en-US" sz="1400" dirty="0"/>
           </a:p>
         </p:txBody>
       </p:sp>
@@ -12343,8 +16319,8 @@
         </p:nvSpPr>
         <p:spPr>
           <a:xfrm>
-            <a:off x="4297680" y="3986784"/>
-            <a:ext cx="7132320" cy="758952"/>
+            <a:off x="4297680" y="3630168"/>
+            <a:ext cx="7132320" cy="640080"/>
           </a:xfrm>
           <a:prstGeom prst="rect">
             <a:avLst/>
@@ -12363,7 +16339,7 @@
               <a:buNone/>
             </a:pPr>
             <a:r>
-              <a:rPr lang="en-US" sz="1350" dirty="0">
+              <a:rPr lang="en-US" sz="1250" dirty="0">
                 <a:solidFill>
                   <a:srgbClr val="E8EBEF"/>
                 </a:solidFill>
@@ -12373,7 +16349,7 @@
               </a:rPr>
               <a:t>テキスト・データ・ヒープ・スタック。この配置がバグの性質も攻撃の成立も決めている</a:t>
             </a:r>
-            <a:endParaRPr lang="en-US" sz="1350" dirty="0"/>
+            <a:endParaRPr lang="en-US" sz="1250" dirty="0"/>
           </a:p>
         </p:txBody>
       </p:sp>
@@ -12385,7 +16361,7 @@
         </p:nvSpPr>
         <p:spPr>
           <a:xfrm>
-            <a:off x="822960" y="4892040"/>
+            <a:off x="822960" y="4416552"/>
             <a:ext cx="3291840" cy="320040"/>
           </a:xfrm>
           <a:prstGeom prst="rect">
@@ -12402,7 +16378,7 @@
               <a:buNone/>
             </a:pPr>
             <a:r>
-              <a:rPr lang="en-US" sz="1500" b="1" dirty="0">
+              <a:rPr lang="en-US" sz="1400" b="1" dirty="0">
                 <a:solidFill>
                   <a:srgbClr val="6AB0F3"/>
                 </a:solidFill>
@@ -12412,7 +16388,7 @@
               </a:rPr>
               <a:t>言語の選択</a:t>
             </a:r>
-            <a:endParaRPr lang="en-US" sz="1500" dirty="0"/>
+            <a:endParaRPr lang="en-US" sz="1400" dirty="0"/>
           </a:p>
         </p:txBody>
       </p:sp>
@@ -12424,8 +16400,8 @@
         </p:nvSpPr>
         <p:spPr>
           <a:xfrm>
-            <a:off x="4297680" y="4855464"/>
-            <a:ext cx="7132320" cy="758952"/>
+            <a:off x="4297680" y="4379976"/>
+            <a:ext cx="7132320" cy="640080"/>
           </a:xfrm>
           <a:prstGeom prst="rect">
             <a:avLst/>
@@ -12444,7 +16420,7 @@
               <a:buNone/>
             </a:pPr>
             <a:r>
-              <a:rPr lang="en-US" sz="1350" dirty="0">
+              <a:rPr lang="en-US" sz="1250" dirty="0">
                 <a:solidFill>
                   <a:srgbClr val="E8EBEF"/>
                 </a:solidFill>
@@ -12454,13 +16430,94 @@
               </a:rPr>
               <a:t>生態系・性能要件・保守性で決まる。「良い言語」という問いは立たない</a:t>
             </a:r>
-            <a:endParaRPr lang="en-US" sz="1350" dirty="0"/>
+            <a:endParaRPr lang="en-US" sz="1250" dirty="0"/>
           </a:p>
         </p:txBody>
       </p:sp>
       <p:sp>
         <p:nvSpPr>
           <p:cNvPr id="13" name="Text 11"/>
+          <p:cNvSpPr/>
+          <p:nvPr/>
+        </p:nvSpPr>
+        <p:spPr>
+          <a:xfrm>
+            <a:off x="822960" y="5166360"/>
+            <a:ext cx="3291840" cy="320040"/>
+          </a:xfrm>
+          <a:prstGeom prst="rect">
+            <a:avLst/>
+          </a:prstGeom>
+          <a:noFill/>
+          <a:ln/>
+        </p:spPr>
+        <p:txBody>
+          <a:bodyPr wrap="square" lIns="0" tIns="0" rIns="0" bIns="0" rtlCol="0" anchor="ctr"/>
+          <a:lstStyle/>
+          <a:p>
+            <a:pPr indent="0" marL="0">
+              <a:buNone/>
+            </a:pPr>
+            <a:r>
+              <a:rPr lang="en-US" sz="1400" b="1" dirty="0">
+                <a:solidFill>
+                  <a:srgbClr val="6AB0F3"/>
+                </a:solidFill>
+                <a:latin typeface="Yu Gothic" pitchFamily="34" charset="0"/>
+                <a:ea typeface="Yu Gothic" pitchFamily="34" charset="-122"/>
+                <a:cs typeface="Yu Gothic" pitchFamily="34" charset="-120"/>
+              </a:rPr>
+              <a:t>バージョン管理とテスト</a:t>
+            </a:r>
+            <a:endParaRPr lang="en-US" sz="1400" dirty="0"/>
+          </a:p>
+        </p:txBody>
+      </p:sp>
+      <p:sp>
+        <p:nvSpPr>
+          <p:cNvPr id="14" name="Text 12"/>
+          <p:cNvSpPr/>
+          <p:nvPr/>
+        </p:nvSpPr>
+        <p:spPr>
+          <a:xfrm>
+            <a:off x="4297680" y="5129784"/>
+            <a:ext cx="7132320" cy="640080"/>
+          </a:xfrm>
+          <a:prstGeom prst="rect">
+            <a:avLst/>
+          </a:prstGeom>
+          <a:noFill/>
+          <a:ln/>
+        </p:spPr>
+        <p:txBody>
+          <a:bodyPr wrap="square" lIns="0" tIns="0" rIns="0" bIns="0" rtlCol="0" anchor="t"/>
+          <a:lstStyle/>
+          <a:p>
+            <a:pPr indent="0" marL="0">
+              <a:lnSpc>
+                <a:spcPts val="1900"/>
+              </a:lnSpc>
+              <a:buNone/>
+            </a:pPr>
+            <a:r>
+              <a:rPr lang="en-US" sz="1250" dirty="0">
+                <a:solidFill>
+                  <a:srgbClr val="E8EBEF"/>
+                </a:solidFill>
+                <a:latin typeface="Yu Gothic" pitchFamily="34" charset="0"/>
+                <a:ea typeface="Yu Gothic" pitchFamily="34" charset="-122"/>
+                <a:cs typeface="Yu Gothic" pitchFamily="34" charset="-120"/>
+              </a:rPr>
+              <a:t>テストはバグの不在を示せない。第1回の迂回策3つが、テスト・型・レビューに対応する</a:t>
+            </a:r>
+            <a:endParaRPr lang="en-US" sz="1250" dirty="0"/>
+          </a:p>
+        </p:txBody>
+      </p:sp>
+      <p:sp>
+        <p:nvSpPr>
+          <p:cNvPr id="15" name="Text 13"/>
           <p:cNvSpPr/>
           <p:nvPr/>
         </p:nvSpPr>
@@ -12735,7 +16792,7 @@
               <a:buNone/>
             </a:pPr>
             <a:r>
-              <a:rPr lang="en-US" sz="1600" b="1" dirty="0">
+              <a:rPr lang="en-US" sz="1500" b="1" dirty="0">
                 <a:solidFill>
                   <a:srgbClr val="16191D"/>
                 </a:solidFill>
@@ -12749,7 +16806,7 @@
               <a:buNone/>
             </a:pPr>
             <a:r>
-              <a:rPr lang="en-US" sz="1400" dirty="0">
+              <a:rPr lang="en-US" sz="1300" dirty="0">
                 <a:solidFill>
                   <a:srgbClr val="5F6672"/>
                 </a:solidFill>
@@ -12759,7 +16816,7 @@
               </a:rPr>
               <a:t>　の関係を説明できる</a:t>
             </a:r>
-            <a:endParaRPr lang="en-US" sz="1600" dirty="0"/>
+            <a:endParaRPr lang="en-US" sz="1500" dirty="0"/>
           </a:p>
         </p:txBody>
       </p:sp>
@@ -12771,7 +16828,7 @@
         </p:nvSpPr>
         <p:spPr>
           <a:xfrm>
-            <a:off x="777240" y="2624328"/>
+            <a:off x="777240" y="2496312"/>
             <a:ext cx="457200" cy="457200"/>
           </a:xfrm>
           <a:prstGeom prst="ellipse">
@@ -12796,7 +16853,7 @@
         </p:nvSpPr>
         <p:spPr>
           <a:xfrm>
-            <a:off x="777240" y="2624328"/>
+            <a:off x="777240" y="2496312"/>
             <a:ext cx="457200" cy="457200"/>
           </a:xfrm>
           <a:prstGeom prst="rect">
@@ -12835,7 +16892,7 @@
         </p:nvSpPr>
         <p:spPr>
           <a:xfrm>
-            <a:off x="1417320" y="2642616"/>
+            <a:off x="1417320" y="2514600"/>
             <a:ext cx="9966960" cy="457200"/>
           </a:xfrm>
           <a:prstGeom prst="rect">
@@ -12852,7 +16909,7 @@
               <a:buNone/>
             </a:pPr>
             <a:r>
-              <a:rPr lang="en-US" sz="1600" b="1" dirty="0">
+              <a:rPr lang="en-US" sz="1500" b="1" dirty="0">
                 <a:solidFill>
                   <a:srgbClr val="16191D"/>
                 </a:solidFill>
@@ -12866,7 +16923,7 @@
               <a:buNone/>
             </a:pPr>
             <a:r>
-              <a:rPr lang="en-US" sz="1400" dirty="0">
+              <a:rPr lang="en-US" sz="1300" dirty="0">
                 <a:solidFill>
                   <a:srgbClr val="5F6672"/>
                 </a:solidFill>
@@ -12876,7 +16933,7 @@
               </a:rPr>
               <a:t>　の違いと、それぞれの利点を説明できる</a:t>
             </a:r>
-            <a:endParaRPr lang="en-US" sz="1600" dirty="0"/>
+            <a:endParaRPr lang="en-US" sz="1500" dirty="0"/>
           </a:p>
         </p:txBody>
       </p:sp>
@@ -12888,7 +16945,7 @@
         </p:nvSpPr>
         <p:spPr>
           <a:xfrm>
-            <a:off x="777240" y="3483864"/>
+            <a:off x="777240" y="3227832"/>
             <a:ext cx="457200" cy="457200"/>
           </a:xfrm>
           <a:prstGeom prst="ellipse">
@@ -12913,7 +16970,7 @@
         </p:nvSpPr>
         <p:spPr>
           <a:xfrm>
-            <a:off x="777240" y="3483864"/>
+            <a:off x="777240" y="3227832"/>
             <a:ext cx="457200" cy="457200"/>
           </a:xfrm>
           <a:prstGeom prst="rect">
@@ -12952,7 +17009,7 @@
         </p:nvSpPr>
         <p:spPr>
           <a:xfrm>
-            <a:off x="1417320" y="3502152"/>
+            <a:off x="1417320" y="3246120"/>
             <a:ext cx="9966960" cy="457200"/>
           </a:xfrm>
           <a:prstGeom prst="rect">
@@ -12969,7 +17026,7 @@
               <a:buNone/>
             </a:pPr>
             <a:r>
-              <a:rPr lang="en-US" sz="1600" b="1" dirty="0">
+              <a:rPr lang="en-US" sz="1500" b="1" dirty="0">
                 <a:solidFill>
                   <a:srgbClr val="16191D"/>
                 </a:solidFill>
@@ -12983,7 +17040,7 @@
               <a:buNone/>
             </a:pPr>
             <a:r>
-              <a:rPr lang="en-US" sz="1400" dirty="0">
+              <a:rPr lang="en-US" sz="1300" dirty="0">
                 <a:solidFill>
                   <a:srgbClr val="5F6672"/>
                 </a:solidFill>
@@ -12993,7 +17050,7 @@
               </a:rPr>
               <a:t>　を説明できる</a:t>
             </a:r>
-            <a:endParaRPr lang="en-US" sz="1600" dirty="0"/>
+            <a:endParaRPr lang="en-US" sz="1500" dirty="0"/>
           </a:p>
         </p:txBody>
       </p:sp>
@@ -13005,7 +17062,7 @@
         </p:nvSpPr>
         <p:spPr>
           <a:xfrm>
-            <a:off x="777240" y="4343400"/>
+            <a:off x="777240" y="3959352"/>
             <a:ext cx="457200" cy="457200"/>
           </a:xfrm>
           <a:prstGeom prst="ellipse">
@@ -13030,7 +17087,7 @@
         </p:nvSpPr>
         <p:spPr>
           <a:xfrm>
-            <a:off x="777240" y="4343400"/>
+            <a:off x="777240" y="3959352"/>
             <a:ext cx="457200" cy="457200"/>
           </a:xfrm>
           <a:prstGeom prst="rect">
@@ -13069,7 +17126,7 @@
         </p:nvSpPr>
         <p:spPr>
           <a:xfrm>
-            <a:off x="1417320" y="4361688"/>
+            <a:off x="1417320" y="3977640"/>
             <a:ext cx="9966960" cy="457200"/>
           </a:xfrm>
           <a:prstGeom prst="rect">
@@ -13086,7 +17143,7 @@
               <a:buNone/>
             </a:pPr>
             <a:r>
-              <a:rPr lang="en-US" sz="1600" b="1" dirty="0">
+              <a:rPr lang="en-US" sz="1500" b="1" dirty="0">
                 <a:solidFill>
                   <a:srgbClr val="16191D"/>
                 </a:solidFill>
@@ -13100,7 +17157,7 @@
               <a:buNone/>
             </a:pPr>
             <a:r>
-              <a:rPr lang="en-US" sz="1400" dirty="0">
+              <a:rPr lang="en-US" sz="1300" dirty="0">
                 <a:solidFill>
                   <a:srgbClr val="5F6672"/>
                 </a:solidFill>
@@ -13110,7 +17167,7 @@
               </a:rPr>
               <a:t>　が何を解決しているか説明できる</a:t>
             </a:r>
-            <a:endParaRPr lang="en-US" sz="1600" dirty="0"/>
+            <a:endParaRPr lang="en-US" sz="1500" dirty="0"/>
           </a:p>
         </p:txBody>
       </p:sp>
@@ -13122,7 +17179,7 @@
         </p:nvSpPr>
         <p:spPr>
           <a:xfrm>
-            <a:off x="777240" y="5202936"/>
+            <a:off x="777240" y="4690872"/>
             <a:ext cx="457200" cy="457200"/>
           </a:xfrm>
           <a:prstGeom prst="ellipse">
@@ -13147,7 +17204,7 @@
         </p:nvSpPr>
         <p:spPr>
           <a:xfrm>
-            <a:off x="777240" y="5202936"/>
+            <a:off x="777240" y="4690872"/>
             <a:ext cx="457200" cy="457200"/>
           </a:xfrm>
           <a:prstGeom prst="rect">
@@ -13186,7 +17243,7 @@
         </p:nvSpPr>
         <p:spPr>
           <a:xfrm>
-            <a:off x="1417320" y="5221224"/>
+            <a:off x="1417320" y="4709160"/>
             <a:ext cx="9966960" cy="457200"/>
           </a:xfrm>
           <a:prstGeom prst="rect">
@@ -13203,7 +17260,7 @@
               <a:buNone/>
             </a:pPr>
             <a:r>
-              <a:rPr lang="en-US" sz="1600" b="1" dirty="0">
+              <a:rPr lang="en-US" sz="1500" b="1" dirty="0">
                 <a:solidFill>
                   <a:srgbClr val="16191D"/>
                 </a:solidFill>
@@ -13217,7 +17274,7 @@
               <a:buNone/>
             </a:pPr>
             <a:r>
-              <a:rPr lang="en-US" sz="1400" dirty="0">
+              <a:rPr lang="en-US" sz="1300" dirty="0">
                 <a:solidFill>
                   <a:srgbClr val="5F6672"/>
                 </a:solidFill>
@@ -13227,7 +17284,124 @@
               </a:rPr>
               <a:t>　を分類の軸で整理できる</a:t>
             </a:r>
-            <a:endParaRPr lang="en-US" sz="1600" dirty="0"/>
+            <a:endParaRPr lang="en-US" sz="1500" dirty="0"/>
+          </a:p>
+        </p:txBody>
+      </p:sp>
+      <p:sp>
+        <p:nvSpPr>
+          <p:cNvPr id="20" name="Shape 18"/>
+          <p:cNvSpPr/>
+          <p:nvPr/>
+        </p:nvSpPr>
+        <p:spPr>
+          <a:xfrm>
+            <a:off x="777240" y="5422392"/>
+            <a:ext cx="457200" cy="457200"/>
+          </a:xfrm>
+          <a:prstGeom prst="ellipse">
+            <a:avLst/>
+          </a:prstGeom>
+          <a:solidFill>
+            <a:srgbClr val="D9E6F4"/>
+          </a:solidFill>
+          <a:ln w="15240">
+            <a:solidFill>
+              <a:srgbClr val="0B5CAD"/>
+            </a:solidFill>
+            <a:prstDash val="solid"/>
+          </a:ln>
+        </p:spPr>
+      </p:sp>
+      <p:sp>
+        <p:nvSpPr>
+          <p:cNvPr id="21" name="Text 19"/>
+          <p:cNvSpPr/>
+          <p:nvPr/>
+        </p:nvSpPr>
+        <p:spPr>
+          <a:xfrm>
+            <a:off x="777240" y="5422392"/>
+            <a:ext cx="457200" cy="457200"/>
+          </a:xfrm>
+          <a:prstGeom prst="rect">
+            <a:avLst/>
+          </a:prstGeom>
+          <a:noFill/>
+          <a:ln/>
+        </p:spPr>
+        <p:txBody>
+          <a:bodyPr wrap="square" lIns="0" tIns="0" rIns="0" bIns="0" rtlCol="0" anchor="ctr"/>
+          <a:lstStyle/>
+          <a:p>
+            <a:pPr algn="ctr" indent="0" marL="0">
+              <a:buNone/>
+            </a:pPr>
+            <a:r>
+              <a:rPr lang="en-US" sz="1400" b="1" dirty="0">
+                <a:solidFill>
+                  <a:srgbClr val="0B5CAD"/>
+                </a:solidFill>
+                <a:latin typeface="Yu Gothic" pitchFamily="34" charset="0"/>
+                <a:ea typeface="Yu Gothic" pitchFamily="34" charset="-122"/>
+                <a:cs typeface="Yu Gothic" pitchFamily="34" charset="-120"/>
+              </a:rPr>
+              <a:t>6</a:t>
+            </a:r>
+            <a:endParaRPr lang="en-US" sz="1400" dirty="0"/>
+          </a:p>
+        </p:txBody>
+      </p:sp>
+      <p:sp>
+        <p:nvSpPr>
+          <p:cNvPr id="22" name="Text 20"/>
+          <p:cNvSpPr/>
+          <p:nvPr/>
+        </p:nvSpPr>
+        <p:spPr>
+          <a:xfrm>
+            <a:off x="1417320" y="5440680"/>
+            <a:ext cx="9966960" cy="457200"/>
+          </a:xfrm>
+          <a:prstGeom prst="rect">
+            <a:avLst/>
+          </a:prstGeom>
+          <a:noFill/>
+          <a:ln/>
+        </p:spPr>
+        <p:txBody>
+          <a:bodyPr wrap="square" lIns="0" tIns="0" rIns="0" bIns="0" rtlCol="0" anchor="ctr"/>
+          <a:lstStyle/>
+          <a:p>
+            <a:pPr indent="0" marL="0">
+              <a:buNone/>
+            </a:pPr>
+            <a:r>
+              <a:rPr lang="en-US" sz="1500" b="1" dirty="0">
+                <a:solidFill>
+                  <a:srgbClr val="16191D"/>
+                </a:solidFill>
+                <a:latin typeface="Yu Gothic" pitchFamily="34" charset="0"/>
+                <a:ea typeface="Yu Gothic" pitchFamily="34" charset="-122"/>
+                <a:cs typeface="Yu Gothic" pitchFamily="34" charset="-120"/>
+              </a:rPr>
+              <a:t>バージョン管理とテスト</a:t>
+            </a:r>
+            <a:pPr indent="0" marL="0">
+              <a:buNone/>
+            </a:pPr>
+            <a:r>
+              <a:rPr lang="en-US" sz="1300" dirty="0">
+                <a:solidFill>
+                  <a:srgbClr val="5F6672"/>
+                </a:solidFill>
+                <a:latin typeface="Yu Gothic" pitchFamily="34" charset="0"/>
+                <a:ea typeface="Yu Gothic" pitchFamily="34" charset="-122"/>
+                <a:cs typeface="Yu Gothic" pitchFamily="34" charset="-120"/>
+              </a:rPr>
+              <a:t>　が何を解決し、何を保証しないかを説明できる</a:t>
+            </a:r>
+            <a:endParaRPr lang="en-US" sz="1500" dirty="0"/>
           </a:p>
         </p:txBody>
       </p:sp>

--- a/slides/第04回_プログラムが動くまで.pptx
+++ b/slides/第04回_プログラムが動くまで.pptx
@@ -15478,7 +15478,7 @@
                 <a:ea typeface="Courier New" pitchFamily="34" charset="-122"/>
                 <a:cs typeface="Courier New" pitchFamily="34" charset="-120"/>
               </a:rPr>
-              <a:t>4-2</a:t>
+              <a:t>4-3</a:t>
             </a:r>
             <a:endParaRPr lang="en-US" sz="1300" dirty="0"/>
           </a:p>
@@ -15586,7 +15586,7 @@
                 <a:ea typeface="Courier New" pitchFamily="34" charset="-122"/>
                 <a:cs typeface="Courier New" pitchFamily="34" charset="-120"/>
               </a:rPr>
-              <a:t>4-3</a:t>
+              <a:t>4-4</a:t>
             </a:r>
             <a:endParaRPr lang="en-US" sz="1300" dirty="0"/>
           </a:p>
@@ -15694,7 +15694,7 @@
                 <a:ea typeface="Courier New" pitchFamily="34" charset="-122"/>
                 <a:cs typeface="Courier New" pitchFamily="34" charset="-120"/>
               </a:rPr>
-              <a:t>4-4</a:t>
+              <a:t>4-5</a:t>
             </a:r>
             <a:endParaRPr lang="en-US" sz="1300" dirty="0"/>
           </a:p>
@@ -15802,7 +15802,7 @@
                 <a:ea typeface="Courier New" pitchFamily="34" charset="-122"/>
                 <a:cs typeface="Courier New" pitchFamily="34" charset="-120"/>
               </a:rPr>
-              <a:t>4-5</a:t>
+              <a:t>4-6</a:t>
             </a:r>
             <a:endParaRPr lang="en-US" sz="1300" dirty="0"/>
           </a:p>
@@ -15910,7 +15910,7 @@
                 <a:ea typeface="Courier New" pitchFamily="34" charset="-122"/>
                 <a:cs typeface="Courier New" pitchFamily="34" charset="-120"/>
               </a:rPr>
-              <a:t>4-6</a:t>
+              <a:t>4-7</a:t>
             </a:r>
             <a:endParaRPr lang="en-US" sz="1300" dirty="0"/>
           </a:p>
